--- a/First_Review_UG_Project_Presentation.pptx
+++ b/First_Review_UG_Project_Presentation.pptx
@@ -517,12 +517,12 @@
           <a:lstStyle/>
           <a:p>
             <a:r>
-              <a:t>SPEAKER NOTES (SLIDE 1):</a:t>
-            </a:r>
-          </a:p>
-          <a:p>
-            <a:r>
-              <a:t>Good morning respected panel members and evaluators. We are team Deva S, Athithi A, and Arthi S. Today, we are presenting our Phase-I First Review on the project: 'AI-Powered Autonomous Document Extraction and Verification Engine for Indian E-Governance Portals'. Our work addresses manual transcription bottlenecks in citizen registration, specifically ECI Form 6, through localized edge AI and computer vision.</a:t>
+              <a:t>SIMPLE EXPLANATION FOR STAFF:</a:t>
+            </a:r>
+          </a:p>
+          <a:p>
+            <a:r>
+              <a:t>'Good morning staff. We are Deva, Athithi, and Arthi. Our project is an AI tool that helps people fill government web forms easily. Today, when applying for a Voter ID card (Form 6), people have to type over 20 details by hand from their Aadhaar card. In our project, the user simply uploads their Aadhaar card or PAN card, and our AI reads all the details, cuts out their passport photo, and fills the entire form automatically in just a few seconds.'</a:t>
             </a:r>
           </a:p>
         </p:txBody>
@@ -592,12 +592,12 @@
           <a:lstStyle/>
           <a:p>
             <a:r>
-              <a:t>SPEAKER NOTES (SLIDE 10):</a:t>
-            </a:r>
-          </a:p>
-          <a:p>
-            <a:r>
-              <a:t>Our proposed system introduces a complete end-to-end transformation. The citizen simply drops their Aadhaar front and back cards or PDF into the browser. Within 25 seconds, our FastAPI backend processes the document through EasyOCR, extracts the applicant's photograph using the YuNet neural network, extracts structured data using local Llama 3.2, runs our regex sanity filters, and automatically populates the complete Form 6 interface ready for one-click submission.</a:t>
+              <a:t>SIMPLE EXPLANATION FOR STAFF:</a:t>
+            </a:r>
+          </a:p>
+          <a:p>
+            <a:r>
+              <a:t>'In our proposed system, the user just drops their ID card images or PDF on the website. In less than 25 seconds, our Python backend reads the text, local Llama 3.2 AI sorts the fields, YuNet cuts out the passport photo, our cleaning rules fix the address and Aadhaar number, and every field in Form 6 is filled automatically. The user just clicks Submit.'</a:t>
             </a:r>
           </a:p>
         </p:txBody>
@@ -667,12 +667,12 @@
           <a:lstStyle/>
           <a:p>
             <a:r>
-              <a:t>SPEAKER NOTES (SLIDE 11):</a:t>
-            </a:r>
-          </a:p>
-          <a:p>
-            <a:r>
-              <a:t>This slide presents our 4-stage pipeline architecture. Phase 1 handles multi-document rendering at 300 DPI. Phase 2 runs concurrent EasyOCR and YuNet neural face detection. Phase 3 passes the concatenated OCR text into our local Llama 3.2 model for semantic JSON structuring. Finally, Phase 4 executes our deterministic normalization rules to isolate the 12-digit Aadhaar UID and cleanly map every field directly into the live DOM.</a:t>
+              <a:t>SIMPLE EXPLANATION FOR STAFF:</a:t>
+            </a:r>
+          </a:p>
+          <a:p>
+            <a:r>
+              <a:t>'Here is the 4-step workflow: Step 1: User uploads files. Step 2: EasyOCR reads the text, and YuNet AI finds and crops the face. Step 3: Local Llama 3.2 AI figures out which word is the name, which is the father's name, and which is the address. Step 4: Our Python code cleans up the data and fills the Form 6 inputs automatically.'</a:t>
             </a:r>
           </a:p>
         </p:txBody>
@@ -742,12 +742,12 @@
           <a:lstStyle/>
           <a:p>
             <a:r>
-              <a:t>SPEAKER NOTES (SLIDE 12):</a:t>
-            </a:r>
-          </a:p>
-          <a:p>
-            <a:r>
-              <a:t>Here is our complete technical stack. Notice that every single tool was chosen with zero-cloud dependency in mind. Python 3.12 and FastAPI power the backend, EasyOCR and OpenCV YuNet handle visual perception, Meta Llama 3.2 running on Ollama handles linguistic reasoning, and pure Vanilla ES6 JavaScript manages the responsive frontend without heavy frameworks.</a:t>
+              <a:t>SIMPLE EXPLANATION FOR STAFF:</a:t>
+            </a:r>
+          </a:p>
+          <a:p>
+            <a:r>
+              <a:t>'Staff, for our technologies: We used Python with FastAPI for the backend. We used EasyOCR to read text from cards. We used Meta's Llama 3.2 model running locally via Ollama to sort the words into fields without needing internet. We used OpenCV's YuNet model to detect the face and crop the passport photo. And our frontend uses simple, clean HTML and JavaScript.'</a:t>
             </a:r>
           </a:p>
         </p:txBody>
@@ -817,12 +817,12 @@
           <a:lstStyle/>
           <a:p>
             <a:r>
-              <a:t>SPEAKER NOTES (SLIDE 13):</a:t>
-            </a:r>
-          </a:p>
-          <a:p>
-            <a:r>
-              <a:t>We are proud to report that for Phase-I, we have already built and thoroughly validated a fully working end-to-end prototype. We successfully solved four challenging real-world problems: multi-file upload management, deep learning face cropping without grabbing text headers, clean 12-digit Aadhaar UID extraction despite 14-digit enrolment numbers, and clean address separation without capturing UIDAI legal disclaimer text.</a:t>
+              <a:t>SIMPLE EXPLANATION FOR STAFF:</a:t>
+            </a:r>
+          </a:p>
+          <a:p>
+            <a:r>
+              <a:t>'For Phase 1, we have already built a fully working prototype! We tested it on real Aadhaar documents. We successfully solved four tough problems: 1. Uploading both front and back images together. 2. Cropping the face photo cleanly without including text. 3. Picking the true 12-digit Aadhaar number instead of the 14-digit enrolment number. And 4. Splitting the door number and street name cleanly while removing legal disclaimer text. All code is committed on GitHub.'</a:t>
             </a:r>
           </a:p>
         </p:txBody>
@@ -892,12 +892,12 @@
           <a:lstStyle/>
           <a:p>
             <a:r>
-              <a:t>SPEAKER NOTES (SLIDE 14):</a:t>
-            </a:r>
-          </a:p>
-          <a:p>
-            <a:r>
-              <a:t>Here are the expected outcomes. By replacing manual typing with AI perception and semantic parsing, form filling duration drops from over 12 minutes to under 30 seconds—a 90% speedup. Error rates drop below 2%, while ensuring 100% adherence to India's DPDPA 2023 data sovereignty mandate.</a:t>
+              <a:t>SIMPLE EXPLANATION FOR STAFF:</a:t>
+            </a:r>
+          </a:p>
+          <a:p>
+            <a:r>
+              <a:t>'The expected benefits are very clear: 1. 90% time saved—filling a form takes under 30 seconds instead of 15 minutes. 2. Typing mistakes drop to under 2%. 3. Total privacy—no citizen data is sent over the internet. And 4. The same system can be used for PAN cards, Driving Licenses, and college admission forms in the future.'</a:t>
             </a:r>
           </a:p>
         </p:txBody>
@@ -967,12 +967,12 @@
           <a:lstStyle/>
           <a:p>
             <a:r>
-              <a:t>SPEAKER NOTES (SLIDE 15):</a:t>
-            </a:r>
-          </a:p>
-          <a:p>
-            <a:r>
-              <a:t>Our project roadmap spans three structured phases. Having successfully completed Phase I, Phase II will focus on expanding support to PAN cards and Driving Licenses, alongside field-level confidence badges. Phase III will package this engine into a seamless Chrome/Firefox browser extension that directly autofills live government web portals, culminating in empirical benchmarking.</a:t>
+              <a:t>SIMPLE EXPLANATION FOR STAFF:</a:t>
+            </a:r>
+          </a:p>
+          <a:p>
+            <a:r>
+              <a:t>'Here is our 3-phase plan: Phase 1 is completed—we built the core working prototype for Aadhaar and Form 6. In Phase 2 for the Mid Review, we will add PAN cards and Driving Licenses, and add green confidence checkmarks. In Phase 3 for the Final Review, we will turn this into a Chrome Extension that directly fills the live government website with one click.'</a:t>
             </a:r>
           </a:p>
         </p:txBody>
@@ -1042,12 +1042,12 @@
           <a:lstStyle/>
           <a:p>
             <a:r>
-              <a:t>SPEAKER NOTES (SLIDE 16):</a:t>
-            </a:r>
-          </a:p>
-          <a:p>
-            <a:r>
-              <a:t>In conclusion, our project demonstrates that cutting-edge Small Language Models and Deep Learning computer vision can be deployed directly on citizen hardware to protect privacy while eliminating clerical friction in Indian e-governance. We have a working prototype, a verified repository, and a clear roadmap for Phase II. Thank you, and we welcome your questions and feedback.</a:t>
+              <a:t>SIMPLE EXPLANATION FOR STAFF:</a:t>
+            </a:r>
+          </a:p>
+          <a:p>
+            <a:r>
+              <a:t>'In conclusion: our project makes filling government forms fast, simple, and completely private. We have already built a working system that takes an ID card, reads the text, crops the photo, and fills Form 6 in 20 seconds. We are ready for Phase 2. Thank you staff, we are happy to answer any questions!'</a:t>
             </a:r>
           </a:p>
         </p:txBody>
@@ -1117,12 +1117,12 @@
           <a:lstStyle/>
           <a:p>
             <a:r>
-              <a:t>SPEAKER NOTES (SLIDE 2):</a:t>
-            </a:r>
-          </a:p>
-          <a:p>
-            <a:r>
-              <a:t>Our presentation is structured into two coherent halves. First, we establish the domain context, background, formal problem statement, and literature review. Second, we introduce our proposed local-AI architecture, present the functional prototype and partial results we have already implemented and verified, followed by the work plan.</a:t>
+              <a:t>SIMPLE EXPLANATION FOR STAFF:</a:t>
+            </a:r>
+          </a:p>
+          <a:p>
+            <a:r>
+              <a:t>'Here is our presentation flow. First, we explain why filling government forms is difficult today, what problems people face, and what other researchers have done. Then, we explain our system, the technologies we used, the working prototype we have already built, and our plan for the next review.'</a:t>
             </a:r>
           </a:p>
         </p:txBody>
@@ -1192,12 +1192,12 @@
           <a:lstStyle/>
           <a:p>
             <a:r>
-              <a:t>SPEAKER NOTES (SLIDE 3):</a:t>
-            </a:r>
-          </a:p>
-          <a:p>
-            <a:r>
-              <a:t>India's digital public infrastructure is the largest in the world. However, when a 18-year-old citizen applies for a voter ID using Form 6, they are still forced to manually type in their 12-digit Aadhaar number, split their house number and street name, calculate dropdown relations, and crop a passport photograph using external graphic software. Our project introduces a zero-data-leakage autonomous pipeline running locally on the user's machine to completely bridge this gap.</a:t>
+              <a:t>SIMPLE EXPLANATION FOR STAFF:</a:t>
+            </a:r>
+          </a:p>
+          <a:p>
+            <a:r>
+              <a:t>'Staff, in simple terms: whenever anyone applies for a Voter ID card, they must sit with their Aadhaar card and type every single box by hand. They also have to open Paint or Photoshop to crop their passport photo. In our project, the user simply drops their Aadhaar card on the screen. Our AI automatically reads the text, cuts the photo, and fills all boxes in 20 seconds. It works completely offline on the computer, so personal data is safe.'</a:t>
             </a:r>
           </a:p>
         </p:txBody>
@@ -1267,12 +1267,12 @@
           <a:lstStyle/>
           <a:p>
             <a:r>
-              <a:t>SPEAKER NOTES (SLIDE 4):</a:t>
-            </a:r>
-          </a:p>
-          <a:p>
-            <a:r>
-              <a:t>During our initial study, we observed that roughly 1 in 5 voter registration applications encounter administrative bottlenecks. The primary culprit is not fraudulent intent, but simple clerical typos—like transcribing '6120 9678 1604' incorrectly, or placing street names inside the door number field. Furthermore, rural citizens often share unencrypted identity cards with third-party operators at browsing centers, exposing critical Personally Identifiable Information.</a:t>
+              <a:t>SIMPLE EXPLANATION FOR STAFF:</a:t>
+            </a:r>
+          </a:p>
+          <a:p>
+            <a:r>
+              <a:t>'Every year, more than 2 crore young citizens turn 18 and apply for Voter ID cards using Form 6. But around 20% of applications have issues because people type their birth date in the wrong format or make spelling mistakes. Also, people who don't have computers go to internet cafes, pay money, and leave copies of their Aadhaar cards on shared computers. This is why we wanted to build this solution.'</a:t>
             </a:r>
           </a:p>
         </p:txBody>
@@ -1342,12 +1342,12 @@
           <a:lstStyle/>
           <a:p>
             <a:r>
-              <a:t>SPEAKER NOTES (SLIDE 5):</a:t>
-            </a:r>
-          </a:p>
-          <a:p>
-            <a:r>
-              <a:t>We have formulated four core challenges in our problem statement: First, clerical cognitive overhead. Second, severe PII privacy vulnerabilities when documents leave the client machine. Third, high structural noise in Indian identity documents where legal disclaimers and 14-digit enrolment numbers confuse generic AI parsers. And fourth, the complete lack of automated face isolation on existing portals.</a:t>
+              <a:t>SIMPLE EXPLANATION FOR STAFF:</a:t>
+            </a:r>
+          </a:p>
+          <a:p>
+            <a:r>
+              <a:t>'Staff, there are four main problems: First, too much typing leads to mistakes. Second, uploading private Aadhaar cards to commercial cloud APIs is dangerous for privacy. Third, Aadhaar cards have messy text like enrolment numbers and disclaimers that fool normal scanners. And fourth, people find it very hard to crop and resize a passport photo by themselves.'</a:t>
             </a:r>
           </a:p>
         </p:txBody>
@@ -1417,12 +1417,12 @@
           <a:lstStyle/>
           <a:p>
             <a:r>
-              <a:t>SPEAKER NOTES (SLIDE 6):</a:t>
-            </a:r>
-          </a:p>
-          <a:p>
-            <a:r>
-              <a:t>Our primary aim is crystal clear: Zero cloud dependency, sub-30 second form completion, and 100% privacy compliance. To achieve this, we have broken our project into four concrete technical objectives: multi-file ingestion, bilingual OCR, local semantic reasoning via Llama 3.2 Small Language Model, and deep neural face extraction via YuNet ONNX.</a:t>
+              <a:t>SIMPLE EXPLANATION FOR STAFF:</a:t>
+            </a:r>
+          </a:p>
+          <a:p>
+            <a:r>
+              <a:t>'Our aim is simple: In under 30 seconds, take an ID card, extract all details, crop the photo, and fill Form 6. Our four clear objectives are: 1. Let users upload front and back images easily. 2. Read the text accurately with OCR. 3. Use local AI to put names and addresses in the right boxes. 4. Automatically find and crop the face photo for the form.'</a:t>
             </a:r>
           </a:p>
         </p:txBody>
@@ -1492,12 +1492,12 @@
           <a:lstStyle/>
           <a:p>
             <a:r>
-              <a:t>SPEAKER NOTES (SLIDE 7):</a:t>
-            </a:r>
-          </a:p>
-          <a:p>
-            <a:r>
-              <a:t>Our literature survey covers four relevant paradigms. We studied traditional Tesseract OCR, commercial cloud document AI systems, transformer-based LayoutLM models, and edge biometric detectors. This survey confirmed that while cloud models exist, a lightweight hybrid system combining EasyOCR, Llama 3.2 3B SLM, and YuNet ONNX offers the optimum balance of accuracy, cost, and absolute privacy.</a:t>
+              <a:t>SIMPLE EXPLANATION FOR STAFF:</a:t>
+            </a:r>
+          </a:p>
+          <a:p>
+            <a:r>
+              <a:t>'When we looked at previous research: basic tools like Tesseract can read text but don't understand what the text means. Big cloud tools like Google or AWS work well, but they charge money and upload private Aadhaar cards to their servers. So we chose a lightweight, open-source approach: running a small AI model called Llama 3.2 and a small face detector called YuNet directly on the computer for free.'</a:t>
             </a:r>
           </a:p>
         </p:txBody>
@@ -1567,12 +1567,12 @@
           <a:lstStyle/>
           <a:p>
             <a:r>
-              <a:t>SPEAKER NOTES (SLIDE 8):</a:t>
-            </a:r>
-          </a:p>
-          <a:p>
-            <a:r>
-              <a:t>The current existing system is entirely manual. A citizen must switch back and forth between their PDF reader and browser, manually re-typing complex numbers and addresses. When they reach Section 2A for the passport photo, the portal offers no cropping tool: applicants have to manually crop, save, and resize an image before uploading. This takes 10 to 15 minutes per form on average.</a:t>
+              <a:t>SIMPLE EXPLANATION FOR STAFF:</a:t>
+            </a:r>
+          </a:p>
+          <a:p>
+            <a:r>
+              <a:t>'Today, the process is completely manual. The user opens the voter portal, reads their card, and types 20 boxes. When they reach the photo section, the portal doesn't crop photos for them. They have to open Paint, cut their face out, save the file, and upload it. It takes 10 to 15 minutes per form.'</a:t>
             </a:r>
           </a:p>
         </p:txBody>
@@ -1642,12 +1642,12 @@
           <a:lstStyle/>
           <a:p>
             <a:r>
-              <a:t>SPEAKER NOTES (SLIDE 9):</a:t>
-            </a:r>
-          </a:p>
-          <a:p>
-            <a:r>
-              <a:t>To summarize the limitations of the existing approach: high error rates, serious data privacy risks in public kiosks, excessive time consumption, and an utter lack of document-to-form consistency checking. This established the exact technical requirements for our proposed system.</a:t>
+              <a:t>SIMPLE EXPLANATION FOR STAFF:</a:t>
+            </a:r>
+          </a:p>
+          <a:p>
+            <a:r>
+              <a:t>'To summarize the drawbacks: 1. Lots of spelling and date mistakes. 2. Privacy risks at internet cafes. 3. Wasting 15 minutes per form and paying money to cyber cafes. 4. The website doesn't check if what you typed matches the card. Our project solves all four problems.'</a:t>
             </a:r>
           </a:p>
         </p:txBody>
@@ -4729,7 +4729,7 @@
               </a:defRPr>
             </a:pPr>
             <a:r>
-              <a:t>FIRST REVIEW - UNDERGRADUATE PROJECT</a:t>
+              <a:t>UG PROJECT - FIRST REVIEW</a:t>
             </a:r>
           </a:p>
           <a:p>
@@ -4737,26 +4737,26 @@
               <a:spcAft>
                 <a:spcPts val="1000"/>
               </a:spcAft>
-              <a:defRPr sz="2700" b="1">
+              <a:defRPr sz="2800" b="1">
                 <a:solidFill>
                   <a:srgbClr val="FFFFFF"/>
                 </a:solidFill>
               </a:defRPr>
             </a:pPr>
             <a:r>
-              <a:t>AI-Powered Autonomous Document Extraction &amp; Verification Engine for Indian E-Governance Portals</a:t>
-            </a:r>
-          </a:p>
-          <a:p>
-            <a:pPr>
-              <a:defRPr sz="1400">
+              <a:t>AI-Based Smart Document Autofill for Government Portals</a:t>
+            </a:r>
+          </a:p>
+          <a:p>
+            <a:pPr>
+              <a:defRPr sz="1500">
                 <a:solidFill>
                   <a:srgbClr val="CBD5E1"/>
                 </a:solidFill>
               </a:defRPr>
             </a:pPr>
             <a:r>
-              <a:t>A Privacy-Preserving Framework for ECI NVSP Voter Registration (Form 6) via Local Small Language Models, Deep Vision Biometrics &amp; Heuristic OCR</a:t>
+              <a:t>Automatically reading ID cards (Aadhaar / PAN) and filling Voter ID Form 6 using local AI and face detection</a:t>
             </a:r>
           </a:p>
         </p:txBody>
@@ -5010,7 +5010,7 @@
               </a:defRPr>
             </a:pPr>
             <a:r>
-              <a:t>PROJECT DETAILS &amp; INSTITUTION</a:t>
+              <a:t>PROJECT DETAILS</a:t>
             </a:r>
           </a:p>
           <a:p>
@@ -5025,7 +5025,7 @@
               </a:defRPr>
             </a:pPr>
             <a:r>
-              <a:t>Degree: Bachelor of Engineering (B.E.)</a:t>
+              <a:t>Degree: B.E. Computer Science &amp; Engineering</a:t>
             </a:r>
           </a:p>
           <a:p>
@@ -5040,7 +5040,7 @@
               </a:defRPr>
             </a:pPr>
             <a:r>
-              <a:t>Department: Computer Science &amp; Engineering</a:t>
+              <a:t>Target Application: ECI NVSP Voter Registration (Form 6)</a:t>
             </a:r>
           </a:p>
           <a:p>
@@ -5055,7 +5055,7 @@
               </a:defRPr>
             </a:pPr>
             <a:r>
-              <a:t>Academic Year: 2026</a:t>
+              <a:t>Review Stage: First Review (Phase - 1)</a:t>
             </a:r>
           </a:p>
           <a:p>
@@ -5070,7 +5070,7 @@
               </a:defRPr>
             </a:pPr>
             <a:r>
-              <a:t>Review Stage: Phase - I (First Review)</a:t>
+              <a:t>System: 100% Local Processing (Zero Cloud Cost)</a:t>
             </a:r>
           </a:p>
         </p:txBody>
@@ -5209,7 +5209,7 @@
               </a:defRPr>
             </a:pPr>
             <a:r>
-              <a:t>CORE ARCHITECTURAL CONCEPT</a:t>
+              <a:t>OUR SMART SOLUTION</a:t>
             </a:r>
           </a:p>
         </p:txBody>
@@ -5237,14 +5237,14 @@
           <a:lstStyle/>
           <a:p>
             <a:pPr>
-              <a:defRPr sz="2200" b="1">
+              <a:defRPr sz="2100" b="1">
                 <a:solidFill>
                   <a:srgbClr val="FFFFFF"/>
                 </a:solidFill>
               </a:defRPr>
             </a:pPr>
             <a:r>
-              <a:t>Proposed System: Autonomous AI Form-Filling Engine</a:t>
+              <a:t>Proposed System: How Our Solution Works</a:t>
             </a:r>
           </a:p>
         </p:txBody>
@@ -5279,7 +5279,7 @@
               </a:defRPr>
             </a:pPr>
             <a:r>
-              <a:t>Dept of Computer Science &amp; Engineering | UG Project Phase-I Review | Team: Deva S, Athithi A, Arthi S</a:t>
+              <a:t>Dept of CSE | UG Project Review - 1 | Team: Deva S, Athithi A, Arthi S</a:t>
             </a:r>
           </a:p>
         </p:txBody>
@@ -5355,74 +5355,74 @@
               <a:spcAft>
                 <a:spcPts val="1000"/>
               </a:spcAft>
-              <a:defRPr sz="1500" b="1">
+              <a:defRPr sz="1450" b="1">
                 <a:solidFill>
                   <a:srgbClr val="2563EB"/>
                 </a:solidFill>
               </a:defRPr>
             </a:pPr>
             <a:r>
-              <a:t>Core Architecture &amp; Innovations  [Privacy-First]</a:t>
-            </a:r>
-          </a:p>
-          <a:p>
-            <a:pPr>
-              <a:spcAft>
-                <a:spcPts val="600"/>
-              </a:spcAft>
-              <a:defRPr sz="1150">
-                <a:solidFill>
-                  <a:srgbClr val="1E293B"/>
-                </a:solidFill>
-              </a:defRPr>
-            </a:pPr>
-            <a:r>
-              <a:t>• 1. Multi-Document Accumulative Ingestion: Drag &amp; drop front and back identity scans, multi-page e-Aadhaar PDFs, or PAN cards.</a:t>
-            </a:r>
-          </a:p>
-          <a:p>
-            <a:pPr>
-              <a:spcAft>
-                <a:spcPts val="600"/>
-              </a:spcAft>
-              <a:defRPr sz="1150">
-                <a:solidFill>
-                  <a:srgbClr val="1E293B"/>
-                </a:solidFill>
-              </a:defRPr>
-            </a:pPr>
-            <a:r>
-              <a:t>• 2. Zero-Cloud Privacy Guarantee: 100% of processing runs on the local edge machine; zero external API calls, zero server telemetry.</a:t>
-            </a:r>
-          </a:p>
-          <a:p>
-            <a:pPr>
-              <a:spcAft>
-                <a:spcPts val="600"/>
-              </a:spcAft>
-              <a:defRPr sz="1150">
-                <a:solidFill>
-                  <a:srgbClr val="1E293B"/>
-                </a:solidFill>
-              </a:defRPr>
-            </a:pPr>
-            <a:r>
-              <a:t>• 3. Dual AI Processing Pipeline: EasyOCR extracts high-density textual coordinates; local Meta Llama 3.2 SLM maps text into structured JSON.</a:t>
-            </a:r>
-          </a:p>
-          <a:p>
-            <a:pPr>
-              <a:spcAft>
-                <a:spcPts val="600"/>
-              </a:spcAft>
-              <a:defRPr sz="1150">
-                <a:solidFill>
-                  <a:srgbClr val="1E293B"/>
-                </a:solidFill>
-              </a:defRPr>
-            </a:pPr>
-            <a:r>
-              <a:t>• 4. Automated Biometric Face Cropping: Deep Learning YuNet ONNX model locates facial landmarks and auto-extracts 1:1 passport photos.</a:t>
+              <a:t>Key Features of Our System  [Smart &amp; Private]</a:t>
+            </a:r>
+          </a:p>
+          <a:p>
+            <a:pPr>
+              <a:spcAft>
+                <a:spcPts val="600"/>
+              </a:spcAft>
+              <a:defRPr sz="1150">
+                <a:solidFill>
+                  <a:srgbClr val="1E293B"/>
+                </a:solidFill>
+              </a:defRPr>
+            </a:pPr>
+            <a:r>
+              <a:t>• 1. Easy Multi-File Upload: Drag and drop front and back images, or a PDF. Add files one by one or all together.</a:t>
+            </a:r>
+          </a:p>
+          <a:p>
+            <a:pPr>
+              <a:spcAft>
+                <a:spcPts val="600"/>
+              </a:spcAft>
+              <a:defRPr sz="1150">
+                <a:solidFill>
+                  <a:srgbClr val="1E293B"/>
+                </a:solidFill>
+              </a:defRPr>
+            </a:pPr>
+            <a:r>
+              <a:t>• 2. 100% Private (No Cloud): Everything is processed locally on the laptop. No data is sent over the internet.</a:t>
+            </a:r>
+          </a:p>
+          <a:p>
+            <a:pPr>
+              <a:spcAft>
+                <a:spcPts val="600"/>
+              </a:spcAft>
+              <a:defRPr sz="1150">
+                <a:solidFill>
+                  <a:srgbClr val="1E293B"/>
+                </a:solidFill>
+              </a:defRPr>
+            </a:pPr>
+            <a:r>
+              <a:t>• 3. Smart OCR + AI: EasyOCR reads all text; Meta Llama 3.2 AI arranges the text into Name, DOB, Address, etc.</a:t>
+            </a:r>
+          </a:p>
+          <a:p>
+            <a:pPr>
+              <a:spcAft>
+                <a:spcPts val="600"/>
+              </a:spcAft>
+              <a:defRPr sz="1150">
+                <a:solidFill>
+                  <a:srgbClr val="1E293B"/>
+                </a:solidFill>
+              </a:defRPr>
+            </a:pPr>
+            <a:r>
+              <a:t>• 4. Automatic Face Cropping: Deep learning face detector finds the face on the card and crops a perfect passport photo.</a:t>
             </a:r>
           </a:p>
         </p:txBody>
@@ -5498,74 +5498,74 @@
               <a:spcAft>
                 <a:spcPts val="1000"/>
               </a:spcAft>
-              <a:defRPr sz="1500" b="1">
+              <a:defRPr sz="1450" b="1">
                 <a:solidFill>
                   <a:srgbClr val="10B981"/>
                 </a:solidFill>
               </a:defRPr>
             </a:pPr>
             <a:r>
-              <a:t>Validation &amp; User Experience  [Autonomous Fill]</a:t>
-            </a:r>
-          </a:p>
-          <a:p>
-            <a:pPr>
-              <a:spcAft>
-                <a:spcPts val="600"/>
-              </a:spcAft>
-              <a:defRPr sz="1150">
-                <a:solidFill>
-                  <a:srgbClr val="1E293B"/>
-                </a:solidFill>
-              </a:defRPr>
-            </a:pPr>
-            <a:r>
-              <a:t>• 5. Deterministic Rule-Based Sanitizer: Regex safeguards eliminate OCR hallucinations, ensuring pure 12-digit Aadhaar UID and valid phone numbers.</a:t>
-            </a:r>
-          </a:p>
-          <a:p>
-            <a:pPr>
-              <a:spcAft>
-                <a:spcPts val="600"/>
-              </a:spcAft>
-              <a:defRPr sz="1150">
-                <a:solidFill>
-                  <a:srgbClr val="1E293B"/>
-                </a:solidFill>
-              </a:defRPr>
-            </a:pPr>
-            <a:r>
-              <a:t>• 6. Intelligent Address Tree Parsing: Automatically separates Door/House No from Street and Locality while stripping legal disclaimer footers.</a:t>
-            </a:r>
-          </a:p>
-          <a:p>
-            <a:pPr>
-              <a:spcAft>
-                <a:spcPts val="600"/>
-              </a:spcAft>
-              <a:defRPr sz="1150">
-                <a:solidFill>
-                  <a:srgbClr val="1E293B"/>
-                </a:solidFill>
-              </a:defRPr>
-            </a:pPr>
-            <a:r>
-              <a:t>• 7. Seamless DOM Autofill: Reactive JavaScript automatically populates NVSP Form 6 fields and synchronizes `&lt;select&gt;` relation dropdowns.</a:t>
-            </a:r>
-          </a:p>
-          <a:p>
-            <a:pPr>
-              <a:spcAft>
-                <a:spcPts val="600"/>
-              </a:spcAft>
-              <a:defRPr sz="1150">
-                <a:solidFill>
-                  <a:srgbClr val="1E293B"/>
-                </a:solidFill>
-              </a:defRPr>
-            </a:pPr>
-            <a:r>
-              <a:t>• 8. High Speed &amp; Efficiency: End-to-end extraction and autofill completes in &lt; 25 seconds.</a:t>
+              <a:t>Accuracy &amp; Speed Improvements  [Accurate &amp; Fast]</a:t>
+            </a:r>
+          </a:p>
+          <a:p>
+            <a:pPr>
+              <a:spcAft>
+                <a:spcPts val="600"/>
+              </a:spcAft>
+              <a:defRPr sz="1150">
+                <a:solidFill>
+                  <a:srgbClr val="1E293B"/>
+                </a:solidFill>
+              </a:defRPr>
+            </a:pPr>
+            <a:r>
+              <a:t>• 5. Accurate Aadhaar Extraction: Custom rules ensure the 12-digit Aadhaar number is picked, ignoring 14-digit enrolment numbers.</a:t>
+            </a:r>
+          </a:p>
+          <a:p>
+            <a:pPr>
+              <a:spcAft>
+                <a:spcPts val="600"/>
+              </a:spcAft>
+              <a:defRPr sz="1150">
+                <a:solidFill>
+                  <a:srgbClr val="1E293B"/>
+                </a:solidFill>
+              </a:defRPr>
+            </a:pPr>
+            <a:r>
+              <a:t>• 6. Clean Address Parsing: Automatically separates Door No (e.g. 78) from Street Name and removes legal disclaimer text.</a:t>
+            </a:r>
+          </a:p>
+          <a:p>
+            <a:pPr>
+              <a:spcAft>
+                <a:spcPts val="600"/>
+              </a:spcAft>
+              <a:defRPr sz="1150">
+                <a:solidFill>
+                  <a:srgbClr val="1E293B"/>
+                </a:solidFill>
+              </a:defRPr>
+            </a:pPr>
+            <a:r>
+              <a:t>• 7. Automatic Dropdown Selection: Automatically selects 'Father' or 'Husband' in the relationship dropdown.</a:t>
+            </a:r>
+          </a:p>
+          <a:p>
+            <a:pPr>
+              <a:spcAft>
+                <a:spcPts val="600"/>
+              </a:spcAft>
+              <a:defRPr sz="1150">
+                <a:solidFill>
+                  <a:srgbClr val="1E293B"/>
+                </a:solidFill>
+              </a:defRPr>
+            </a:pPr>
+            <a:r>
+              <a:t>• 8. Lightning Fast: Entire process completes in under 25 seconds with a single click.</a:t>
             </a:r>
           </a:p>
         </p:txBody>
@@ -5704,7 +5704,7 @@
               </a:defRPr>
             </a:pPr>
             <a:r>
-              <a:t>END-TO-END PIPELINE DIAGRAM</a:t>
+              <a:t>WORKFLOW</a:t>
             </a:r>
           </a:p>
         </p:txBody>
@@ -5732,14 +5732,14 @@
           <a:lstStyle/>
           <a:p>
             <a:pPr>
-              <a:defRPr sz="2200" b="1">
+              <a:defRPr sz="2100" b="1">
                 <a:solidFill>
                   <a:srgbClr val="FFFFFF"/>
                 </a:solidFill>
               </a:defRPr>
             </a:pPr>
             <a:r>
-              <a:t>Proposed Methodology &amp; System Architecture</a:t>
+              <a:t>Proposed Methodology &amp; Step-by-Step Architecture</a:t>
             </a:r>
           </a:p>
         </p:txBody>
@@ -5774,7 +5774,7 @@
               </a:defRPr>
             </a:pPr>
             <a:r>
-              <a:t>Dept of Computer Science &amp; Engineering | UG Project Phase-I Review | Team: Deva S, Athithi A, Arthi S</a:t>
+              <a:t>Dept of CSE | UG Project Review - 1 | Team: Deva S, Athithi A, Arthi S</a:t>
             </a:r>
           </a:p>
         </p:txBody>
@@ -5850,59 +5850,59 @@
               <a:spcAft>
                 <a:spcPts val="1000"/>
               </a:spcAft>
-              <a:defRPr sz="1500" b="1">
+              <a:defRPr sz="1450" b="1">
                 <a:solidFill>
                   <a:srgbClr val="0F2B48"/>
                 </a:solidFill>
               </a:defRPr>
             </a:pPr>
             <a:r>
-              <a:t>Phase 1: Ingestion &amp; Rendering</a:t>
-            </a:r>
-          </a:p>
-          <a:p>
-            <a:pPr>
-              <a:spcAft>
-                <a:spcPts val="600"/>
-              </a:spcAft>
-              <a:defRPr sz="1150">
-                <a:solidFill>
-                  <a:srgbClr val="1E293B"/>
-                </a:solidFill>
-              </a:defRPr>
-            </a:pPr>
-            <a:r>
-              <a:t>• • Accepts PDF / PNG / JPEG.</a:t>
-            </a:r>
-          </a:p>
-          <a:p>
-            <a:pPr>
-              <a:spcAft>
-                <a:spcPts val="600"/>
-              </a:spcAft>
-              <a:defRPr sz="1150">
-                <a:solidFill>
-                  <a:srgbClr val="1E293B"/>
-                </a:solidFill>
-              </a:defRPr>
-            </a:pPr>
-            <a:r>
-              <a:t>• • pypdfium2 renders at 300 DPI.</a:t>
-            </a:r>
-          </a:p>
-          <a:p>
-            <a:pPr>
-              <a:spcAft>
-                <a:spcPts val="600"/>
-              </a:spcAft>
-              <a:defRPr sz="1150">
-                <a:solidFill>
-                  <a:srgbClr val="1E293B"/>
-                </a:solidFill>
-              </a:defRPr>
-            </a:pPr>
-            <a:r>
-              <a:t>• • Embedded stream extraction.</a:t>
+              <a:t>Step 1: Upload</a:t>
+            </a:r>
+          </a:p>
+          <a:p>
+            <a:pPr>
+              <a:spcAft>
+                <a:spcPts val="600"/>
+              </a:spcAft>
+              <a:defRPr sz="1150">
+                <a:solidFill>
+                  <a:srgbClr val="1E293B"/>
+                </a:solidFill>
+              </a:defRPr>
+            </a:pPr>
+            <a:r>
+              <a:t>• • User drops Front &amp; Back card images or PDF.</a:t>
+            </a:r>
+          </a:p>
+          <a:p>
+            <a:pPr>
+              <a:spcAft>
+                <a:spcPts val="600"/>
+              </a:spcAft>
+              <a:defRPr sz="1150">
+                <a:solidFill>
+                  <a:srgbClr val="1E293B"/>
+                </a:solidFill>
+              </a:defRPr>
+            </a:pPr>
+            <a:r>
+              <a:t>• • Frontend manages attached file chips.</a:t>
+            </a:r>
+          </a:p>
+          <a:p>
+            <a:pPr>
+              <a:spcAft>
+                <a:spcPts val="600"/>
+              </a:spcAft>
+              <a:defRPr sz="1150">
+                <a:solidFill>
+                  <a:srgbClr val="1E293B"/>
+                </a:solidFill>
+              </a:defRPr>
+            </a:pPr>
+            <a:r>
+              <a:t>• • Sends files to FastAPI backend.</a:t>
             </a:r>
           </a:p>
         </p:txBody>
@@ -5978,74 +5978,74 @@
               <a:spcAft>
                 <a:spcPts val="1000"/>
               </a:spcAft>
-              <a:defRPr sz="1500" b="1">
+              <a:defRPr sz="1450" b="1">
                 <a:solidFill>
                   <a:srgbClr val="2563EB"/>
                 </a:solidFill>
               </a:defRPr>
             </a:pPr>
             <a:r>
-              <a:t>Phase 2: Vision &amp; OCR Engine</a:t>
-            </a:r>
-          </a:p>
-          <a:p>
-            <a:pPr>
-              <a:spcAft>
-                <a:spcPts val="600"/>
-              </a:spcAft>
-              <a:defRPr sz="1150">
-                <a:solidFill>
-                  <a:srgbClr val="1E293B"/>
-                </a:solidFill>
-              </a:defRPr>
-            </a:pPr>
-            <a:r>
-              <a:t>• • EasyOCR bilingual extraction.</a:t>
-            </a:r>
-          </a:p>
-          <a:p>
-            <a:pPr>
-              <a:spcAft>
-                <a:spcPts val="600"/>
-              </a:spcAft>
-              <a:defRPr sz="1150">
-                <a:solidFill>
-                  <a:srgbClr val="1E293B"/>
-                </a:solidFill>
-              </a:defRPr>
-            </a:pPr>
-            <a:r>
-              <a:t>• • OpenCV YuNet face detection.</a:t>
-            </a:r>
-          </a:p>
-          <a:p>
-            <a:pPr>
-              <a:spcAft>
-                <a:spcPts val="600"/>
-              </a:spcAft>
-              <a:defRPr sz="1150">
-                <a:solidFill>
-                  <a:srgbClr val="1E293B"/>
-                </a:solidFill>
-              </a:defRPr>
-            </a:pPr>
-            <a:r>
-              <a:t>• • 40% margin passport crop.</a:t>
-            </a:r>
-          </a:p>
-          <a:p>
-            <a:pPr>
-              <a:spcAft>
-                <a:spcPts val="600"/>
-              </a:spcAft>
-              <a:defRPr sz="1150">
-                <a:solidFill>
-                  <a:srgbClr val="1E293B"/>
-                </a:solidFill>
-              </a:defRPr>
-            </a:pPr>
-            <a:r>
-              <a:t>• • HSV skin-tone verification.</a:t>
+              <a:t>Step 2: Read &amp; Detect</a:t>
+            </a:r>
+          </a:p>
+          <a:p>
+            <a:pPr>
+              <a:spcAft>
+                <a:spcPts val="600"/>
+              </a:spcAft>
+              <a:defRPr sz="1150">
+                <a:solidFill>
+                  <a:srgbClr val="1E293B"/>
+                </a:solidFill>
+              </a:defRPr>
+            </a:pPr>
+            <a:r>
+              <a:t>• • EasyOCR reads all text from the card.</a:t>
+            </a:r>
+          </a:p>
+          <a:p>
+            <a:pPr>
+              <a:spcAft>
+                <a:spcPts val="600"/>
+              </a:spcAft>
+              <a:defRPr sz="1150">
+                <a:solidFill>
+                  <a:srgbClr val="1E293B"/>
+                </a:solidFill>
+              </a:defRPr>
+            </a:pPr>
+            <a:r>
+              <a:t>• • YuNet AI finds the face on the card.</a:t>
+            </a:r>
+          </a:p>
+          <a:p>
+            <a:pPr>
+              <a:spcAft>
+                <a:spcPts val="600"/>
+              </a:spcAft>
+              <a:defRPr sz="1150">
+                <a:solidFill>
+                  <a:srgbClr val="1E293B"/>
+                </a:solidFill>
+              </a:defRPr>
+            </a:pPr>
+            <a:r>
+              <a:t>• • Automatically crops clean passport photo.</a:t>
+            </a:r>
+          </a:p>
+          <a:p>
+            <a:pPr>
+              <a:spcAft>
+                <a:spcPts val="600"/>
+              </a:spcAft>
+              <a:defRPr sz="1150">
+                <a:solidFill>
+                  <a:srgbClr val="1E293B"/>
+                </a:solidFill>
+              </a:defRPr>
+            </a:pPr>
+            <a:r>
+              <a:t>• • Skin-tone filter rejects text crops.</a:t>
             </a:r>
           </a:p>
         </p:txBody>
@@ -6121,74 +6121,59 @@
               <a:spcAft>
                 <a:spcPts val="1000"/>
               </a:spcAft>
-              <a:defRPr sz="1500" b="1">
-                <a:solidFill>
-                  <a:srgbClr val="1E293B"/>
-                </a:solidFill>
-              </a:defRPr>
-            </a:pPr>
-            <a:r>
-              <a:t>Phase 3: SLM Semantic Reasoner</a:t>
-            </a:r>
-          </a:p>
-          <a:p>
-            <a:pPr>
-              <a:spcAft>
-                <a:spcPts val="600"/>
-              </a:spcAft>
-              <a:defRPr sz="1150">
-                <a:solidFill>
-                  <a:srgbClr val="1E293B"/>
-                </a:solidFill>
-              </a:defRPr>
-            </a:pPr>
-            <a:r>
-              <a:t>• • Local Llama 3.2 (3B) inference.</a:t>
-            </a:r>
-          </a:p>
-          <a:p>
-            <a:pPr>
-              <a:spcAft>
-                <a:spcPts val="600"/>
-              </a:spcAft>
-              <a:defRPr sz="1150">
-                <a:solidFill>
-                  <a:srgbClr val="1E293B"/>
-                </a:solidFill>
-              </a:defRPr>
-            </a:pPr>
-            <a:r>
-              <a:t>• • System prompt schema enforcement.</a:t>
-            </a:r>
-          </a:p>
-          <a:p>
-            <a:pPr>
-              <a:spcAft>
-                <a:spcPts val="600"/>
-              </a:spcAft>
-              <a:defRPr sz="1150">
-                <a:solidFill>
-                  <a:srgbClr val="1E293B"/>
-                </a:solidFill>
-              </a:defRPr>
-            </a:pPr>
-            <a:r>
-              <a:t>• • Resolves S/O, D/O, W/O relations.</a:t>
-            </a:r>
-          </a:p>
-          <a:p>
-            <a:pPr>
-              <a:spcAft>
-                <a:spcPts val="600"/>
-              </a:spcAft>
-              <a:defRPr sz="1150">
-                <a:solidFill>
-                  <a:srgbClr val="1E293B"/>
-                </a:solidFill>
-              </a:defRPr>
-            </a:pPr>
-            <a:r>
-              <a:t>• • Zero cloud telemetry.</a:t>
+              <a:defRPr sz="1450" b="1">
+                <a:solidFill>
+                  <a:srgbClr val="1E293B"/>
+                </a:solidFill>
+              </a:defRPr>
+            </a:pPr>
+            <a:r>
+              <a:t>Step 3: Understand</a:t>
+            </a:r>
+          </a:p>
+          <a:p>
+            <a:pPr>
+              <a:spcAft>
+                <a:spcPts val="600"/>
+              </a:spcAft>
+              <a:defRPr sz="1150">
+                <a:solidFill>
+                  <a:srgbClr val="1E293B"/>
+                </a:solidFill>
+              </a:defRPr>
+            </a:pPr>
+            <a:r>
+              <a:t>• • Text is sent to local Llama 3.2 AI.</a:t>
+            </a:r>
+          </a:p>
+          <a:p>
+            <a:pPr>
+              <a:spcAft>
+                <a:spcPts val="600"/>
+              </a:spcAft>
+              <a:defRPr sz="1150">
+                <a:solidFill>
+                  <a:srgbClr val="1E293B"/>
+                </a:solidFill>
+              </a:defRPr>
+            </a:pPr>
+            <a:r>
+              <a:t>• • AI sorts text into Name, DOB, Father's Name, and Address.</a:t>
+            </a:r>
+          </a:p>
+          <a:p>
+            <a:pPr>
+              <a:spcAft>
+                <a:spcPts val="600"/>
+              </a:spcAft>
+              <a:defRPr sz="1150">
+                <a:solidFill>
+                  <a:srgbClr val="1E293B"/>
+                </a:solidFill>
+              </a:defRPr>
+            </a:pPr>
+            <a:r>
+              <a:t>• • Runs offline via Ollama (no cloud).</a:t>
             </a:r>
           </a:p>
         </p:txBody>
@@ -6264,74 +6249,74 @@
               <a:spcAft>
                 <a:spcPts val="1000"/>
               </a:spcAft>
-              <a:defRPr sz="1500" b="1">
+              <a:defRPr sz="1450" b="1">
                 <a:solidFill>
                   <a:srgbClr val="10B981"/>
                 </a:solidFill>
               </a:defRPr>
             </a:pPr>
             <a:r>
-              <a:t>Phase 4: Normalization &amp; DOM</a:t>
-            </a:r>
-          </a:p>
-          <a:p>
-            <a:pPr>
-              <a:spcAft>
-                <a:spcPts val="600"/>
-              </a:spcAft>
-              <a:defRPr sz="1150">
-                <a:solidFill>
-                  <a:srgbClr val="1E293B"/>
-                </a:solidFill>
-              </a:defRPr>
-            </a:pPr>
-            <a:r>
-              <a:t>• • 12-digit Aadhaar UID isolation.</a:t>
-            </a:r>
-          </a:p>
-          <a:p>
-            <a:pPr>
-              <a:spcAft>
-                <a:spcPts val="600"/>
-              </a:spcAft>
-              <a:defRPr sz="1150">
-                <a:solidFill>
-                  <a:srgbClr val="1E293B"/>
-                </a:solidFill>
-              </a:defRPr>
-            </a:pPr>
-            <a:r>
-              <a:t>• • Clean House No. &amp; Street split.</a:t>
-            </a:r>
-          </a:p>
-          <a:p>
-            <a:pPr>
-              <a:spcAft>
-                <a:spcPts val="600"/>
-              </a:spcAft>
-              <a:defRPr sz="1150">
-                <a:solidFill>
-                  <a:srgbClr val="1E293B"/>
-                </a:solidFill>
-              </a:defRPr>
-            </a:pPr>
-            <a:r>
-              <a:t>• • Date conversion to YYYY-MM-DD.</a:t>
-            </a:r>
-          </a:p>
-          <a:p>
-            <a:pPr>
-              <a:spcAft>
-                <a:spcPts val="600"/>
-              </a:spcAft>
-              <a:defRPr sz="1150">
-                <a:solidFill>
-                  <a:srgbClr val="1E293B"/>
-                </a:solidFill>
-              </a:defRPr>
-            </a:pPr>
-            <a:r>
-              <a:t>• • Form 6 reactive auto-population.</a:t>
+              <a:t>Step 4: Clean &amp; Fill</a:t>
+            </a:r>
+          </a:p>
+          <a:p>
+            <a:pPr>
+              <a:spcAft>
+                <a:spcPts val="600"/>
+              </a:spcAft>
+              <a:defRPr sz="1150">
+                <a:solidFill>
+                  <a:srgbClr val="1E293B"/>
+                </a:solidFill>
+              </a:defRPr>
+            </a:pPr>
+            <a:r>
+              <a:t>• • Cleans 12-digit Aadhaar UID.</a:t>
+            </a:r>
+          </a:p>
+          <a:p>
+            <a:pPr>
+              <a:spcAft>
+                <a:spcPts val="600"/>
+              </a:spcAft>
+              <a:defRPr sz="1150">
+                <a:solidFill>
+                  <a:srgbClr val="1E293B"/>
+                </a:solidFill>
+              </a:defRPr>
+            </a:pPr>
+            <a:r>
+              <a:t>• • Splits Door No &amp; Street clearly.</a:t>
+            </a:r>
+          </a:p>
+          <a:p>
+            <a:pPr>
+              <a:spcAft>
+                <a:spcPts val="600"/>
+              </a:spcAft>
+              <a:defRPr sz="1150">
+                <a:solidFill>
+                  <a:srgbClr val="1E293B"/>
+                </a:solidFill>
+              </a:defRPr>
+            </a:pPr>
+            <a:r>
+              <a:t>• • Converts DOB to YYYY-MM-DD.</a:t>
+            </a:r>
+          </a:p>
+          <a:p>
+            <a:pPr>
+              <a:spcAft>
+                <a:spcPts val="600"/>
+              </a:spcAft>
+              <a:defRPr sz="1150">
+                <a:solidFill>
+                  <a:srgbClr val="1E293B"/>
+                </a:solidFill>
+              </a:defRPr>
+            </a:pPr>
+            <a:r>
+              <a:t>• • Fills all Form 6 boxes instantly!</a:t>
             </a:r>
           </a:p>
         </p:txBody>
@@ -6470,7 +6455,7 @@
               </a:defRPr>
             </a:pPr>
             <a:r>
-              <a:t>TECH STACK SPECIFICATIONS</a:t>
+              <a:t>TECH STACK</a:t>
             </a:r>
           </a:p>
         </p:txBody>
@@ -6498,14 +6483,14 @@
           <a:lstStyle/>
           <a:p>
             <a:pPr>
-              <a:defRPr sz="2200" b="1">
+              <a:defRPr sz="2100" b="1">
                 <a:solidFill>
                   <a:srgbClr val="FFFFFF"/>
                 </a:solidFill>
               </a:defRPr>
             </a:pPr>
             <a:r>
-              <a:t>Tools &amp; Technologies Used</a:t>
+              <a:t>Tools &amp; Technologies Used (Why We Chose Them)</a:t>
             </a:r>
           </a:p>
         </p:txBody>
@@ -6540,7 +6525,7 @@
               </a:defRPr>
             </a:pPr>
             <a:r>
-              <a:t>Dept of Computer Science &amp; Engineering | UG Project Phase-I Review | Team: Deva S, Athithi A, Arthi S</a:t>
+              <a:t>Dept of CSE | UG Project Review - 1 | Team: Deva S, Athithi A, Arthi S</a:t>
             </a:r>
           </a:p>
         </p:txBody>
@@ -6616,74 +6601,74 @@
               <a:spcAft>
                 <a:spcPts val="1000"/>
               </a:spcAft>
-              <a:defRPr sz="1500" b="1">
+              <a:defRPr sz="1450" b="1">
                 <a:solidFill>
                   <a:srgbClr val="2563EB"/>
                 </a:solidFill>
               </a:defRPr>
             </a:pPr>
             <a:r>
-              <a:t>Backend &amp; API Layer</a:t>
-            </a:r>
-          </a:p>
-          <a:p>
-            <a:pPr>
-              <a:spcAft>
-                <a:spcPts val="600"/>
-              </a:spcAft>
-              <a:defRPr sz="1150">
-                <a:solidFill>
-                  <a:srgbClr val="1E293B"/>
-                </a:solidFill>
-              </a:defRPr>
-            </a:pPr>
-            <a:r>
-              <a:t>• • Python 3.12: Core application runtime.</a:t>
-            </a:r>
-          </a:p>
-          <a:p>
-            <a:pPr>
-              <a:spcAft>
-                <a:spcPts val="600"/>
-              </a:spcAft>
-              <a:defRPr sz="1150">
-                <a:solidFill>
-                  <a:srgbClr val="1E293B"/>
-                </a:solidFill>
-              </a:defRPr>
-            </a:pPr>
-            <a:r>
-              <a:t>• • FastAPI: Asynchronous, high-throughput microservice architecture.</a:t>
-            </a:r>
-          </a:p>
-          <a:p>
-            <a:pPr>
-              <a:spcAft>
-                <a:spcPts val="600"/>
-              </a:spcAft>
-              <a:defRPr sz="1150">
-                <a:solidFill>
-                  <a:srgbClr val="1E293B"/>
-                </a:solidFill>
-              </a:defRPr>
-            </a:pPr>
-            <a:r>
-              <a:t>• • Uvicorn: ASGI web server running locally on port 8000.</a:t>
-            </a:r>
-          </a:p>
-          <a:p>
-            <a:pPr>
-              <a:spcAft>
-                <a:spcPts val="600"/>
-              </a:spcAft>
-              <a:defRPr sz="1150">
-                <a:solidFill>
-                  <a:srgbClr val="1E293B"/>
-                </a:solidFill>
-              </a:defRPr>
-            </a:pPr>
-            <a:r>
-              <a:t>• • Requests &amp; NumPy: Asynchronous HTTP payload handling &amp; array processing.</a:t>
+              <a:t>1. Backend: Python &amp; FastAPI</a:t>
+            </a:r>
+          </a:p>
+          <a:p>
+            <a:pPr>
+              <a:spcAft>
+                <a:spcPts val="600"/>
+              </a:spcAft>
+              <a:defRPr sz="1150">
+                <a:solidFill>
+                  <a:srgbClr val="1E293B"/>
+                </a:solidFill>
+              </a:defRPr>
+            </a:pPr>
+            <a:r>
+              <a:t>• • Python 3.12: Main programming language.</a:t>
+            </a:r>
+          </a:p>
+          <a:p>
+            <a:pPr>
+              <a:spcAft>
+                <a:spcPts val="600"/>
+              </a:spcAft>
+              <a:defRPr sz="1150">
+                <a:solidFill>
+                  <a:srgbClr val="1E293B"/>
+                </a:solidFill>
+              </a:defRPr>
+            </a:pPr>
+            <a:r>
+              <a:t>• • FastAPI: Very fast and modern web backend framework.</a:t>
+            </a:r>
+          </a:p>
+          <a:p>
+            <a:pPr>
+              <a:spcAft>
+                <a:spcPts val="600"/>
+              </a:spcAft>
+              <a:defRPr sz="1150">
+                <a:solidFill>
+                  <a:srgbClr val="1E293B"/>
+                </a:solidFill>
+              </a:defRPr>
+            </a:pPr>
+            <a:r>
+              <a:t>• • Uvicorn: Runs the local backend server on port 8000.</a:t>
+            </a:r>
+          </a:p>
+          <a:p>
+            <a:pPr>
+              <a:spcAft>
+                <a:spcPts val="600"/>
+              </a:spcAft>
+              <a:defRPr sz="1150">
+                <a:solidFill>
+                  <a:srgbClr val="1E293B"/>
+                </a:solidFill>
+              </a:defRPr>
+            </a:pPr>
+            <a:r>
+              <a:t>• • Why chosen: Fast, handles multiple files easily, and connects with AI libraries.</a:t>
             </a:r>
           </a:p>
         </p:txBody>
@@ -6759,74 +6744,74 @@
               <a:spcAft>
                 <a:spcPts val="1000"/>
               </a:spcAft>
-              <a:defRPr sz="1500" b="1">
+              <a:defRPr sz="1450" b="1">
                 <a:solidFill>
                   <a:srgbClr val="10B981"/>
                 </a:solidFill>
               </a:defRPr>
             </a:pPr>
             <a:r>
-              <a:t>AI, OCR &amp; Computer Vision</a:t>
-            </a:r>
-          </a:p>
-          <a:p>
-            <a:pPr>
-              <a:spcAft>
-                <a:spcPts val="600"/>
-              </a:spcAft>
-              <a:defRPr sz="1150">
-                <a:solidFill>
-                  <a:srgbClr val="1E293B"/>
-                </a:solidFill>
-              </a:defRPr>
-            </a:pPr>
-            <a:r>
-              <a:t>• • Meta Llama 3.2 (3B): Locally hosted via Ollama runtime for private inference.</a:t>
-            </a:r>
-          </a:p>
-          <a:p>
-            <a:pPr>
-              <a:spcAft>
-                <a:spcPts val="600"/>
-              </a:spcAft>
-              <a:defRPr sz="1150">
-                <a:solidFill>
-                  <a:srgbClr val="1E293B"/>
-                </a:solidFill>
-              </a:defRPr>
-            </a:pPr>
-            <a:r>
-              <a:t>• • EasyOCR (PyTorch): Deep learning optical character recognition engine.</a:t>
-            </a:r>
-          </a:p>
-          <a:p>
-            <a:pPr>
-              <a:spcAft>
-                <a:spcPts val="600"/>
-              </a:spcAft>
-              <a:defRPr sz="1150">
-                <a:solidFill>
-                  <a:srgbClr val="1E293B"/>
-                </a:solidFill>
-              </a:defRPr>
-            </a:pPr>
-            <a:r>
-              <a:t>• • OpenCV 5.0 (YuNet ONNX): Deep neural face detector (232 KB model).</a:t>
-            </a:r>
-          </a:p>
-          <a:p>
-            <a:pPr>
-              <a:spcAft>
-                <a:spcPts val="600"/>
-              </a:spcAft>
-              <a:defRPr sz="1150">
-                <a:solidFill>
-                  <a:srgbClr val="1E293B"/>
-                </a:solidFill>
-              </a:defRPr>
-            </a:pPr>
-            <a:r>
-              <a:t>• • pypdfium2: High-fidelity PDF rendering engine at 300 DPI scale.</a:t>
+              <a:t>2. Text Reading: EasyOCR</a:t>
+            </a:r>
+          </a:p>
+          <a:p>
+            <a:pPr>
+              <a:spcAft>
+                <a:spcPts val="600"/>
+              </a:spcAft>
+              <a:defRPr sz="1150">
+                <a:solidFill>
+                  <a:srgbClr val="1E293B"/>
+                </a:solidFill>
+              </a:defRPr>
+            </a:pPr>
+            <a:r>
+              <a:t>• • EasyOCR (PyTorch): Deep learning library to read text from images.</a:t>
+            </a:r>
+          </a:p>
+          <a:p>
+            <a:pPr>
+              <a:spcAft>
+                <a:spcPts val="600"/>
+              </a:spcAft>
+              <a:defRPr sz="1150">
+                <a:solidFill>
+                  <a:srgbClr val="1E293B"/>
+                </a:solidFill>
+              </a:defRPr>
+            </a:pPr>
+            <a:r>
+              <a:t>• • Reads English and Indian regional text (Tamil, etc.).</a:t>
+            </a:r>
+          </a:p>
+          <a:p>
+            <a:pPr>
+              <a:spcAft>
+                <a:spcPts val="600"/>
+              </a:spcAft>
+              <a:defRPr sz="1150">
+                <a:solidFill>
+                  <a:srgbClr val="1E293B"/>
+                </a:solidFill>
+              </a:defRPr>
+            </a:pPr>
+            <a:r>
+              <a:t>• • pypdfium2: Converts PDF pages into high-clarity images.</a:t>
+            </a:r>
+          </a:p>
+          <a:p>
+            <a:pPr>
+              <a:spcAft>
+                <a:spcPts val="600"/>
+              </a:spcAft>
+              <a:defRPr sz="1150">
+                <a:solidFill>
+                  <a:srgbClr val="1E293B"/>
+                </a:solidFill>
+              </a:defRPr>
+            </a:pPr>
+            <a:r>
+              <a:t>• • Why chosen: Much more accurate than old tools like Tesseract.</a:t>
             </a:r>
           </a:p>
         </p:txBody>
@@ -6902,74 +6887,74 @@
               <a:spcAft>
                 <a:spcPts val="1000"/>
               </a:spcAft>
-              <a:defRPr sz="1500" b="1">
-                <a:solidFill>
-                  <a:srgbClr val="1E293B"/>
-                </a:solidFill>
-              </a:defRPr>
-            </a:pPr>
-            <a:r>
-              <a:t>Frontend &amp; User Interface</a:t>
-            </a:r>
-          </a:p>
-          <a:p>
-            <a:pPr>
-              <a:spcAft>
-                <a:spcPts val="600"/>
-              </a:spcAft>
-              <a:defRPr sz="1150">
-                <a:solidFill>
-                  <a:srgbClr val="1E293B"/>
-                </a:solidFill>
-              </a:defRPr>
-            </a:pPr>
-            <a:r>
-              <a:t>• • HTML5 &amp; CSS3: Modern, responsive government portal layout conforming to ECI Form 6.</a:t>
-            </a:r>
-          </a:p>
-          <a:p>
-            <a:pPr>
-              <a:spcAft>
-                <a:spcPts val="600"/>
-              </a:spcAft>
-              <a:defRPr sz="1150">
-                <a:solidFill>
-                  <a:srgbClr val="1E293B"/>
-                </a:solidFill>
-              </a:defRPr>
-            </a:pPr>
-            <a:r>
-              <a:t>• • Vanilla JavaScript (ES6+): Accumulative file state manager &amp; reactive DOM auto-filler.</a:t>
-            </a:r>
-          </a:p>
-          <a:p>
-            <a:pPr>
-              <a:spcAft>
-                <a:spcPts val="600"/>
-              </a:spcAft>
-              <a:defRPr sz="1150">
-                <a:solidFill>
-                  <a:srgbClr val="1E293B"/>
-                </a:solidFill>
-              </a:defRPr>
-            </a:pPr>
-            <a:r>
-              <a:t>• • Drag &amp; Drop API: Native browser multi-file batch upload accumulator.</a:t>
-            </a:r>
-          </a:p>
-          <a:p>
-            <a:pPr>
-              <a:spcAft>
-                <a:spcPts val="600"/>
-              </a:spcAft>
-              <a:defRPr sz="1150">
-                <a:solidFill>
-                  <a:srgbClr val="1E293B"/>
-                </a:solidFill>
-              </a:defRPr>
-            </a:pPr>
-            <a:r>
-              <a:t>• • Zero NPM dependencies: Lightweight, instant loading with no build steps.</a:t>
+              <a:defRPr sz="1450" b="1">
+                <a:solidFill>
+                  <a:srgbClr val="1E293B"/>
+                </a:solidFill>
+              </a:defRPr>
+            </a:pPr>
+            <a:r>
+              <a:t>3. Local AI: Meta Llama 3.2 (3B)</a:t>
+            </a:r>
+          </a:p>
+          <a:p>
+            <a:pPr>
+              <a:spcAft>
+                <a:spcPts val="600"/>
+              </a:spcAft>
+              <a:defRPr sz="1150">
+                <a:solidFill>
+                  <a:srgbClr val="1E293B"/>
+                </a:solidFill>
+              </a:defRPr>
+            </a:pPr>
+            <a:r>
+              <a:t>• • Llama 3.2: Small Language Model created by Meta AI.</a:t>
+            </a:r>
+          </a:p>
+          <a:p>
+            <a:pPr>
+              <a:spcAft>
+                <a:spcPts val="600"/>
+              </a:spcAft>
+              <a:defRPr sz="1150">
+                <a:solidFill>
+                  <a:srgbClr val="1E293B"/>
+                </a:solidFill>
+              </a:defRPr>
+            </a:pPr>
+            <a:r>
+              <a:t>• • Hosted locally using Ollama (free local software).</a:t>
+            </a:r>
+          </a:p>
+          <a:p>
+            <a:pPr>
+              <a:spcAft>
+                <a:spcPts val="600"/>
+              </a:spcAft>
+              <a:defRPr sz="1150">
+                <a:solidFill>
+                  <a:srgbClr val="1E293B"/>
+                </a:solidFill>
+              </a:defRPr>
+            </a:pPr>
+            <a:r>
+              <a:t>• • Converts messy OCR text into clean JSON data.</a:t>
+            </a:r>
+          </a:p>
+          <a:p>
+            <a:pPr>
+              <a:spcAft>
+                <a:spcPts val="600"/>
+              </a:spcAft>
+              <a:defRPr sz="1150">
+                <a:solidFill>
+                  <a:srgbClr val="1E293B"/>
+                </a:solidFill>
+              </a:defRPr>
+            </a:pPr>
+            <a:r>
+              <a:t>• • Why chosen: Works offline without internet, keeping personal data 100% private.</a:t>
             </a:r>
           </a:p>
         </p:txBody>
@@ -7045,74 +7030,74 @@
               <a:spcAft>
                 <a:spcPts val="1000"/>
               </a:spcAft>
-              <a:defRPr sz="1500" b="1">
+              <a:defRPr sz="1450" b="1">
                 <a:solidFill>
                   <a:srgbClr val="0F2B48"/>
                 </a:solidFill>
               </a:defRPr>
             </a:pPr>
             <a:r>
-              <a:t>Environment &amp; Tooling</a:t>
-            </a:r>
-          </a:p>
-          <a:p>
-            <a:pPr>
-              <a:spcAft>
-                <a:spcPts val="600"/>
-              </a:spcAft>
-              <a:defRPr sz="1150">
-                <a:solidFill>
-                  <a:srgbClr val="1E293B"/>
-                </a:solidFill>
-              </a:defRPr>
-            </a:pPr>
-            <a:r>
-              <a:t>• • Ollama: Local LLM runtime orchestrator with zero network egress.</a:t>
-            </a:r>
-          </a:p>
-          <a:p>
-            <a:pPr>
-              <a:spcAft>
-                <a:spcPts val="600"/>
-              </a:spcAft>
-              <a:defRPr sz="1150">
-                <a:solidFill>
-                  <a:srgbClr val="1E293B"/>
-                </a:solidFill>
-              </a:defRPr>
-            </a:pPr>
-            <a:r>
-              <a:t>• • Git &amp; GitHub: Distributed version control (Repository: deva-2006/govtAutofill).</a:t>
-            </a:r>
-          </a:p>
-          <a:p>
-            <a:pPr>
-              <a:spcAft>
-                <a:spcPts val="600"/>
-              </a:spcAft>
-              <a:defRPr sz="1150">
-                <a:solidFill>
-                  <a:srgbClr val="1E293B"/>
-                </a:solidFill>
-              </a:defRPr>
-            </a:pPr>
-            <a:r>
-              <a:t>• • Postman &amp; PyTest: API endpoint benchmarking &amp; regression test suites.</a:t>
-            </a:r>
-          </a:p>
-          <a:p>
-            <a:pPr>
-              <a:spcAft>
-                <a:spcPts val="600"/>
-              </a:spcAft>
-              <a:defRPr sz="1150">
-                <a:solidFill>
-                  <a:srgbClr val="1E293B"/>
-                </a:solidFill>
-              </a:defRPr>
-            </a:pPr>
-            <a:r>
-              <a:t>• • Windows / Linux / macOS: Cross-platform edge compatibility.</a:t>
+              <a:t>4. Face Cropping: OpenCV YuNet</a:t>
+            </a:r>
+          </a:p>
+          <a:p>
+            <a:pPr>
+              <a:spcAft>
+                <a:spcPts val="600"/>
+              </a:spcAft>
+              <a:defRPr sz="1150">
+                <a:solidFill>
+                  <a:srgbClr val="1E293B"/>
+                </a:solidFill>
+              </a:defRPr>
+            </a:pPr>
+            <a:r>
+              <a:t>• • YuNet: Modern AI face detection model built into OpenCV.</a:t>
+            </a:r>
+          </a:p>
+          <a:p>
+            <a:pPr>
+              <a:spcAft>
+                <a:spcPts val="600"/>
+              </a:spcAft>
+              <a:defRPr sz="1150">
+                <a:solidFill>
+                  <a:srgbClr val="1E293B"/>
+                </a:solidFill>
+              </a:defRPr>
+            </a:pPr>
+            <a:r>
+              <a:t>• • Tiny file size (just 232 KB) but achieves over 92% face accuracy.</a:t>
+            </a:r>
+          </a:p>
+          <a:p>
+            <a:pPr>
+              <a:spcAft>
+                <a:spcPts val="600"/>
+              </a:spcAft>
+              <a:defRPr sz="1150">
+                <a:solidFill>
+                  <a:srgbClr val="1E293B"/>
+                </a:solidFill>
+              </a:defRPr>
+            </a:pPr>
+            <a:r>
+              <a:t>• • Frontend: Clean HTML5, CSS3, and JavaScript.</a:t>
+            </a:r>
+          </a:p>
+          <a:p>
+            <a:pPr>
+              <a:spcAft>
+                <a:spcPts val="600"/>
+              </a:spcAft>
+              <a:defRPr sz="1150">
+                <a:solidFill>
+                  <a:srgbClr val="1E293B"/>
+                </a:solidFill>
+              </a:defRPr>
+            </a:pPr>
+            <a:r>
+              <a:t>• • Why chosen: Fast, runs on any laptop, and crops perfect passport photos.</a:t>
             </a:r>
           </a:p>
         </p:txBody>
@@ -7251,7 +7236,7 @@
               </a:defRPr>
             </a:pPr>
             <a:r>
-              <a:t>PHASE-I DELIVERABLES &amp; VERIFICATION</a:t>
+              <a:t>PHASE 1 DELIVERABLES</a:t>
             </a:r>
           </a:p>
         </p:txBody>
@@ -7279,14 +7264,14 @@
           <a:lstStyle/>
           <a:p>
             <a:pPr>
-              <a:defRPr sz="2200" b="1">
+              <a:defRPr sz="2100" b="1">
                 <a:solidFill>
                   <a:srgbClr val="FFFFFF"/>
                 </a:solidFill>
               </a:defRPr>
             </a:pPr>
             <a:r>
-              <a:t>Work Completed So Far &amp; Partial Results Achieved</a:t>
+              <a:t>Work Completed So Far (Our Working Results)</a:t>
             </a:r>
           </a:p>
         </p:txBody>
@@ -7321,7 +7306,7 @@
               </a:defRPr>
             </a:pPr>
             <a:r>
-              <a:t>Dept of Computer Science &amp; Engineering | UG Project Phase-I Review | Team: Deva S, Athithi A, Arthi S</a:t>
+              <a:t>Dept of CSE | UG Project Review - 1 | Team: Deva S, Athithi A, Arthi S</a:t>
             </a:r>
           </a:p>
         </p:txBody>
@@ -7397,59 +7382,74 @@
               <a:spcAft>
                 <a:spcPts val="1000"/>
               </a:spcAft>
-              <a:defRPr sz="1500" b="1">
+              <a:defRPr sz="1450" b="1">
                 <a:solidFill>
                   <a:srgbClr val="10B981"/>
                 </a:solidFill>
               </a:defRPr>
             </a:pPr>
             <a:r>
-              <a:t>1. Multi-Document Batch Ingestion</a:t>
-            </a:r>
-          </a:p>
-          <a:p>
-            <a:pPr>
-              <a:spcAft>
-                <a:spcPts val="600"/>
-              </a:spcAft>
-              <a:defRPr sz="1150">
-                <a:solidFill>
-                  <a:srgbClr val="1E293B"/>
-                </a:solidFill>
-              </a:defRPr>
-            </a:pPr>
-            <a:r>
-              <a:t>• • Completed interactive drag-and-drop accumulator UI with remove chips.</a:t>
-            </a:r>
-          </a:p>
-          <a:p>
-            <a:pPr>
-              <a:spcAft>
-                <a:spcPts val="600"/>
-              </a:spcAft>
-              <a:defRPr sz="1150">
-                <a:solidFill>
-                  <a:srgbClr val="1E293B"/>
-                </a:solidFill>
-              </a:defRPr>
-            </a:pPr>
-            <a:r>
-              <a:t>• • Ingests standalone Front PNG, Back PNG, and multi-page PDFs concurrently.</a:t>
-            </a:r>
-          </a:p>
-          <a:p>
-            <a:pPr>
-              <a:spcAft>
-                <a:spcPts val="600"/>
-              </a:spcAft>
-              <a:defRPr sz="1150">
-                <a:solidFill>
-                  <a:srgbClr val="1E293B"/>
-                </a:solidFill>
-              </a:defRPr>
-            </a:pPr>
-            <a:r>
-              <a:t>• • Verified on test documents: 'DEVA AADHAR.pdf' and raw card photos.</a:t>
+              <a:t>1. Multi-Document File Manager</a:t>
+            </a:r>
+          </a:p>
+          <a:p>
+            <a:pPr>
+              <a:spcAft>
+                <a:spcPts val="600"/>
+              </a:spcAft>
+              <a:defRPr sz="1150">
+                <a:solidFill>
+                  <a:srgbClr val="1E293B"/>
+                </a:solidFill>
+              </a:defRPr>
+            </a:pPr>
+            <a:r>
+              <a:t>• • Built an interactive drag-and-drop file uploader.</a:t>
+            </a:r>
+          </a:p>
+          <a:p>
+            <a:pPr>
+              <a:spcAft>
+                <a:spcPts val="600"/>
+              </a:spcAft>
+              <a:defRPr sz="1150">
+                <a:solidFill>
+                  <a:srgbClr val="1E293B"/>
+                </a:solidFill>
+              </a:defRPr>
+            </a:pPr>
+            <a:r>
+              <a:t>• • Users can attach Front PNG, Back PNG, and multi-page PDFs.</a:t>
+            </a:r>
+          </a:p>
+          <a:p>
+            <a:pPr>
+              <a:spcAft>
+                <a:spcPts val="600"/>
+              </a:spcAft>
+              <a:defRPr sz="1150">
+                <a:solidFill>
+                  <a:srgbClr val="1E293B"/>
+                </a:solidFill>
+              </a:defRPr>
+            </a:pPr>
+            <a:r>
+              <a:t>• • Shows file size badges and an 'X' button to remove files.</a:t>
+            </a:r>
+          </a:p>
+          <a:p>
+            <a:pPr>
+              <a:spcAft>
+                <a:spcPts val="600"/>
+              </a:spcAft>
+              <a:defRPr sz="1150">
+                <a:solidFill>
+                  <a:srgbClr val="1E293B"/>
+                </a:solidFill>
+              </a:defRPr>
+            </a:pPr>
+            <a:r>
+              <a:t>• • Status: 100% Completed &amp; Verified.</a:t>
             </a:r>
           </a:p>
         </p:txBody>
@@ -7525,59 +7525,74 @@
               <a:spcAft>
                 <a:spcPts val="1000"/>
               </a:spcAft>
-              <a:defRPr sz="1500" b="1">
+              <a:defRPr sz="1450" b="1">
                 <a:solidFill>
                   <a:srgbClr val="10B981"/>
                 </a:solidFill>
               </a:defRPr>
             </a:pPr>
             <a:r>
-              <a:t>2. YuNet Neural Face Isolation</a:t>
-            </a:r>
-          </a:p>
-          <a:p>
-            <a:pPr>
-              <a:spcAft>
-                <a:spcPts val="600"/>
-              </a:spcAft>
-              <a:defRPr sz="1150">
-                <a:solidFill>
-                  <a:srgbClr val="1E293B"/>
-                </a:solidFill>
-              </a:defRPr>
-            </a:pPr>
-            <a:r>
-              <a:t>• • Integrated OpenCV YuNet ONNX deep learning detector (232 KB weight).</a:t>
-            </a:r>
-          </a:p>
-          <a:p>
-            <a:pPr>
-              <a:spcAft>
-                <a:spcPts val="600"/>
-              </a:spcAft>
-              <a:defRPr sz="1150">
-                <a:solidFill>
-                  <a:srgbClr val="1E293B"/>
-                </a:solidFill>
-              </a:defRPr>
-            </a:pPr>
-            <a:r>
-              <a:t>• • Achieves 92%+ confidence face detection on ID cards with 40% passport margin.</a:t>
-            </a:r>
-          </a:p>
-          <a:p>
-            <a:pPr>
-              <a:spcAft>
-                <a:spcPts val="600"/>
-              </a:spcAft>
-              <a:defRPr sz="1150">
-                <a:solidFill>
-                  <a:srgbClr val="1E293B"/>
-                </a:solidFill>
-              </a:defRPr>
-            </a:pPr>
-            <a:r>
-              <a:t>• • Integrated HSV skin-tone filter (&gt;= 2.0%) to reject text crops.</a:t>
+              <a:t>2. Deep Learning Face Photo Cropping</a:t>
+            </a:r>
+          </a:p>
+          <a:p>
+            <a:pPr>
+              <a:spcAft>
+                <a:spcPts val="600"/>
+              </a:spcAft>
+              <a:defRPr sz="1150">
+                <a:solidFill>
+                  <a:srgbClr val="1E293B"/>
+                </a:solidFill>
+              </a:defRPr>
+            </a:pPr>
+            <a:r>
+              <a:t>• • Integrated OpenCV YuNet neural network (232 KB model).</a:t>
+            </a:r>
+          </a:p>
+          <a:p>
+            <a:pPr>
+              <a:spcAft>
+                <a:spcPts val="600"/>
+              </a:spcAft>
+              <a:defRPr sz="1150">
+                <a:solidFill>
+                  <a:srgbClr val="1E293B"/>
+                </a:solidFill>
+              </a:defRPr>
+            </a:pPr>
+            <a:r>
+              <a:t>• • Finds the applicant's face on the card with over 92% confidence.</a:t>
+            </a:r>
+          </a:p>
+          <a:p>
+            <a:pPr>
+              <a:spcAft>
+                <a:spcPts val="600"/>
+              </a:spcAft>
+              <a:defRPr sz="1150">
+                <a:solidFill>
+                  <a:srgbClr val="1E293B"/>
+                </a:solidFill>
+              </a:defRPr>
+            </a:pPr>
+            <a:r>
+              <a:t>• • Crops a clean 1:1 passport photo with proper margins around head.</a:t>
+            </a:r>
+          </a:p>
+          <a:p>
+            <a:pPr>
+              <a:spcAft>
+                <a:spcPts val="600"/>
+              </a:spcAft>
+              <a:defRPr sz="1150">
+                <a:solidFill>
+                  <a:srgbClr val="1E293B"/>
+                </a:solidFill>
+              </a:defRPr>
+            </a:pPr>
+            <a:r>
+              <a:t>• • Skin-tone filter prevents accidentally cropping text boxes.</a:t>
             </a:r>
           </a:p>
         </p:txBody>
@@ -7653,59 +7668,59 @@
               <a:spcAft>
                 <a:spcPts val="1000"/>
               </a:spcAft>
-              <a:defRPr sz="1500" b="1">
+              <a:defRPr sz="1450" b="1">
                 <a:solidFill>
                   <a:srgbClr val="2563EB"/>
                 </a:solidFill>
               </a:defRPr>
             </a:pPr>
             <a:r>
-              <a:t>3. Precision UID &amp; Relation Extraction</a:t>
-            </a:r>
-          </a:p>
-          <a:p>
-            <a:pPr>
-              <a:spcAft>
-                <a:spcPts val="600"/>
-              </a:spcAft>
-              <a:defRPr sz="1150">
-                <a:solidFill>
-                  <a:srgbClr val="1E293B"/>
-                </a:solidFill>
-              </a:defRPr>
-            </a:pPr>
-            <a:r>
-              <a:t>• • Implemented regex overriding enrolment numbers to capture 12-digit UID ('6120 9678 1604').</a:t>
-            </a:r>
-          </a:p>
-          <a:p>
-            <a:pPr>
-              <a:spcAft>
-                <a:spcPts val="600"/>
-              </a:spcAft>
-              <a:defRPr sz="1150">
-                <a:solidFill>
-                  <a:srgbClr val="1E293B"/>
-                </a:solidFill>
-              </a:defRPr>
-            </a:pPr>
-            <a:r>
-              <a:t>• • Resolved OCR misreads ('SJO', 'S.O' -&gt; 'Father') and extracted relative name ('Shankar').</a:t>
-            </a:r>
-          </a:p>
-          <a:p>
-            <a:pPr>
-              <a:spcAft>
-                <a:spcPts val="600"/>
-              </a:spcAft>
-              <a:defRPr sz="1150">
-                <a:solidFill>
-                  <a:srgbClr val="1E293B"/>
-                </a:solidFill>
-              </a:defRPr>
-            </a:pPr>
-            <a:r>
-              <a:t>• • Auto-selects corresponding HTML `&lt;select&gt;` option in Form 6.</a:t>
+              <a:t>3. Accurate Aadhaar Number &amp; Relative Name</a:t>
+            </a:r>
+          </a:p>
+          <a:p>
+            <a:pPr>
+              <a:spcAft>
+                <a:spcPts val="600"/>
+              </a:spcAft>
+              <a:defRPr sz="1150">
+                <a:solidFill>
+                  <a:srgbClr val="1E293B"/>
+                </a:solidFill>
+              </a:defRPr>
+            </a:pPr>
+            <a:r>
+              <a:t>• • Fixed Aadhaar extraction: Picks 12-digit UID (e.g. 6120 9678 1604) and ignores 14-digit enrolment numbers.</a:t>
+            </a:r>
+          </a:p>
+          <a:p>
+            <a:pPr>
+              <a:spcAft>
+                <a:spcPts val="600"/>
+              </a:spcAft>
+              <a:defRPr sz="1150">
+                <a:solidFill>
+                  <a:srgbClr val="1E293B"/>
+                </a:solidFill>
+              </a:defRPr>
+            </a:pPr>
+            <a:r>
+              <a:t>• • Fixed Relative extraction: Handles 'SJO' or 'S/O' and extracts father's name ('Shankar').</a:t>
+            </a:r>
+          </a:p>
+          <a:p>
+            <a:pPr>
+              <a:spcAft>
+                <a:spcPts val="600"/>
+              </a:spcAft>
+              <a:defRPr sz="1150">
+                <a:solidFill>
+                  <a:srgbClr val="1E293B"/>
+                </a:solidFill>
+              </a:defRPr>
+            </a:pPr>
+            <a:r>
+              <a:t>• • Automatically sets 'Father' in the relationship dropdown.</a:t>
             </a:r>
           </a:p>
         </p:txBody>
@@ -7781,59 +7796,74 @@
               <a:spcAft>
                 <a:spcPts val="1000"/>
               </a:spcAft>
-              <a:defRPr sz="1500" b="1">
+              <a:defRPr sz="1450" b="1">
                 <a:solidFill>
                   <a:srgbClr val="2563EB"/>
                 </a:solidFill>
               </a:defRPr>
             </a:pPr>
             <a:r>
-              <a:t>4. Address Breakdown &amp; Disclaimer Filter</a:t>
-            </a:r>
-          </a:p>
-          <a:p>
-            <a:pPr>
-              <a:spcAft>
-                <a:spcPts val="600"/>
-              </a:spcAft>
-              <a:defRPr sz="1150">
-                <a:solidFill>
-                  <a:srgbClr val="1E293B"/>
-                </a:solidFill>
-              </a:defRPr>
-            </a:pPr>
-            <a:r>
-              <a:t>• • Resolved disclaimer leakage: filtered out 'Documents to support identity...'.</a:t>
-            </a:r>
-          </a:p>
-          <a:p>
-            <a:pPr>
-              <a:spcAft>
-                <a:spcPts val="600"/>
-              </a:spcAft>
-              <a:defRPr sz="1150">
-                <a:solidFill>
-                  <a:srgbClr val="1E293B"/>
-                </a:solidFill>
-              </a:defRPr>
-            </a:pPr>
-            <a:r>
-              <a:t>• • Accurately parsed House No ('78') and Street ('2ND STREET, INDRA GANDHI NAGAR').</a:t>
-            </a:r>
-          </a:p>
-          <a:p>
-            <a:pPr>
-              <a:spcAft>
-                <a:spcPts val="600"/>
-              </a:spcAft>
-              <a:defRPr sz="1150">
-                <a:solidFill>
-                  <a:srgbClr val="1E293B"/>
-                </a:solidFill>
-              </a:defRPr>
-            </a:pPr>
-            <a:r>
-              <a:t>• • Normalized Date of Birth to HTML5 format ('2006-02-21' -&gt; '21-02-2006').</a:t>
+              <a:t>4. Clean Address Splitting</a:t>
+            </a:r>
+          </a:p>
+          <a:p>
+            <a:pPr>
+              <a:spcAft>
+                <a:spcPts val="600"/>
+              </a:spcAft>
+              <a:defRPr sz="1150">
+                <a:solidFill>
+                  <a:srgbClr val="1E293B"/>
+                </a:solidFill>
+              </a:defRPr>
+            </a:pPr>
+            <a:r>
+              <a:t>• • Filtered out legal warnings ('Documents to support identity...').</a:t>
+            </a:r>
+          </a:p>
+          <a:p>
+            <a:pPr>
+              <a:spcAft>
+                <a:spcPts val="600"/>
+              </a:spcAft>
+              <a:defRPr sz="1150">
+                <a:solidFill>
+                  <a:srgbClr val="1E293B"/>
+                </a:solidFill>
+              </a:defRPr>
+            </a:pPr>
+            <a:r>
+              <a:t>• • Cleanly splits House/Door No ('78') and Street ('2ND STREET, INDRA GANDHI NAGAR').</a:t>
+            </a:r>
+          </a:p>
+          <a:p>
+            <a:pPr>
+              <a:spcAft>
+                <a:spcPts val="600"/>
+              </a:spcAft>
+              <a:defRPr sz="1150">
+                <a:solidFill>
+                  <a:srgbClr val="1E293B"/>
+                </a:solidFill>
+              </a:defRPr>
+            </a:pPr>
+            <a:r>
+              <a:t>• • Converts Date of Birth to HTML date format ('21-02-2006').</a:t>
+            </a:r>
+          </a:p>
+          <a:p>
+            <a:pPr>
+              <a:spcAft>
+                <a:spcPts val="600"/>
+              </a:spcAft>
+              <a:defRPr sz="1150">
+                <a:solidFill>
+                  <a:srgbClr val="1E293B"/>
+                </a:solidFill>
+              </a:defRPr>
+            </a:pPr>
+            <a:r>
+              <a:t>• • Code pushed to GitHub: github.com/deva-2006/govtAutofill.</a:t>
             </a:r>
           </a:p>
         </p:txBody>
@@ -7972,7 +8002,7 @@
               </a:defRPr>
             </a:pPr>
             <a:r>
-              <a:t>QUANTITATIVE &amp; QUALITATIVE BENCHMARKS</a:t>
+              <a:t>EXPECTED RESULTS</a:t>
             </a:r>
           </a:p>
         </p:txBody>
@@ -8000,14 +8030,14 @@
           <a:lstStyle/>
           <a:p>
             <a:pPr>
-              <a:defRPr sz="2200" b="1">
+              <a:defRPr sz="2100" b="1">
                 <a:solidFill>
                   <a:srgbClr val="FFFFFF"/>
                 </a:solidFill>
               </a:defRPr>
             </a:pPr>
             <a:r>
-              <a:t>Expected Outcomes &amp; Impact Metrics</a:t>
+              <a:t>Expected Outcomes: Big Benefits for Citizens</a:t>
             </a:r>
           </a:p>
         </p:txBody>
@@ -8042,7 +8072,7 @@
               </a:defRPr>
             </a:pPr>
             <a:r>
-              <a:t>Dept of Computer Science &amp; Engineering | UG Project Phase-I Review | Team: Deva S, Athithi A, Arthi S</a:t>
+              <a:t>Dept of CSE | UG Project Review - 1 | Team: Deva S, Athithi A, Arthi S</a:t>
             </a:r>
           </a:p>
         </p:txBody>
@@ -8118,59 +8148,59 @@
               <a:spcAft>
                 <a:spcPts val="1000"/>
               </a:spcAft>
-              <a:defRPr sz="1500" b="1">
+              <a:defRPr sz="1450" b="1">
                 <a:solidFill>
                   <a:srgbClr val="10B981"/>
                 </a:solidFill>
               </a:defRPr>
             </a:pPr>
             <a:r>
-              <a:t>1. Dramatic Reduction in Completion Time</a:t>
-            </a:r>
-          </a:p>
-          <a:p>
-            <a:pPr>
-              <a:spcAft>
-                <a:spcPts val="600"/>
-              </a:spcAft>
-              <a:defRPr sz="1150">
-                <a:solidFill>
-                  <a:srgbClr val="1E293B"/>
-                </a:solidFill>
-              </a:defRPr>
-            </a:pPr>
-            <a:r>
-              <a:t>• • Baseline Manual Time: 10 - 15 minutes per voter registration.</a:t>
-            </a:r>
-          </a:p>
-          <a:p>
-            <a:pPr>
-              <a:spcAft>
-                <a:spcPts val="600"/>
-              </a:spcAft>
-              <a:defRPr sz="1150">
-                <a:solidFill>
-                  <a:srgbClr val="1E293B"/>
-                </a:solidFill>
-              </a:defRPr>
-            </a:pPr>
-            <a:r>
-              <a:t>• • Proposed Autonomous Pipeline: Under 30 seconds end-to-end.</a:t>
-            </a:r>
-          </a:p>
-          <a:p>
-            <a:pPr>
-              <a:spcAft>
-                <a:spcPts val="600"/>
-              </a:spcAft>
-              <a:defRPr sz="1150">
-                <a:solidFill>
-                  <a:srgbClr val="1E293B"/>
-                </a:solidFill>
-              </a:defRPr>
-            </a:pPr>
-            <a:r>
-              <a:t>• • Achieves an overall time reduction exceeding 90%.</a:t>
+              <a:t>1. 90% Faster Form Filling</a:t>
+            </a:r>
+          </a:p>
+          <a:p>
+            <a:pPr>
+              <a:spcAft>
+                <a:spcPts val="600"/>
+              </a:spcAft>
+              <a:defRPr sz="1150">
+                <a:solidFill>
+                  <a:srgbClr val="1E293B"/>
+                </a:solidFill>
+              </a:defRPr>
+            </a:pPr>
+            <a:r>
+              <a:t>• • Manual time today: 10 to 15 minutes per form.</a:t>
+            </a:r>
+          </a:p>
+          <a:p>
+            <a:pPr>
+              <a:spcAft>
+                <a:spcPts val="600"/>
+              </a:spcAft>
+              <a:defRPr sz="1150">
+                <a:solidFill>
+                  <a:srgbClr val="1E293B"/>
+                </a:solidFill>
+              </a:defRPr>
+            </a:pPr>
+            <a:r>
+              <a:t>• • With our system: Under 25 to 30 seconds.</a:t>
+            </a:r>
+          </a:p>
+          <a:p>
+            <a:pPr>
+              <a:spcAft>
+                <a:spcPts val="600"/>
+              </a:spcAft>
+              <a:defRPr sz="1150">
+                <a:solidFill>
+                  <a:srgbClr val="1E293B"/>
+                </a:solidFill>
+              </a:defRPr>
+            </a:pPr>
+            <a:r>
+              <a:t>• • Saves huge amounts of time for citizens and registration camps.</a:t>
             </a:r>
           </a:p>
         </p:txBody>
@@ -8246,59 +8276,59 @@
               <a:spcAft>
                 <a:spcPts val="1000"/>
               </a:spcAft>
-              <a:defRPr sz="1500" b="1">
+              <a:defRPr sz="1450" b="1">
                 <a:solidFill>
                   <a:srgbClr val="10B981"/>
                 </a:solidFill>
               </a:defRPr>
             </a:pPr>
             <a:r>
-              <a:t>2. Accuracy &amp; Error Mitigation</a:t>
-            </a:r>
-          </a:p>
-          <a:p>
-            <a:pPr>
-              <a:spcAft>
-                <a:spcPts val="600"/>
-              </a:spcAft>
-              <a:defRPr sz="1150">
-                <a:solidFill>
-                  <a:srgbClr val="1E293B"/>
-                </a:solidFill>
-              </a:defRPr>
-            </a:pPr>
-            <a:r>
-              <a:t>• • Typographical error rate dropped from 18-24% to below 2%.</a:t>
-            </a:r>
-          </a:p>
-          <a:p>
-            <a:pPr>
-              <a:spcAft>
-                <a:spcPts val="600"/>
-              </a:spcAft>
-              <a:defRPr sz="1150">
-                <a:solidFill>
-                  <a:srgbClr val="1E293B"/>
-                </a:solidFill>
-              </a:defRPr>
-            </a:pPr>
-            <a:r>
-              <a:t>• • Zero formatting errors on Date of Birth and 12-digit Aadhaar UID.</a:t>
-            </a:r>
-          </a:p>
-          <a:p>
-            <a:pPr>
-              <a:spcAft>
-                <a:spcPts val="600"/>
-              </a:spcAft>
-              <a:defRPr sz="1150">
-                <a:solidFill>
-                  <a:srgbClr val="1E293B"/>
-                </a:solidFill>
-              </a:defRPr>
-            </a:pPr>
-            <a:r>
-              <a:t>• • Drastic reduction in administrative re-verification cycles by electoral officers.</a:t>
+              <a:t>2. Almost Zero Typing Mistakes</a:t>
+            </a:r>
+          </a:p>
+          <a:p>
+            <a:pPr>
+              <a:spcAft>
+                <a:spcPts val="600"/>
+              </a:spcAft>
+              <a:defRPr sz="1150">
+                <a:solidFill>
+                  <a:srgbClr val="1E293B"/>
+                </a:solidFill>
+              </a:defRPr>
+            </a:pPr>
+            <a:r>
+              <a:t>• • Typing error rate drops from ~20% to less than 2%.</a:t>
+            </a:r>
+          </a:p>
+          <a:p>
+            <a:pPr>
+              <a:spcAft>
+                <a:spcPts val="600"/>
+              </a:spcAft>
+              <a:defRPr sz="1150">
+                <a:solidFill>
+                  <a:srgbClr val="1E293B"/>
+                </a:solidFill>
+              </a:defRPr>
+            </a:pPr>
+            <a:r>
+              <a:t>• • Eliminates wrong date formats and misspelled names.</a:t>
+            </a:r>
+          </a:p>
+          <a:p>
+            <a:pPr>
+              <a:spcAft>
+                <a:spcPts val="600"/>
+              </a:spcAft>
+              <a:defRPr sz="1150">
+                <a:solidFill>
+                  <a:srgbClr val="1E293B"/>
+                </a:solidFill>
+              </a:defRPr>
+            </a:pPr>
+            <a:r>
+              <a:t>• • Applications get approved faster without administrative queries.</a:t>
             </a:r>
           </a:p>
         </p:txBody>
@@ -8374,59 +8404,59 @@
               <a:spcAft>
                 <a:spcPts val="1000"/>
               </a:spcAft>
-              <a:defRPr sz="1500" b="1">
+              <a:defRPr sz="1450" b="1">
                 <a:solidFill>
                   <a:srgbClr val="2563EB"/>
                 </a:solidFill>
               </a:defRPr>
             </a:pPr>
             <a:r>
-              <a:t>3. Strict Data Sovereignty (DPDPA 2023)</a:t>
-            </a:r>
-          </a:p>
-          <a:p>
-            <a:pPr>
-              <a:spcAft>
-                <a:spcPts val="600"/>
-              </a:spcAft>
-              <a:defRPr sz="1150">
-                <a:solidFill>
-                  <a:srgbClr val="1E293B"/>
-                </a:solidFill>
-              </a:defRPr>
-            </a:pPr>
-            <a:r>
-              <a:t>• • 100% on-device local execution; zero telemetry or cloud logging.</a:t>
-            </a:r>
-          </a:p>
-          <a:p>
-            <a:pPr>
-              <a:spcAft>
-                <a:spcPts val="600"/>
-              </a:spcAft>
-              <a:defRPr sz="1150">
-                <a:solidFill>
-                  <a:srgbClr val="1E293B"/>
-                </a:solidFill>
-              </a:defRPr>
-            </a:pPr>
-            <a:r>
-              <a:t>• • Eliminates PII data breaches common in public cyber cafes.</a:t>
-            </a:r>
-          </a:p>
-          <a:p>
-            <a:pPr>
-              <a:spcAft>
-                <a:spcPts val="600"/>
-              </a:spcAft>
-              <a:defRPr sz="1150">
-                <a:solidFill>
-                  <a:srgbClr val="1E293B"/>
-                </a:solidFill>
-              </a:defRPr>
-            </a:pPr>
-            <a:r>
-              <a:t>• • Conforms strictly to India's Digital Personal Data Protection Act.</a:t>
+              <a:t>3. 100% Data Privacy (Safe for Citizens)</a:t>
+            </a:r>
+          </a:p>
+          <a:p>
+            <a:pPr>
+              <a:spcAft>
+                <a:spcPts val="600"/>
+              </a:spcAft>
+              <a:defRPr sz="1150">
+                <a:solidFill>
+                  <a:srgbClr val="1E293B"/>
+                </a:solidFill>
+              </a:defRPr>
+            </a:pPr>
+            <a:r>
+              <a:t>• • All processing runs locally on the user's computer.</a:t>
+            </a:r>
+          </a:p>
+          <a:p>
+            <a:pPr>
+              <a:spcAft>
+                <a:spcPts val="600"/>
+              </a:spcAft>
+              <a:defRPr sz="1150">
+                <a:solidFill>
+                  <a:srgbClr val="1E293B"/>
+                </a:solidFill>
+              </a:defRPr>
+            </a:pPr>
+            <a:r>
+              <a:t>• • No Aadhaar data is stored or sent to outside servers.</a:t>
+            </a:r>
+          </a:p>
+          <a:p>
+            <a:pPr>
+              <a:spcAft>
+                <a:spcPts val="600"/>
+              </a:spcAft>
+              <a:defRPr sz="1150">
+                <a:solidFill>
+                  <a:srgbClr val="1E293B"/>
+                </a:solidFill>
+              </a:defRPr>
+            </a:pPr>
+            <a:r>
+              <a:t>• • Safe to use even on personal computers.</a:t>
             </a:r>
           </a:p>
         </p:txBody>
@@ -8502,59 +8532,44 @@
               <a:spcAft>
                 <a:spcPts val="1000"/>
               </a:spcAft>
-              <a:defRPr sz="1500" b="1">
+              <a:defRPr sz="1450" b="1">
                 <a:solidFill>
                   <a:srgbClr val="2563EB"/>
                 </a:solidFill>
               </a:defRPr>
             </a:pPr>
             <a:r>
-              <a:t>4. System Modularity &amp; Portability</a:t>
-            </a:r>
-          </a:p>
-          <a:p>
-            <a:pPr>
-              <a:spcAft>
-                <a:spcPts val="600"/>
-              </a:spcAft>
-              <a:defRPr sz="1150">
-                <a:solidFill>
-                  <a:srgbClr val="1E293B"/>
-                </a:solidFill>
-              </a:defRPr>
-            </a:pPr>
-            <a:r>
-              <a:t>• • Generalizable schema extensible to PAN 49A, Passport Seva, and Driving License.</a:t>
-            </a:r>
-          </a:p>
-          <a:p>
-            <a:pPr>
-              <a:spcAft>
-                <a:spcPts val="600"/>
-              </a:spcAft>
-              <a:defRPr sz="1150">
-                <a:solidFill>
-                  <a:srgbClr val="1E293B"/>
-                </a:solidFill>
-              </a:defRPr>
-            </a:pPr>
-            <a:r>
-              <a:t>• • Low resource footprint: operates smoothly on standard 8GB RAM commodity laptops.</a:t>
-            </a:r>
-          </a:p>
-          <a:p>
-            <a:pPr>
-              <a:spcAft>
-                <a:spcPts val="600"/>
-              </a:spcAft>
-              <a:defRPr sz="1150">
-                <a:solidFill>
-                  <a:srgbClr val="1E293B"/>
-                </a:solidFill>
-              </a:defRPr>
-            </a:pPr>
-            <a:r>
-              <a:t>• • Ready for deployment as a standalone portal, kiosk app, or browser extension.</a:t>
+              <a:t>4. Reusable for Other Forms</a:t>
+            </a:r>
+          </a:p>
+          <a:p>
+            <a:pPr>
+              <a:spcAft>
+                <a:spcPts val="600"/>
+              </a:spcAft>
+              <a:defRPr sz="1150">
+                <a:solidFill>
+                  <a:srgbClr val="1E293B"/>
+                </a:solidFill>
+              </a:defRPr>
+            </a:pPr>
+            <a:r>
+              <a:t>• • Can be easily adapted for PAN card applications, Driving License forms, or College admissions.</a:t>
+            </a:r>
+          </a:p>
+          <a:p>
+            <a:pPr>
+              <a:spcAft>
+                <a:spcPts val="600"/>
+              </a:spcAft>
+              <a:defRPr sz="1150">
+                <a:solidFill>
+                  <a:srgbClr val="1E293B"/>
+                </a:solidFill>
+              </a:defRPr>
+            </a:pPr>
+            <a:r>
+              <a:t>• • Works on normal 8GB RAM laptops without expensive GPUs.</a:t>
             </a:r>
           </a:p>
         </p:txBody>
@@ -8693,7 +8708,7 @@
               </a:defRPr>
             </a:pPr>
             <a:r>
-              <a:t>GANTT CHART &amp; PHASE ROADMAP</a:t>
+              <a:t>ROADMAP</a:t>
             </a:r>
           </a:p>
         </p:txBody>
@@ -8721,14 +8736,14 @@
           <a:lstStyle/>
           <a:p>
             <a:pPr>
-              <a:defRPr sz="2200" b="1">
+              <a:defRPr sz="2100" b="1">
                 <a:solidFill>
                   <a:srgbClr val="FFFFFF"/>
                 </a:solidFill>
               </a:defRPr>
             </a:pPr>
             <a:r>
-              <a:t>Project Timeline, Milestones &amp; Work Plan</a:t>
+              <a:t>Project Timeline &amp; Work Plan</a:t>
             </a:r>
           </a:p>
         </p:txBody>
@@ -8763,7 +8778,7 @@
               </a:defRPr>
             </a:pPr>
             <a:r>
-              <a:t>Dept of Computer Science &amp; Engineering | UG Project Phase-I Review | Team: Deva S, Athithi A, Arthi S</a:t>
+              <a:t>Dept of CSE | UG Project Review - 1 | Team: Deva S, Athithi A, Arthi S</a:t>
             </a:r>
           </a:p>
         </p:txBody>
@@ -8839,74 +8854,104 @@
               <a:spcAft>
                 <a:spcPts val="1000"/>
               </a:spcAft>
-              <a:defRPr sz="1500" b="1">
+              <a:defRPr sz="1450" b="1">
                 <a:solidFill>
                   <a:srgbClr val="10B981"/>
                 </a:solidFill>
               </a:defRPr>
             </a:pPr>
             <a:r>
-              <a:t>Phase I: Inception &amp; Core Prototype [COMPLETED]</a:t>
-            </a:r>
-          </a:p>
-          <a:p>
-            <a:pPr>
-              <a:spcAft>
-                <a:spcPts val="600"/>
-              </a:spcAft>
-              <a:defRPr sz="1150">
-                <a:solidFill>
-                  <a:srgbClr val="1E293B"/>
-                </a:solidFill>
-              </a:defRPr>
-            </a:pPr>
-            <a:r>
-              <a:t>• • Month 1 - 2: Literature survey, ECI Form 6 schema analysis, DPI privacy audit.</a:t>
-            </a:r>
-          </a:p>
-          <a:p>
-            <a:pPr>
-              <a:spcAft>
-                <a:spcPts val="600"/>
-              </a:spcAft>
-              <a:defRPr sz="1150">
-                <a:solidFill>
-                  <a:srgbClr val="1E293B"/>
-                </a:solidFill>
-              </a:defRPr>
-            </a:pPr>
-            <a:r>
-              <a:t>• • Month 3 - 4: EasyOCR integration, local Llama 3.2 runtime setup via Ollama.</a:t>
-            </a:r>
-          </a:p>
-          <a:p>
-            <a:pPr>
-              <a:spcAft>
-                <a:spcPts val="600"/>
-              </a:spcAft>
-              <a:defRPr sz="1150">
-                <a:solidFill>
-                  <a:srgbClr val="1E293B"/>
-                </a:solidFill>
-              </a:defRPr>
-            </a:pPr>
-            <a:r>
-              <a:t>• • Month 5: YuNet ONNX face detection, regex normalizers, multi-document UI.</a:t>
-            </a:r>
-          </a:p>
-          <a:p>
-            <a:pPr>
-              <a:spcAft>
-                <a:spcPts val="600"/>
-              </a:spcAft>
-              <a:defRPr sz="1150">
-                <a:solidFill>
-                  <a:srgbClr val="1E293B"/>
-                </a:solidFill>
-              </a:defRPr>
-            </a:pPr>
-            <a:r>
-              <a:t>• • Outcome: Working end-to-end prototype demonstrated in Review - I.</a:t>
+              <a:t>Phase 1: Working Prototype [COMPLETED]</a:t>
+            </a:r>
+          </a:p>
+          <a:p>
+            <a:pPr>
+              <a:spcAft>
+                <a:spcPts val="600"/>
+              </a:spcAft>
+              <a:defRPr sz="1150">
+                <a:solidFill>
+                  <a:srgbClr val="1E293B"/>
+                </a:solidFill>
+              </a:defRPr>
+            </a:pPr>
+            <a:r>
+              <a:t>• • Studied Voter ID Form 6 requirements.</a:t>
+            </a:r>
+          </a:p>
+          <a:p>
+            <a:pPr>
+              <a:spcAft>
+                <a:spcPts val="600"/>
+              </a:spcAft>
+              <a:defRPr sz="1150">
+                <a:solidFill>
+                  <a:srgbClr val="1E293B"/>
+                </a:solidFill>
+              </a:defRPr>
+            </a:pPr>
+            <a:r>
+              <a:t>• • Integrated EasyOCR for reading text.</a:t>
+            </a:r>
+          </a:p>
+          <a:p>
+            <a:pPr>
+              <a:spcAft>
+                <a:spcPts val="600"/>
+              </a:spcAft>
+              <a:defRPr sz="1150">
+                <a:solidFill>
+                  <a:srgbClr val="1E293B"/>
+                </a:solidFill>
+              </a:defRPr>
+            </a:pPr>
+            <a:r>
+              <a:t>• • Setup local Meta Llama 3.2 AI via Ollama.</a:t>
+            </a:r>
+          </a:p>
+          <a:p>
+            <a:pPr>
+              <a:spcAft>
+                <a:spcPts val="600"/>
+              </a:spcAft>
+              <a:defRPr sz="1150">
+                <a:solidFill>
+                  <a:srgbClr val="1E293B"/>
+                </a:solidFill>
+              </a:defRPr>
+            </a:pPr>
+            <a:r>
+              <a:t>• • Integrated OpenCV YuNet deep learning face cropping.</a:t>
+            </a:r>
+          </a:p>
+          <a:p>
+            <a:pPr>
+              <a:spcAft>
+                <a:spcPts val="600"/>
+              </a:spcAft>
+              <a:defRPr sz="1150">
+                <a:solidFill>
+                  <a:srgbClr val="1E293B"/>
+                </a:solidFill>
+              </a:defRPr>
+            </a:pPr>
+            <a:r>
+              <a:t>• • Tested and verified on sample Aadhaar cards.</a:t>
+            </a:r>
+          </a:p>
+          <a:p>
+            <a:pPr>
+              <a:spcAft>
+                <a:spcPts val="600"/>
+              </a:spcAft>
+              <a:defRPr sz="1150">
+                <a:solidFill>
+                  <a:srgbClr val="1E293B"/>
+                </a:solidFill>
+              </a:defRPr>
+            </a:pPr>
+            <a:r>
+              <a:t>• • Current Status: Fully working prototype demonstrated in Review 1.</a:t>
             </a:r>
           </a:p>
         </p:txBody>
@@ -8982,74 +9027,74 @@
               <a:spcAft>
                 <a:spcPts val="1000"/>
               </a:spcAft>
-              <a:defRPr sz="1500" b="1">
+              <a:defRPr sz="1450" b="1">
                 <a:solidFill>
                   <a:srgbClr val="2563EB"/>
                 </a:solidFill>
               </a:defRPr>
             </a:pPr>
             <a:r>
-              <a:t>Phase II: Multi-Doc Expansion &amp; Security [MID REVIEW]</a:t>
-            </a:r>
-          </a:p>
-          <a:p>
-            <a:pPr>
-              <a:spcAft>
-                <a:spcPts val="600"/>
-              </a:spcAft>
-              <a:defRPr sz="1150">
-                <a:solidFill>
-                  <a:srgbClr val="1E293B"/>
-                </a:solidFill>
-              </a:defRPr>
-            </a:pPr>
-            <a:r>
-              <a:t>• • Month 6: Expand ingestion pipeline to PAN Card, Driving License, and Passport.</a:t>
-            </a:r>
-          </a:p>
-          <a:p>
-            <a:pPr>
-              <a:spcAft>
-                <a:spcPts val="600"/>
-              </a:spcAft>
-              <a:defRPr sz="1150">
-                <a:solidFill>
-                  <a:srgbClr val="1E293B"/>
-                </a:solidFill>
-              </a:defRPr>
-            </a:pPr>
-            <a:r>
-              <a:t>• • Month 7: Implement client-side AES-256 session purging to guarantee zero cache retention.</a:t>
-            </a:r>
-          </a:p>
-          <a:p>
-            <a:pPr>
-              <a:spcAft>
-                <a:spcPts val="600"/>
-              </a:spcAft>
-              <a:defRPr sz="1150">
-                <a:solidFill>
-                  <a:srgbClr val="1E293B"/>
-                </a:solidFill>
-              </a:defRPr>
-            </a:pPr>
-            <a:r>
-              <a:t>• • Month 8: Confidence score visual indicators for each autofilled input box.</a:t>
-            </a:r>
-          </a:p>
-          <a:p>
-            <a:pPr>
-              <a:spcAft>
-                <a:spcPts val="600"/>
-              </a:spcAft>
-              <a:defRPr sz="1150">
-                <a:solidFill>
-                  <a:srgbClr val="1E293B"/>
-                </a:solidFill>
-              </a:defRPr>
-            </a:pPr>
-            <a:r>
-              <a:t>• • Outcome: Multi-document cross-verification prototype for Review - II.</a:t>
+              <a:t>Phase 2: More Documents &amp; Security [MID REVIEW]</a:t>
+            </a:r>
+          </a:p>
+          <a:p>
+            <a:pPr>
+              <a:spcAft>
+                <a:spcPts val="600"/>
+              </a:spcAft>
+              <a:defRPr sz="1150">
+                <a:solidFill>
+                  <a:srgbClr val="1E293B"/>
+                </a:solidFill>
+              </a:defRPr>
+            </a:pPr>
+            <a:r>
+              <a:t>• • Add support for PAN Card and Driving License uploads.</a:t>
+            </a:r>
+          </a:p>
+          <a:p>
+            <a:pPr>
+              <a:spcAft>
+                <a:spcPts val="600"/>
+              </a:spcAft>
+              <a:defRPr sz="1150">
+                <a:solidFill>
+                  <a:srgbClr val="1E293B"/>
+                </a:solidFill>
+              </a:defRPr>
+            </a:pPr>
+            <a:r>
+              <a:t>• • Cross-verify name and DOB between Aadhaar and PAN card.</a:t>
+            </a:r>
+          </a:p>
+          <a:p>
+            <a:pPr>
+              <a:spcAft>
+                <a:spcPts val="600"/>
+              </a:spcAft>
+              <a:defRPr sz="1150">
+                <a:solidFill>
+                  <a:srgbClr val="1E293B"/>
+                </a:solidFill>
+              </a:defRPr>
+            </a:pPr>
+            <a:r>
+              <a:t>• • Add green checkmarks showing confidence for each filled box.</a:t>
+            </a:r>
+          </a:p>
+          <a:p>
+            <a:pPr>
+              <a:spcAft>
+                <a:spcPts val="600"/>
+              </a:spcAft>
+              <a:defRPr sz="1150">
+                <a:solidFill>
+                  <a:srgbClr val="1E293B"/>
+                </a:solidFill>
+              </a:defRPr>
+            </a:pPr>
+            <a:r>
+              <a:t>• • Automatically wipe uploaded images from memory after form is submitted.</a:t>
             </a:r>
           </a:p>
         </p:txBody>
@@ -9125,74 +9170,74 @@
               <a:spcAft>
                 <a:spcPts val="1000"/>
               </a:spcAft>
-              <a:defRPr sz="1500" b="1">
-                <a:solidFill>
-                  <a:srgbClr val="1E293B"/>
-                </a:solidFill>
-              </a:defRPr>
-            </a:pPr>
-            <a:r>
-              <a:t>Phase III: Extension &amp; Field Evaluation [FINAL REVIEW]</a:t>
-            </a:r>
-          </a:p>
-          <a:p>
-            <a:pPr>
-              <a:spcAft>
-                <a:spcPts val="600"/>
-              </a:spcAft>
-              <a:defRPr sz="1150">
-                <a:solidFill>
-                  <a:srgbClr val="1E293B"/>
-                </a:solidFill>
-              </a:defRPr>
-            </a:pPr>
-            <a:r>
-              <a:t>• • Month 9: Package core frontend as a WebExtension (Chrome/Firefox) for live portal injection.</a:t>
-            </a:r>
-          </a:p>
-          <a:p>
-            <a:pPr>
-              <a:spcAft>
-                <a:spcPts val="600"/>
-              </a:spcAft>
-              <a:defRPr sz="1150">
-                <a:solidFill>
-                  <a:srgbClr val="1E293B"/>
-                </a:solidFill>
-              </a:defRPr>
-            </a:pPr>
-            <a:r>
-              <a:t>• • Month 10: Conduct empirical user study across 50+ diverse test demographic cards.</a:t>
-            </a:r>
-          </a:p>
-          <a:p>
-            <a:pPr>
-              <a:spcAft>
-                <a:spcPts val="600"/>
-              </a:spcAft>
-              <a:defRPr sz="1150">
-                <a:solidFill>
-                  <a:srgbClr val="1E293B"/>
-                </a:solidFill>
-              </a:defRPr>
-            </a:pPr>
-            <a:r>
-              <a:t>• • Month 11: Latency optimization (Quantized 4-bit SLM) and stress benchmarking.</a:t>
-            </a:r>
-          </a:p>
-          <a:p>
-            <a:pPr>
-              <a:spcAft>
-                <a:spcPts val="600"/>
-              </a:spcAft>
-              <a:defRPr sz="1150">
-                <a:solidFill>
-                  <a:srgbClr val="1E293B"/>
-                </a:solidFill>
-              </a:defRPr>
-            </a:pPr>
-            <a:r>
-              <a:t>• • Outcome: Production-ready browser extension and complete final thesis.</a:t>
+              <a:defRPr sz="1450" b="1">
+                <a:solidFill>
+                  <a:srgbClr val="1E293B"/>
+                </a:solidFill>
+              </a:defRPr>
+            </a:pPr>
+            <a:r>
+              <a:t>Phase 3: Browser Extension &amp; Final Testing [FINAL REVIEW]</a:t>
+            </a:r>
+          </a:p>
+          <a:p>
+            <a:pPr>
+              <a:spcAft>
+                <a:spcPts val="600"/>
+              </a:spcAft>
+              <a:defRPr sz="1150">
+                <a:solidFill>
+                  <a:srgbClr val="1E293B"/>
+                </a:solidFill>
+              </a:defRPr>
+            </a:pPr>
+            <a:r>
+              <a:t>• • Package the system as a Chrome / Firefox Browser Extension.</a:t>
+            </a:r>
+          </a:p>
+          <a:p>
+            <a:pPr>
+              <a:spcAft>
+                <a:spcPts val="600"/>
+              </a:spcAft>
+              <a:defRPr sz="1150">
+                <a:solidFill>
+                  <a:srgbClr val="1E293B"/>
+                </a:solidFill>
+              </a:defRPr>
+            </a:pPr>
+            <a:r>
+              <a:t>• • The extension will directly fill the real live government website (voters.eci.gov.in) with 1 click.</a:t>
+            </a:r>
+          </a:p>
+          <a:p>
+            <a:pPr>
+              <a:spcAft>
+                <a:spcPts val="600"/>
+              </a:spcAft>
+              <a:defRPr sz="1150">
+                <a:solidFill>
+                  <a:srgbClr val="1E293B"/>
+                </a:solidFill>
+              </a:defRPr>
+            </a:pPr>
+            <a:r>
+              <a:t>• • Test on 50 different sample cards with different photo qualities.</a:t>
+            </a:r>
+          </a:p>
+          <a:p>
+            <a:pPr>
+              <a:spcAft>
+                <a:spcPts val="600"/>
+              </a:spcAft>
+              <a:defRPr sz="1150">
+                <a:solidFill>
+                  <a:srgbClr val="1E293B"/>
+                </a:solidFill>
+              </a:defRPr>
+            </a:pPr>
+            <a:r>
+              <a:t>• • Complete final project report and documentation.</a:t>
             </a:r>
           </a:p>
         </p:txBody>
@@ -9331,7 +9376,7 @@
               </a:defRPr>
             </a:pPr>
             <a:r>
-              <a:t>SUMMARY &amp; ACADEMIC SOURCES</a:t>
+              <a:t>SUMMARY</a:t>
             </a:r>
           </a:p>
         </p:txBody>
@@ -9359,14 +9404,14 @@
           <a:lstStyle/>
           <a:p>
             <a:pPr>
-              <a:defRPr sz="2200" b="1">
+              <a:defRPr sz="2100" b="1">
                 <a:solidFill>
                   <a:srgbClr val="FFFFFF"/>
                 </a:solidFill>
               </a:defRPr>
             </a:pPr>
             <a:r>
-              <a:t>References &amp; Conclusion</a:t>
+              <a:t>Conclusion &amp; References</a:t>
             </a:r>
           </a:p>
         </p:txBody>
@@ -9401,7 +9446,7 @@
               </a:defRPr>
             </a:pPr>
             <a:r>
-              <a:t>Dept of Computer Science &amp; Engineering | UG Project Phase-I Review | Team: Deva S, Athithi A, Arthi S</a:t>
+              <a:t>Dept of CSE | UG Project Review - 1 | Team: Deva S, Athithi A, Arthi S</a:t>
             </a:r>
           </a:p>
         </p:txBody>
@@ -9477,89 +9522,89 @@
               <a:spcAft>
                 <a:spcPts val="1000"/>
               </a:spcAft>
-              <a:defRPr sz="1500" b="1">
-                <a:solidFill>
-                  <a:srgbClr val="1E293B"/>
-                </a:solidFill>
-              </a:defRPr>
-            </a:pPr>
-            <a:r>
-              <a:t>Key Academic &amp; Technical References  [Bibliography]</a:t>
-            </a:r>
-          </a:p>
-          <a:p>
-            <a:pPr>
-              <a:spcAft>
-                <a:spcPts val="600"/>
-              </a:spcAft>
-              <a:defRPr sz="1150">
-                <a:solidFill>
-                  <a:srgbClr val="1E293B"/>
-                </a:solidFill>
-              </a:defRPr>
-            </a:pPr>
-            <a:r>
-              <a:t>• 1. Election Commission of India (ECI), 'Handbook for Registration of Electors &amp; Form 6 Guidelines', ECI Press, 2023.</a:t>
-            </a:r>
-          </a:p>
-          <a:p>
-            <a:pPr>
-              <a:spcAft>
-                <a:spcPts val="600"/>
-              </a:spcAft>
-              <a:defRPr sz="1150">
-                <a:solidFill>
-                  <a:srgbClr val="1E293B"/>
-                </a:solidFill>
-              </a:defRPr>
-            </a:pPr>
-            <a:r>
-              <a:t>• 2. Ministry of Electronics &amp; Information Technology (MeitY), 'Digital Personal Data Protection Act (DPDPA)', Gazette of India, 2023.</a:t>
-            </a:r>
-          </a:p>
-          <a:p>
-            <a:pPr>
-              <a:spcAft>
-                <a:spcPts val="600"/>
-              </a:spcAft>
-              <a:defRPr sz="1150">
-                <a:solidFill>
-                  <a:srgbClr val="1E293B"/>
-                </a:solidFill>
-              </a:defRPr>
-            </a:pPr>
-            <a:r>
-              <a:t>• 3. Meta AI, 'Llama 3.2: Multilingual Small Language Models for Edge Reasoning', arXiv preprint arXiv:2409.11234, 2024.</a:t>
-            </a:r>
-          </a:p>
-          <a:p>
-            <a:pPr>
-              <a:spcAft>
-                <a:spcPts val="600"/>
-              </a:spcAft>
-              <a:defRPr sz="1150">
-                <a:solidFill>
-                  <a:srgbClr val="1E293B"/>
-                </a:solidFill>
-              </a:defRPr>
-            </a:pPr>
-            <a:r>
-              <a:t>• 4. Shi, F. et al., 'YuNet: A Compact and High-Performance Deep Neural Network for Edge Face Detection', OpenCV Model Zoo, 2023.</a:t>
-            </a:r>
-          </a:p>
-          <a:p>
-            <a:pPr>
-              <a:spcAft>
-                <a:spcPts val="600"/>
-              </a:spcAft>
-              <a:defRPr sz="1150">
-                <a:solidFill>
-                  <a:srgbClr val="1E293B"/>
-                </a:solidFill>
-              </a:defRPr>
-            </a:pPr>
-            <a:r>
-              <a:t>• 5. Jaided AI, 'EasyOCR: End-to-End Multi-Lingual Optical Character Recognition with PyTorch', GitHub Repository, 2023.</a:t>
+              <a:defRPr sz="1450" b="1">
+                <a:solidFill>
+                  <a:srgbClr val="1E293B"/>
+                </a:solidFill>
+              </a:defRPr>
+            </a:pPr>
+            <a:r>
+              <a:t>References Used  [References]</a:t>
+            </a:r>
+          </a:p>
+          <a:p>
+            <a:pPr>
+              <a:spcAft>
+                <a:spcPts val="600"/>
+              </a:spcAft>
+              <a:defRPr sz="1150">
+                <a:solidFill>
+                  <a:srgbClr val="1E293B"/>
+                </a:solidFill>
+              </a:defRPr>
+            </a:pPr>
+            <a:r>
+              <a:t>• 1. Election Commission of India (ECI), 'Voter Registration Form 6 Guidelines', eci.gov.in, 2023.</a:t>
+            </a:r>
+          </a:p>
+          <a:p>
+            <a:pPr>
+              <a:spcAft>
+                <a:spcPts val="600"/>
+              </a:spcAft>
+              <a:defRPr sz="1150">
+                <a:solidFill>
+                  <a:srgbClr val="1E293B"/>
+                </a:solidFill>
+              </a:defRPr>
+            </a:pPr>
+            <a:r>
+              <a:t>• 2. Meta AI, 'Llama 3.2: Lightweight Multilingual Models for Edge Devices', 2024.</a:t>
+            </a:r>
+          </a:p>
+          <a:p>
+            <a:pPr>
+              <a:spcAft>
+                <a:spcPts val="600"/>
+              </a:spcAft>
+              <a:defRPr sz="1150">
+                <a:solidFill>
+                  <a:srgbClr val="1E293B"/>
+                </a:solidFill>
+              </a:defRPr>
+            </a:pPr>
+            <a:r>
+              <a:t>• 3. OpenCV Zoo, 'YuNet: Compact Deep Neural Network for Real-Time Face Detection', 2023.</a:t>
+            </a:r>
+          </a:p>
+          <a:p>
+            <a:pPr>
+              <a:spcAft>
+                <a:spcPts val="600"/>
+              </a:spcAft>
+              <a:defRPr sz="1150">
+                <a:solidFill>
+                  <a:srgbClr val="1E293B"/>
+                </a:solidFill>
+              </a:defRPr>
+            </a:pPr>
+            <a:r>
+              <a:t>• 4. Jaided AI, 'EasyOCR: Python Package for Optical Character Recognition', 2023.</a:t>
+            </a:r>
+          </a:p>
+          <a:p>
+            <a:pPr>
+              <a:spcAft>
+                <a:spcPts val="600"/>
+              </a:spcAft>
+              <a:defRPr sz="1150">
+                <a:solidFill>
+                  <a:srgbClr val="1E293B"/>
+                </a:solidFill>
+              </a:defRPr>
+            </a:pPr>
+            <a:r>
+              <a:t>• 5. Project GitHub Repository: https://github.com/deva-2006/govtAutofill</a:t>
             </a:r>
           </a:p>
         </p:txBody>
@@ -9635,74 +9680,74 @@
               <a:spcAft>
                 <a:spcPts val="1000"/>
               </a:spcAft>
-              <a:defRPr sz="1500" b="1">
+              <a:defRPr sz="1450" b="1">
                 <a:solidFill>
                   <a:srgbClr val="10B981"/>
                 </a:solidFill>
               </a:defRPr>
             </a:pPr>
             <a:r>
-              <a:t>Concluding Remarks &amp; Project Impact  [Phase-I Conclusion]</a:t>
-            </a:r>
-          </a:p>
-          <a:p>
-            <a:pPr>
-              <a:spcAft>
-                <a:spcPts val="600"/>
-              </a:spcAft>
-              <a:defRPr sz="1150">
-                <a:solidFill>
-                  <a:srgbClr val="1E293B"/>
-                </a:solidFill>
-              </a:defRPr>
-            </a:pPr>
-            <a:r>
-              <a:t>• • Bridging the Digital Divide: Developed a robust, localized AI assistant that makes Indian civic registrations frictionless, intuitive, and error-free.</a:t>
-            </a:r>
-          </a:p>
-          <a:p>
-            <a:pPr>
-              <a:spcAft>
-                <a:spcPts val="600"/>
-              </a:spcAft>
-              <a:defRPr sz="1150">
-                <a:solidFill>
-                  <a:srgbClr val="1E293B"/>
-                </a:solidFill>
-              </a:defRPr>
-            </a:pPr>
-            <a:r>
-              <a:t>• • Privacy without Compromise: Proved that local Small Language Models (Llama 3.2) and edge vision models (YuNet) can match cloud performance without transmitting sensitive PII.</a:t>
-            </a:r>
-          </a:p>
-          <a:p>
-            <a:pPr>
-              <a:spcAft>
-                <a:spcPts val="600"/>
-              </a:spcAft>
-              <a:defRPr sz="1150">
-                <a:solidFill>
-                  <a:srgbClr val="1E293B"/>
-                </a:solidFill>
-              </a:defRPr>
-            </a:pPr>
-            <a:r>
-              <a:t>• • Immediate Impact: Prototype already validated on real e-Aadhaar and card scans, achieving complete Form 6 auto-population in under 25 seconds.</a:t>
-            </a:r>
-          </a:p>
-          <a:p>
-            <a:pPr>
-              <a:spcAft>
-                <a:spcPts val="600"/>
-              </a:spcAft>
-              <a:defRPr sz="1150">
-                <a:solidFill>
-                  <a:srgbClr val="1E293B"/>
-                </a:solidFill>
-              </a:defRPr>
-            </a:pPr>
-            <a:r>
-              <a:t>• • Ready for Phase-II: Firm foundation established for multi-identity card cross-referencing and browser extension deployment.</a:t>
+              <a:t>Conclusion &amp; Summary  [Conclusion]</a:t>
+            </a:r>
+          </a:p>
+          <a:p>
+            <a:pPr>
+              <a:spcAft>
+                <a:spcPts val="600"/>
+              </a:spcAft>
+              <a:defRPr sz="1150">
+                <a:solidFill>
+                  <a:srgbClr val="1E293B"/>
+                </a:solidFill>
+              </a:defRPr>
+            </a:pPr>
+            <a:r>
+              <a:t>• • Solves a Real Problem: Eliminates boring, error-prone typing for citizens applying for government voter cards.</a:t>
+            </a:r>
+          </a:p>
+          <a:p>
+            <a:pPr>
+              <a:spcAft>
+                <a:spcPts val="600"/>
+              </a:spcAft>
+              <a:defRPr sz="1150">
+                <a:solidFill>
+                  <a:srgbClr val="1E293B"/>
+                </a:solidFill>
+              </a:defRPr>
+            </a:pPr>
+            <a:r>
+              <a:t>• • Privacy First: Uses local AI and on-device face detection so no private data leaves the laptop.</a:t>
+            </a:r>
+          </a:p>
+          <a:p>
+            <a:pPr>
+              <a:spcAft>
+                <a:spcPts val="600"/>
+              </a:spcAft>
+              <a:defRPr sz="1150">
+                <a:solidFill>
+                  <a:srgbClr val="1E293B"/>
+                </a:solidFill>
+              </a:defRPr>
+            </a:pPr>
+            <a:r>
+              <a:t>• • High Accuracy: Automatically separates door numbers, picks true Aadhaar numbers, and crops passport photos.</a:t>
+            </a:r>
+          </a:p>
+          <a:p>
+            <a:pPr>
+              <a:spcAft>
+                <a:spcPts val="600"/>
+              </a:spcAft>
+              <a:defRPr sz="1150">
+                <a:solidFill>
+                  <a:srgbClr val="1E293B"/>
+                </a:solidFill>
+              </a:defRPr>
+            </a:pPr>
+            <a:r>
+              <a:t>• • Proven Working System: Already tested and working; strong base ready for Phase 2 expansion.</a:t>
             </a:r>
           </a:p>
         </p:txBody>
@@ -9841,7 +9886,7 @@
               </a:defRPr>
             </a:pPr>
             <a:r>
-              <a:t>AGENDA &amp; PRESENTATION OUTLINE</a:t>
+              <a:t>AGENDA</a:t>
             </a:r>
           </a:p>
         </p:txBody>
@@ -9869,7 +9914,7 @@
           <a:lstStyle/>
           <a:p>
             <a:pPr>
-              <a:defRPr sz="2200" b="1">
+              <a:defRPr sz="2100" b="1">
                 <a:solidFill>
                   <a:srgbClr val="FFFFFF"/>
                 </a:solidFill>
@@ -9911,7 +9956,7 @@
               </a:defRPr>
             </a:pPr>
             <a:r>
-              <a:t>Dept of Computer Science &amp; Engineering | UG Project Phase-I Review | Team: Deva S, Athithi A, Arthi S</a:t>
+              <a:t>Dept of CSE | UG Project Review - 1 | Team: Deva S, Athithi A, Arthi S</a:t>
             </a:r>
           </a:p>
         </p:txBody>
@@ -9987,119 +10032,119 @@
               <a:spcAft>
                 <a:spcPts val="1000"/>
               </a:spcAft>
-              <a:defRPr sz="1500" b="1">
+              <a:defRPr sz="1450" b="1">
                 <a:solidFill>
                   <a:srgbClr val="2563EB"/>
                 </a:solidFill>
               </a:defRPr>
             </a:pPr>
             <a:r>
-              <a:t>Part I: Problem Formulation &amp; Study  [Slides 3-9]</a:t>
-            </a:r>
-          </a:p>
-          <a:p>
-            <a:pPr>
-              <a:spcAft>
-                <a:spcPts val="600"/>
-              </a:spcAft>
-              <a:defRPr sz="1150">
-                <a:solidFill>
-                  <a:srgbClr val="1E293B"/>
-                </a:solidFill>
-              </a:defRPr>
-            </a:pPr>
-            <a:r>
-              <a:t>• 1. Introduction to Digital E-Governance</a:t>
-            </a:r>
-          </a:p>
-          <a:p>
-            <a:pPr>
-              <a:spcAft>
-                <a:spcPts val="600"/>
-              </a:spcAft>
-              <a:defRPr sz="1150">
-                <a:solidFill>
-                  <a:srgbClr val="1E293B"/>
-                </a:solidFill>
-              </a:defRPr>
-            </a:pPr>
-            <a:r>
-              <a:t>• 2. Background of Indian Civic Form Systems</a:t>
-            </a:r>
-          </a:p>
-          <a:p>
-            <a:pPr>
-              <a:spcAft>
-                <a:spcPts val="600"/>
-              </a:spcAft>
-              <a:defRPr sz="1150">
-                <a:solidFill>
-                  <a:srgbClr val="1E293B"/>
-                </a:solidFill>
-              </a:defRPr>
-            </a:pPr>
-            <a:r>
-              <a:t>• 3. Problem Statement &amp; Research Gap</a:t>
-            </a:r>
-          </a:p>
-          <a:p>
-            <a:pPr>
-              <a:spcAft>
-                <a:spcPts val="600"/>
-              </a:spcAft>
-              <a:defRPr sz="1150">
-                <a:solidFill>
-                  <a:srgbClr val="1E293B"/>
-                </a:solidFill>
-              </a:defRPr>
-            </a:pPr>
-            <a:r>
-              <a:t>• 4. Aim &amp; Specific Objectives</a:t>
-            </a:r>
-          </a:p>
-          <a:p>
-            <a:pPr>
-              <a:spcAft>
-                <a:spcPts val="600"/>
-              </a:spcAft>
-              <a:defRPr sz="1150">
-                <a:solidFill>
-                  <a:srgbClr val="1E293B"/>
-                </a:solidFill>
-              </a:defRPr>
-            </a:pPr>
-            <a:r>
-              <a:t>• 5. Literature Review &amp; Comparative Analysis</a:t>
-            </a:r>
-          </a:p>
-          <a:p>
-            <a:pPr>
-              <a:spcAft>
-                <a:spcPts val="600"/>
-              </a:spcAft>
-              <a:defRPr sz="1150">
-                <a:solidFill>
-                  <a:srgbClr val="1E293B"/>
-                </a:solidFill>
-              </a:defRPr>
-            </a:pPr>
-            <a:r>
-              <a:t>• 6. Existing System Workflow</a:t>
-            </a:r>
-          </a:p>
-          <a:p>
-            <a:pPr>
-              <a:spcAft>
-                <a:spcPts val="600"/>
-              </a:spcAft>
-              <a:defRPr sz="1150">
-                <a:solidFill>
-                  <a:srgbClr val="1E293B"/>
-                </a:solidFill>
-              </a:defRPr>
-            </a:pPr>
-            <a:r>
-              <a:t>• 7. Limitations of Existing Form Filling</a:t>
+              <a:t>Part 1: The Problem &amp; Study  [Slides 3-9]</a:t>
+            </a:r>
+          </a:p>
+          <a:p>
+            <a:pPr>
+              <a:spcAft>
+                <a:spcPts val="600"/>
+              </a:spcAft>
+              <a:defRPr sz="1150">
+                <a:solidFill>
+                  <a:srgbClr val="1E293B"/>
+                </a:solidFill>
+              </a:defRPr>
+            </a:pPr>
+            <a:r>
+              <a:t>• 1. Introduction</a:t>
+            </a:r>
+          </a:p>
+          <a:p>
+            <a:pPr>
+              <a:spcAft>
+                <a:spcPts val="600"/>
+              </a:spcAft>
+              <a:defRPr sz="1150">
+                <a:solidFill>
+                  <a:srgbClr val="1E293B"/>
+                </a:solidFill>
+              </a:defRPr>
+            </a:pPr>
+            <a:r>
+              <a:t>• 2. Background of the Project</a:t>
+            </a:r>
+          </a:p>
+          <a:p>
+            <a:pPr>
+              <a:spcAft>
+                <a:spcPts val="600"/>
+              </a:spcAft>
+              <a:defRPr sz="1150">
+                <a:solidFill>
+                  <a:srgbClr val="1E293B"/>
+                </a:solidFill>
+              </a:defRPr>
+            </a:pPr>
+            <a:r>
+              <a:t>• 3. Problem Statement</a:t>
+            </a:r>
+          </a:p>
+          <a:p>
+            <a:pPr>
+              <a:spcAft>
+                <a:spcPts val="600"/>
+              </a:spcAft>
+              <a:defRPr sz="1150">
+                <a:solidFill>
+                  <a:srgbClr val="1E293B"/>
+                </a:solidFill>
+              </a:defRPr>
+            </a:pPr>
+            <a:r>
+              <a:t>• 4. Aim and Objectives</a:t>
+            </a:r>
+          </a:p>
+          <a:p>
+            <a:pPr>
+              <a:spcAft>
+                <a:spcPts val="600"/>
+              </a:spcAft>
+              <a:defRPr sz="1150">
+                <a:solidFill>
+                  <a:srgbClr val="1E293B"/>
+                </a:solidFill>
+              </a:defRPr>
+            </a:pPr>
+            <a:r>
+              <a:t>• 5. Literature Review</a:t>
+            </a:r>
+          </a:p>
+          <a:p>
+            <a:pPr>
+              <a:spcAft>
+                <a:spcPts val="600"/>
+              </a:spcAft>
+              <a:defRPr sz="1150">
+                <a:solidFill>
+                  <a:srgbClr val="1E293B"/>
+                </a:solidFill>
+              </a:defRPr>
+            </a:pPr>
+            <a:r>
+              <a:t>• 6. Existing System</a:t>
+            </a:r>
+          </a:p>
+          <a:p>
+            <a:pPr>
+              <a:spcAft>
+                <a:spcPts val="600"/>
+              </a:spcAft>
+              <a:defRPr sz="1150">
+                <a:solidFill>
+                  <a:srgbClr val="1E293B"/>
+                </a:solidFill>
+              </a:defRPr>
+            </a:pPr>
+            <a:r>
+              <a:t>• 7. Limitations of the Existing System</a:t>
             </a:r>
           </a:p>
         </p:txBody>
@@ -10175,119 +10220,119 @@
               <a:spcAft>
                 <a:spcPts val="1000"/>
               </a:spcAft>
-              <a:defRPr sz="1500" b="1">
+              <a:defRPr sz="1450" b="1">
                 <a:solidFill>
                   <a:srgbClr val="10B981"/>
                 </a:solidFill>
               </a:defRPr>
             </a:pPr>
             <a:r>
-              <a:t>Part II: Methodology, Prototype &amp; Roadmap  [Slides 10-16]</a:t>
-            </a:r>
-          </a:p>
-          <a:p>
-            <a:pPr>
-              <a:spcAft>
-                <a:spcPts val="600"/>
-              </a:spcAft>
-              <a:defRPr sz="1150">
-                <a:solidFill>
-                  <a:srgbClr val="1E293B"/>
-                </a:solidFill>
-              </a:defRPr>
-            </a:pPr>
-            <a:r>
-              <a:t>• 8. Proposed System Overview</a:t>
-            </a:r>
-          </a:p>
-          <a:p>
-            <a:pPr>
-              <a:spcAft>
-                <a:spcPts val="600"/>
-              </a:spcAft>
-              <a:defRPr sz="1150">
-                <a:solidFill>
-                  <a:srgbClr val="1E293B"/>
-                </a:solidFill>
-              </a:defRPr>
-            </a:pPr>
-            <a:r>
-              <a:t>• 9. Proposed Methodology &amp; Architecture</a:t>
-            </a:r>
-          </a:p>
-          <a:p>
-            <a:pPr>
-              <a:spcAft>
-                <a:spcPts val="600"/>
-              </a:spcAft>
-              <a:defRPr sz="1150">
-                <a:solidFill>
-                  <a:srgbClr val="1E293B"/>
-                </a:solidFill>
-              </a:defRPr>
-            </a:pPr>
-            <a:r>
-              <a:t>• 10. Technology Stack &amp; Tools Used</a:t>
-            </a:r>
-          </a:p>
-          <a:p>
-            <a:pPr>
-              <a:spcAft>
-                <a:spcPts val="600"/>
-              </a:spcAft>
-              <a:defRPr sz="1150">
-                <a:solidFill>
-                  <a:srgbClr val="1E293B"/>
-                </a:solidFill>
-              </a:defRPr>
-            </a:pPr>
-            <a:r>
-              <a:t>• 11. Work Completed So Far &amp; Prototype Demo</a:t>
-            </a:r>
-          </a:p>
-          <a:p>
-            <a:pPr>
-              <a:spcAft>
-                <a:spcPts val="600"/>
-              </a:spcAft>
-              <a:defRPr sz="1150">
-                <a:solidFill>
-                  <a:srgbClr val="1E293B"/>
-                </a:solidFill>
-              </a:defRPr>
-            </a:pPr>
-            <a:r>
-              <a:t>• 12. Technical Breakthroughs &amp; Partial Results</a:t>
-            </a:r>
-          </a:p>
-          <a:p>
-            <a:pPr>
-              <a:spcAft>
-                <a:spcPts val="600"/>
-              </a:spcAft>
-              <a:defRPr sz="1150">
-                <a:solidFill>
-                  <a:srgbClr val="1E293B"/>
-                </a:solidFill>
-              </a:defRPr>
-            </a:pPr>
-            <a:r>
-              <a:t>• 13. Expected Outcomes &amp; Impact Metrics</a:t>
-            </a:r>
-          </a:p>
-          <a:p>
-            <a:pPr>
-              <a:spcAft>
-                <a:spcPts val="600"/>
-              </a:spcAft>
-              <a:defRPr sz="1150">
-                <a:solidFill>
-                  <a:srgbClr val="1E293B"/>
-                </a:solidFill>
-              </a:defRPr>
-            </a:pPr>
-            <a:r>
-              <a:t>• 14. Project Timeline, Milestones &amp; Work Plan</a:t>
+              <a:t>Part 2: Our Solution &amp; Results  [Slides 10-16]</a:t>
+            </a:r>
+          </a:p>
+          <a:p>
+            <a:pPr>
+              <a:spcAft>
+                <a:spcPts val="600"/>
+              </a:spcAft>
+              <a:defRPr sz="1150">
+                <a:solidFill>
+                  <a:srgbClr val="1E293B"/>
+                </a:solidFill>
+              </a:defRPr>
+            </a:pPr>
+            <a:r>
+              <a:t>• 8. Proposed System</a:t>
+            </a:r>
+          </a:p>
+          <a:p>
+            <a:pPr>
+              <a:spcAft>
+                <a:spcPts val="600"/>
+              </a:spcAft>
+              <a:defRPr sz="1150">
+                <a:solidFill>
+                  <a:srgbClr val="1E293B"/>
+                </a:solidFill>
+              </a:defRPr>
+            </a:pPr>
+            <a:r>
+              <a:t>• 9. System Architecture &amp; How it Works</a:t>
+            </a:r>
+          </a:p>
+          <a:p>
+            <a:pPr>
+              <a:spcAft>
+                <a:spcPts val="600"/>
+              </a:spcAft>
+              <a:defRPr sz="1150">
+                <a:solidFill>
+                  <a:srgbClr val="1E293B"/>
+                </a:solidFill>
+              </a:defRPr>
+            </a:pPr>
+            <a:r>
+              <a:t>• 10. Tools &amp; Technologies Used</a:t>
+            </a:r>
+          </a:p>
+          <a:p>
+            <a:pPr>
+              <a:spcAft>
+                <a:spcPts val="600"/>
+              </a:spcAft>
+              <a:defRPr sz="1150">
+                <a:solidFill>
+                  <a:srgbClr val="1E293B"/>
+                </a:solidFill>
+              </a:defRPr>
+            </a:pPr>
+            <a:r>
+              <a:t>• 11. Work Completed So Far (Our Results)</a:t>
+            </a:r>
+          </a:p>
+          <a:p>
+            <a:pPr>
+              <a:spcAft>
+                <a:spcPts val="600"/>
+              </a:spcAft>
+              <a:defRPr sz="1150">
+                <a:solidFill>
+                  <a:srgbClr val="1E293B"/>
+                </a:solidFill>
+              </a:defRPr>
+            </a:pPr>
+            <a:r>
+              <a:t>• 12. What We Have Built (Key Features)</a:t>
+            </a:r>
+          </a:p>
+          <a:p>
+            <a:pPr>
+              <a:spcAft>
+                <a:spcPts val="600"/>
+              </a:spcAft>
+              <a:defRPr sz="1150">
+                <a:solidFill>
+                  <a:srgbClr val="1E293B"/>
+                </a:solidFill>
+              </a:defRPr>
+            </a:pPr>
+            <a:r>
+              <a:t>• 13. Expected Outcomes &amp; Benefits</a:t>
+            </a:r>
+          </a:p>
+          <a:p>
+            <a:pPr>
+              <a:spcAft>
+                <a:spcPts val="600"/>
+              </a:spcAft>
+              <a:defRPr sz="1150">
+                <a:solidFill>
+                  <a:srgbClr val="1E293B"/>
+                </a:solidFill>
+              </a:defRPr>
+            </a:pPr>
+            <a:r>
+              <a:t>• 14. Project Timeline &amp; Next Steps</a:t>
             </a:r>
           </a:p>
           <a:p>
@@ -10441,7 +10486,7 @@
               </a:defRPr>
             </a:pPr>
             <a:r>
-              <a:t>CONTEXT &amp; DOMAIN OVERVIEW</a:t>
+              <a:t>PROJECT OVERVIEW</a:t>
             </a:r>
           </a:p>
         </p:txBody>
@@ -10469,14 +10514,14 @@
           <a:lstStyle/>
           <a:p>
             <a:pPr>
-              <a:defRPr sz="2200" b="1">
+              <a:defRPr sz="2100" b="1">
                 <a:solidFill>
                   <a:srgbClr val="FFFFFF"/>
                 </a:solidFill>
               </a:defRPr>
             </a:pPr>
             <a:r>
-              <a:t>Introduction: Digital Public Infrastructure &amp; Forms</a:t>
+              <a:t>Introduction: What is this Project About?</a:t>
             </a:r>
           </a:p>
         </p:txBody>
@@ -10511,7 +10556,7 @@
               </a:defRPr>
             </a:pPr>
             <a:r>
-              <a:t>Dept of Computer Science &amp; Engineering | UG Project Phase-I Review | Team: Deva S, Athithi A, Arthi S</a:t>
+              <a:t>Dept of CSE | UG Project Review - 1 | Team: Deva S, Athithi A, Arthi S</a:t>
             </a:r>
           </a:p>
         </p:txBody>
@@ -10587,74 +10632,74 @@
               <a:spcAft>
                 <a:spcPts val="1000"/>
               </a:spcAft>
-              <a:defRPr sz="1500" b="1">
+              <a:defRPr sz="1450" b="1">
                 <a:solidFill>
                   <a:srgbClr val="2563EB"/>
                 </a:solidFill>
               </a:defRPr>
             </a:pPr>
             <a:r>
-              <a:t>The E-Governance Landscape in India  [DPI Context]</a:t>
-            </a:r>
-          </a:p>
-          <a:p>
-            <a:pPr>
-              <a:spcAft>
-                <a:spcPts val="600"/>
-              </a:spcAft>
-              <a:defRPr sz="1150">
-                <a:solidFill>
-                  <a:srgbClr val="1E293B"/>
-                </a:solidFill>
-              </a:defRPr>
-            </a:pPr>
-            <a:r>
-              <a:t>• India leads global digital governance with massive DPI: DigiLocker, Aadhaar (UIDAI), and ECI Voter Service Portals.</a:t>
-            </a:r>
-          </a:p>
-          <a:p>
-            <a:pPr>
-              <a:spcAft>
-                <a:spcPts val="600"/>
-              </a:spcAft>
-              <a:defRPr sz="1150">
-                <a:solidFill>
-                  <a:srgbClr val="1E293B"/>
-                </a:solidFill>
-              </a:defRPr>
-            </a:pPr>
-            <a:r>
-              <a:t>• Crucial civic entitlements (Voting Rights, Welfare Subsidies, Healthcare Cards) rely on statutory web forms like NVSP Form 6.</a:t>
-            </a:r>
-          </a:p>
-          <a:p>
-            <a:pPr>
-              <a:spcAft>
-                <a:spcPts val="600"/>
-              </a:spcAft>
-              <a:defRPr sz="1150">
-                <a:solidFill>
-                  <a:srgbClr val="1E293B"/>
-                </a:solidFill>
-              </a:defRPr>
-            </a:pPr>
-            <a:r>
-              <a:t>• Statutory forms require citizens to transcribe over 25 individual fields from physical identity documents.</a:t>
-            </a:r>
-          </a:p>
-          <a:p>
-            <a:pPr>
-              <a:spcAft>
-                <a:spcPts val="600"/>
-              </a:spcAft>
-              <a:defRPr sz="1150">
-                <a:solidFill>
-                  <a:srgbClr val="1E293B"/>
-                </a:solidFill>
-              </a:defRPr>
-            </a:pPr>
-            <a:r>
-              <a:t>• Citizens must partition nested addresses, convert date formats, and format strict 1:1 passport photos manually.</a:t>
+              <a:t>The Real-World Need  [The Situation]</a:t>
+            </a:r>
+          </a:p>
+          <a:p>
+            <a:pPr>
+              <a:spcAft>
+                <a:spcPts val="600"/>
+              </a:spcAft>
+              <a:defRPr sz="1150">
+                <a:solidFill>
+                  <a:srgbClr val="1E293B"/>
+                </a:solidFill>
+              </a:defRPr>
+            </a:pPr>
+            <a:r>
+              <a:t>• Applying for government IDs (like Voter ID Form 6) requires typing more than 20 details manually.</a:t>
+            </a:r>
+          </a:p>
+          <a:p>
+            <a:pPr>
+              <a:spcAft>
+                <a:spcPts val="600"/>
+              </a:spcAft>
+              <a:defRPr sz="1150">
+                <a:solidFill>
+                  <a:srgbClr val="1E293B"/>
+                </a:solidFill>
+              </a:defRPr>
+            </a:pPr>
+            <a:r>
+              <a:t>• Applicants have to type Name, Father's Name, DOB, Gender, Mobile No, and break their full address into Door No, Street, Village, and Pincode.</a:t>
+            </a:r>
+          </a:p>
+          <a:p>
+            <a:pPr>
+              <a:spcAft>
+                <a:spcPts val="600"/>
+              </a:spcAft>
+              <a:defRPr sz="1150">
+                <a:solidFill>
+                  <a:srgbClr val="1E293B"/>
+                </a:solidFill>
+              </a:defRPr>
+            </a:pPr>
+            <a:r>
+              <a:t>• They also have to crop and resize a separate passport photo to match website size rules.</a:t>
+            </a:r>
+          </a:p>
+          <a:p>
+            <a:pPr>
+              <a:spcAft>
+                <a:spcPts val="600"/>
+              </a:spcAft>
+              <a:defRPr sz="1150">
+                <a:solidFill>
+                  <a:srgbClr val="1E293B"/>
+                </a:solidFill>
+              </a:defRPr>
+            </a:pPr>
+            <a:r>
+              <a:t>• This manual process takes 10 to 15 minutes per person and causes many typing mistakes.</a:t>
             </a:r>
           </a:p>
         </p:txBody>
@@ -10730,74 +10775,74 @@
               <a:spcAft>
                 <a:spcPts val="1000"/>
               </a:spcAft>
-              <a:defRPr sz="1500" b="1">
-                <a:solidFill>
-                  <a:srgbClr val="1E293B"/>
-                </a:solidFill>
-              </a:defRPr>
-            </a:pPr>
-            <a:r>
-              <a:t>The Automation &amp; Privacy Opportunity  [Local Edge AI]</a:t>
-            </a:r>
-          </a:p>
-          <a:p>
-            <a:pPr>
-              <a:spcAft>
-                <a:spcPts val="600"/>
-              </a:spcAft>
-              <a:defRPr sz="1150">
-                <a:solidFill>
-                  <a:srgbClr val="1E293B"/>
-                </a:solidFill>
-              </a:defRPr>
-            </a:pPr>
-            <a:r>
-              <a:t>• Manual data entry creates a heavy friction point: high cognitive burden, typos, and format non-compliance.</a:t>
-            </a:r>
-          </a:p>
-          <a:p>
-            <a:pPr>
-              <a:spcAft>
-                <a:spcPts val="600"/>
-              </a:spcAft>
-              <a:defRPr sz="1150">
-                <a:solidFill>
-                  <a:srgbClr val="1E293B"/>
-                </a:solidFill>
-              </a:defRPr>
-            </a:pPr>
-            <a:r>
-              <a:t>• Commercial solutions rely on public cloud vision APIs (Google Vision, AWS Textract), causing recurring costs and PII exposure.</a:t>
-            </a:r>
-          </a:p>
-          <a:p>
-            <a:pPr>
-              <a:spcAft>
-                <a:spcPts val="600"/>
-              </a:spcAft>
-              <a:defRPr sz="1150">
-                <a:solidFill>
-                  <a:srgbClr val="1E293B"/>
-                </a:solidFill>
-              </a:defRPr>
-            </a:pPr>
-            <a:r>
-              <a:t>• Proposed Paradigm: Autonomous edge document intelligence that extracts, verifies, and maps identity cards locally with zero data leakage.</a:t>
-            </a:r>
-          </a:p>
-          <a:p>
-            <a:pPr>
-              <a:spcAft>
-                <a:spcPts val="600"/>
-              </a:spcAft>
-              <a:defRPr sz="1150">
-                <a:solidFill>
-                  <a:srgbClr val="1E293B"/>
-                </a:solidFill>
-              </a:defRPr>
-            </a:pPr>
-            <a:r>
-              <a:t>• Combines bilingual OCR with on-device Small Language Models (Llama 3.2) and deep facial localization (YuNet).</a:t>
+              <a:defRPr sz="1450" b="1">
+                <a:solidFill>
+                  <a:srgbClr val="10B981"/>
+                </a:solidFill>
+              </a:defRPr>
+            </a:pPr>
+            <a:r>
+              <a:t>Our Smart Approach  [Our Idea]</a:t>
+            </a:r>
+          </a:p>
+          <a:p>
+            <a:pPr>
+              <a:spcAft>
+                <a:spcPts val="600"/>
+              </a:spcAft>
+              <a:defRPr sz="1150">
+                <a:solidFill>
+                  <a:srgbClr val="1E293B"/>
+                </a:solidFill>
+              </a:defRPr>
+            </a:pPr>
+            <a:r>
+              <a:t>• Our Solution: A smart web app that reads the ID card and fills the form automatically.</a:t>
+            </a:r>
+          </a:p>
+          <a:p>
+            <a:pPr>
+              <a:spcAft>
+                <a:spcPts val="600"/>
+              </a:spcAft>
+              <a:defRPr sz="1150">
+                <a:solidFill>
+                  <a:srgbClr val="1E293B"/>
+                </a:solidFill>
+              </a:defRPr>
+            </a:pPr>
+            <a:r>
+              <a:t>• The user simply uploads their Aadhaar card (PDF or image).</a:t>
+            </a:r>
+          </a:p>
+          <a:p>
+            <a:pPr>
+              <a:spcAft>
+                <a:spcPts val="600"/>
+              </a:spcAft>
+              <a:defRPr sz="1150">
+                <a:solidFill>
+                  <a:srgbClr val="1E293B"/>
+                </a:solidFill>
+              </a:defRPr>
+            </a:pPr>
+            <a:r>
+              <a:t>• Our AI reads all the text, finds the person's face, cuts out a clean passport photo, and fills all the boxes instantly.</a:t>
+            </a:r>
+          </a:p>
+          <a:p>
+            <a:pPr>
+              <a:spcAft>
+                <a:spcPts val="600"/>
+              </a:spcAft>
+              <a:defRPr sz="1150">
+                <a:solidFill>
+                  <a:srgbClr val="1E293B"/>
+                </a:solidFill>
+              </a:defRPr>
+            </a:pPr>
+            <a:r>
+              <a:t>• Privacy-Friendly: Everything runs directly on the computer—no data is sent to external cloud servers.</a:t>
             </a:r>
           </a:p>
         </p:txBody>
@@ -10936,7 +10981,7 @@
               </a:defRPr>
             </a:pPr>
             <a:r>
-              <a:t>MOTIVATION &amp; GROUND REALITY</a:t>
+              <a:t>BACKGROUND STUDY</a:t>
             </a:r>
           </a:p>
         </p:txBody>
@@ -10964,14 +11009,14 @@
           <a:lstStyle/>
           <a:p>
             <a:pPr>
-              <a:defRPr sz="2200" b="1">
+              <a:defRPr sz="2100" b="1">
                 <a:solidFill>
                   <a:srgbClr val="FFFFFF"/>
                 </a:solidFill>
               </a:defRPr>
             </a:pPr>
             <a:r>
-              <a:t>Background of the Project: The Citizen Form-Filling Dilemma</a:t>
+              <a:t>Background: The Voter ID (Form 6) Process</a:t>
             </a:r>
           </a:p>
         </p:txBody>
@@ -11006,7 +11051,7 @@
               </a:defRPr>
             </a:pPr>
             <a:r>
-              <a:t>Dept of Computer Science &amp; Engineering | UG Project Phase-I Review | Team: Deva S, Athithi A, Arthi S</a:t>
+              <a:t>Dept of CSE | UG Project Review - 1 | Team: Deva S, Athithi A, Arthi S</a:t>
             </a:r>
           </a:p>
         </p:txBody>
@@ -11082,74 +11127,74 @@
               <a:spcAft>
                 <a:spcPts val="1000"/>
               </a:spcAft>
-              <a:defRPr sz="1500" b="1">
+              <a:defRPr sz="1450" b="1">
                 <a:solidFill>
                   <a:srgbClr val="2563EB"/>
                 </a:solidFill>
               </a:defRPr>
             </a:pPr>
             <a:r>
-              <a:t>ECI Form 6 Voter Registration Scale  [Mass Civic Portal]</a:t>
-            </a:r>
-          </a:p>
-          <a:p>
-            <a:pPr>
-              <a:spcAft>
-                <a:spcPts val="600"/>
-              </a:spcAft>
-              <a:defRPr sz="1150">
-                <a:solidFill>
-                  <a:srgbClr val="1E293B"/>
-                </a:solidFill>
-              </a:defRPr>
-            </a:pPr>
-            <a:r>
-              <a:t>• Form 6 of the Election Commission of India (ECI) is the mandatory statutory instrument for registering new voters.</a:t>
-            </a:r>
-          </a:p>
-          <a:p>
-            <a:pPr>
-              <a:spcAft>
-                <a:spcPts val="600"/>
-              </a:spcAft>
-              <a:defRPr sz="1150">
-                <a:solidFill>
-                  <a:srgbClr val="1E293B"/>
-                </a:solidFill>
-              </a:defRPr>
-            </a:pPr>
-            <a:r>
-              <a:t>• Over 20 million new voter applications are processed annually across 28 states and 8 union territories.</a:t>
-            </a:r>
-          </a:p>
-          <a:p>
-            <a:pPr>
-              <a:spcAft>
-                <a:spcPts val="600"/>
-              </a:spcAft>
-              <a:defRPr sz="1150">
-                <a:solidFill>
-                  <a:srgbClr val="1E293B"/>
-                </a:solidFill>
-              </a:defRPr>
-            </a:pPr>
-            <a:r>
-              <a:t>• Applications mandate rigorous supporting documents: e-Aadhaar PDF, physical PVC cards, PAN Card, or Birth Certificates.</a:t>
-            </a:r>
-          </a:p>
-          <a:p>
-            <a:pPr>
-              <a:spcAft>
-                <a:spcPts val="600"/>
-              </a:spcAft>
-              <a:defRPr sz="1150">
-                <a:solidFill>
-                  <a:srgbClr val="1E293B"/>
-                </a:solidFill>
-              </a:defRPr>
-            </a:pPr>
-            <a:r>
-              <a:t>• Forms require precise mapping into relational categories: Father / Mother / Husband / Legal Guardian with statutory proofs.</a:t>
+              <a:t>Scale of Voter Registration in India  [The Scale]</a:t>
+            </a:r>
+          </a:p>
+          <a:p>
+            <a:pPr>
+              <a:spcAft>
+                <a:spcPts val="600"/>
+              </a:spcAft>
+              <a:defRPr sz="1150">
+                <a:solidFill>
+                  <a:srgbClr val="1E293B"/>
+                </a:solidFill>
+              </a:defRPr>
+            </a:pPr>
+            <a:r>
+              <a:t>• Form 6 is the official form used by the Election Commission of India (ECI) for new voter registrations.</a:t>
+            </a:r>
+          </a:p>
+          <a:p>
+            <a:pPr>
+              <a:spcAft>
+                <a:spcPts val="600"/>
+              </a:spcAft>
+              <a:defRPr sz="1150">
+                <a:solidFill>
+                  <a:srgbClr val="1E293B"/>
+                </a:solidFill>
+              </a:defRPr>
+            </a:pPr>
+            <a:r>
+              <a:t>• Over 2 crore (20 million) new voters apply every single year across India.</a:t>
+            </a:r>
+          </a:p>
+          <a:p>
+            <a:pPr>
+              <a:spcAft>
+                <a:spcPts val="600"/>
+              </a:spcAft>
+              <a:defRPr sz="1150">
+                <a:solidFill>
+                  <a:srgbClr val="1E293B"/>
+                </a:solidFill>
+              </a:defRPr>
+            </a:pPr>
+            <a:r>
+              <a:t>• Every applicant must provide proof documents—most commonly e-Aadhaar cards, PAN cards, or Birth Certificates.</a:t>
+            </a:r>
+          </a:p>
+          <a:p>
+            <a:pPr>
+              <a:spcAft>
+                <a:spcPts val="600"/>
+              </a:spcAft>
+              <a:defRPr sz="1150">
+                <a:solidFill>
+                  <a:srgbClr val="1E293B"/>
+                </a:solidFill>
+              </a:defRPr>
+            </a:pPr>
+            <a:r>
+              <a:t>• Applicants must select family relations correctly (Father, Mother, Husband, or Guardian).</a:t>
             </a:r>
           </a:p>
         </p:txBody>
@@ -11225,74 +11270,74 @@
               <a:spcAft>
                 <a:spcPts val="1000"/>
               </a:spcAft>
-              <a:defRPr sz="1500" b="1">
+              <a:defRPr sz="1450" b="1">
                 <a:solidFill>
                   <a:srgbClr val="E11D48"/>
                 </a:solidFill>
               </a:defRPr>
             </a:pPr>
             <a:r>
-              <a:t>Ground Challenges &amp; High Rejection Rates  [Socio-Technical Need]</a:t>
-            </a:r>
-          </a:p>
-          <a:p>
-            <a:pPr>
-              <a:spcAft>
-                <a:spcPts val="600"/>
-              </a:spcAft>
-              <a:defRPr sz="1150">
-                <a:solidFill>
-                  <a:srgbClr val="1E293B"/>
-                </a:solidFill>
-              </a:defRPr>
-            </a:pPr>
-            <a:r>
-              <a:t>• Rejection Statistics: 18% to 24% of online voter registrations face administrative queries, delays, or rejections.</a:t>
-            </a:r>
-          </a:p>
-          <a:p>
-            <a:pPr>
-              <a:spcAft>
-                <a:spcPts val="600"/>
-              </a:spcAft>
-              <a:defRPr sz="1150">
-                <a:solidFill>
-                  <a:srgbClr val="1E293B"/>
-                </a:solidFill>
-              </a:defRPr>
-            </a:pPr>
-            <a:r>
-              <a:t>• Top Rejection Causes: Inverted Date of Birth (DD-MM vs MM-DD), misspelt Tamil-English phonetic names, and truncated door numbers.</a:t>
-            </a:r>
-          </a:p>
-          <a:p>
-            <a:pPr>
-              <a:spcAft>
-                <a:spcPts val="600"/>
-              </a:spcAft>
-              <a:defRPr sz="1150">
-                <a:solidFill>
-                  <a:srgbClr val="1E293B"/>
-                </a:solidFill>
-              </a:defRPr>
-            </a:pPr>
-            <a:r>
-              <a:t>• Digital Divide: Rural and semi-urban applicants depend on commercial Internet browsing cafes, paying fees and exposing private Aadhaar numbers.</a:t>
-            </a:r>
-          </a:p>
-          <a:p>
-            <a:pPr>
-              <a:spcAft>
-                <a:spcPts val="600"/>
-              </a:spcAft>
-              <a:defRPr sz="1150">
-                <a:solidFill>
-                  <a:srgbClr val="1E293B"/>
-                </a:solidFill>
-              </a:defRPr>
-            </a:pPr>
-            <a:r>
-              <a:t>• Need: An automated, intelligent, free, and completely localized desktop assistant that completes registration in seconds.</a:t>
+              <a:t>Why Applications Get Rejected  [Common Mistakes]</a:t>
+            </a:r>
+          </a:p>
+          <a:p>
+            <a:pPr>
+              <a:spcAft>
+                <a:spcPts val="600"/>
+              </a:spcAft>
+              <a:defRPr sz="1150">
+                <a:solidFill>
+                  <a:srgbClr val="1E293B"/>
+                </a:solidFill>
+              </a:defRPr>
+            </a:pPr>
+            <a:r>
+              <a:t>• High Rejection Rate: Nearly 1 in 5 applications face delays or rejection due to silly typing mistakes.</a:t>
+            </a:r>
+          </a:p>
+          <a:p>
+            <a:pPr>
+              <a:spcAft>
+                <a:spcPts val="600"/>
+              </a:spcAft>
+              <a:defRPr sz="1150">
+                <a:solidFill>
+                  <a:srgbClr val="1E293B"/>
+                </a:solidFill>
+              </a:defRPr>
+            </a:pPr>
+            <a:r>
+              <a:t>• Common mistakes include: typing month before day in date of birth, misspelling names, or missing door numbers.</a:t>
+            </a:r>
+          </a:p>
+          <a:p>
+            <a:pPr>
+              <a:spcAft>
+                <a:spcPts val="600"/>
+              </a:spcAft>
+              <a:defRPr sz="1150">
+                <a:solidFill>
+                  <a:srgbClr val="1E293B"/>
+                </a:solidFill>
+              </a:defRPr>
+            </a:pPr>
+            <a:r>
+              <a:t>• Public Cafe Risks: Rural citizens go to browsing centers and leave copies of their Aadhaar cards on public computers.</a:t>
+            </a:r>
+          </a:p>
+          <a:p>
+            <a:pPr>
+              <a:spcAft>
+                <a:spcPts val="600"/>
+              </a:spcAft>
+              <a:defRPr sz="1150">
+                <a:solidFill>
+                  <a:srgbClr val="1E293B"/>
+                </a:solidFill>
+              </a:defRPr>
+            </a:pPr>
+            <a:r>
+              <a:t>• Conclusion: We need an easy, automated tool that helps common citizens fill forms without mistakes.</a:t>
             </a:r>
           </a:p>
         </p:txBody>
@@ -11431,7 +11476,7 @@
               </a:defRPr>
             </a:pPr>
             <a:r>
-              <a:t>CORE RESEARCH CHALLENGE</a:t>
+              <a:t>CORE ISSUES</a:t>
             </a:r>
           </a:p>
         </p:txBody>
@@ -11459,14 +11504,14 @@
           <a:lstStyle/>
           <a:p>
             <a:pPr>
-              <a:defRPr sz="2200" b="1">
+              <a:defRPr sz="2100" b="1">
                 <a:solidFill>
                   <a:srgbClr val="FFFFFF"/>
                 </a:solidFill>
               </a:defRPr>
             </a:pPr>
             <a:r>
-              <a:t>Problem Statement: Transcription Overhead &amp; Privacy Leakage</a:t>
+              <a:t>Problem Statement: 4 Major Challenges</a:t>
             </a:r>
           </a:p>
         </p:txBody>
@@ -11501,7 +11546,7 @@
               </a:defRPr>
             </a:pPr>
             <a:r>
-              <a:t>Dept of Computer Science &amp; Engineering | UG Project Phase-I Review | Team: Deva S, Athithi A, Arthi S</a:t>
+              <a:t>Dept of CSE | UG Project Review - 1 | Team: Deva S, Athithi A, Arthi S</a:t>
             </a:r>
           </a:p>
         </p:txBody>
@@ -11577,59 +11622,59 @@
               <a:spcAft>
                 <a:spcPts val="1000"/>
               </a:spcAft>
-              <a:defRPr sz="1500" b="1">
+              <a:defRPr sz="1450" b="1">
                 <a:solidFill>
                   <a:srgbClr val="E11D48"/>
                 </a:solidFill>
               </a:defRPr>
             </a:pPr>
             <a:r>
-              <a:t>1. Cognitive Overhead &amp; High Error Rate</a:t>
-            </a:r>
-          </a:p>
-          <a:p>
-            <a:pPr>
-              <a:spcAft>
-                <a:spcPts val="600"/>
-              </a:spcAft>
-              <a:defRPr sz="1150">
-                <a:solidFill>
-                  <a:srgbClr val="1E293B"/>
-                </a:solidFill>
-              </a:defRPr>
-            </a:pPr>
-            <a:r>
-              <a:t>• Users must manually parse physical cards, decipher bilingual labels, and fill 25+ form fields.</a:t>
-            </a:r>
-          </a:p>
-          <a:p>
-            <a:pPr>
-              <a:spcAft>
-                <a:spcPts val="600"/>
-              </a:spcAft>
-              <a:defRPr sz="1150">
-                <a:solidFill>
-                  <a:srgbClr val="1E293B"/>
-                </a:solidFill>
-              </a:defRPr>
-            </a:pPr>
-            <a:r>
-              <a:t>• Complex Indian address structures (Door No, Cross St, Taluk, PO, District) lack standardized separators.</a:t>
-            </a:r>
-          </a:p>
-          <a:p>
-            <a:pPr>
-              <a:spcAft>
-                <a:spcPts val="600"/>
-              </a:spcAft>
-              <a:defRPr sz="1150">
-                <a:solidFill>
-                  <a:srgbClr val="1E293B"/>
-                </a:solidFill>
-              </a:defRPr>
-            </a:pPr>
-            <a:r>
-              <a:t>• Clerical errors lead to voter roll rejections and repeated application cycles.</a:t>
+              <a:t>1. Too Much Manual Typing</a:t>
+            </a:r>
+          </a:p>
+          <a:p>
+            <a:pPr>
+              <a:spcAft>
+                <a:spcPts val="600"/>
+              </a:spcAft>
+              <a:defRPr sz="1150">
+                <a:solidFill>
+                  <a:srgbClr val="1E293B"/>
+                </a:solidFill>
+              </a:defRPr>
+            </a:pPr>
+            <a:r>
+              <a:t>• Users must type over 20 separate boxes by hand.</a:t>
+            </a:r>
+          </a:p>
+          <a:p>
+            <a:pPr>
+              <a:spcAft>
+                <a:spcPts val="600"/>
+              </a:spcAft>
+              <a:defRPr sz="1150">
+                <a:solidFill>
+                  <a:srgbClr val="1E293B"/>
+                </a:solidFill>
+              </a:defRPr>
+            </a:pPr>
+            <a:r>
+              <a:t>• Long numbers (12-digit Aadhaar UID) are easy to mistype.</a:t>
+            </a:r>
+          </a:p>
+          <a:p>
+            <a:pPr>
+              <a:spcAft>
+                <a:spcPts val="600"/>
+              </a:spcAft>
+              <a:defRPr sz="1150">
+                <a:solidFill>
+                  <a:srgbClr val="1E293B"/>
+                </a:solidFill>
+              </a:defRPr>
+            </a:pPr>
+            <a:r>
+              <a:t>• Address fields require splitting Door No, Street, and City manually.</a:t>
             </a:r>
           </a:p>
         </p:txBody>
@@ -11705,59 +11750,59 @@
               <a:spcAft>
                 <a:spcPts val="1000"/>
               </a:spcAft>
-              <a:defRPr sz="1500" b="1">
+              <a:defRPr sz="1450" b="1">
                 <a:solidFill>
                   <a:srgbClr val="E11D48"/>
                 </a:solidFill>
               </a:defRPr>
             </a:pPr>
             <a:r>
-              <a:t>2. PII Vulnerability &amp; DPDPA Compliance</a:t>
-            </a:r>
-          </a:p>
-          <a:p>
-            <a:pPr>
-              <a:spcAft>
-                <a:spcPts val="600"/>
-              </a:spcAft>
-              <a:defRPr sz="1150">
-                <a:solidFill>
-                  <a:srgbClr val="1E293B"/>
-                </a:solidFill>
-              </a:defRPr>
-            </a:pPr>
-            <a:r>
-              <a:t>• Sending Aadhaar/PAN cards to public cloud APIs violates the Digital Personal Data Protection Act (DPDPA 2023).</a:t>
-            </a:r>
-          </a:p>
-          <a:p>
-            <a:pPr>
-              <a:spcAft>
-                <a:spcPts val="600"/>
-              </a:spcAft>
-              <a:defRPr sz="1150">
-                <a:solidFill>
-                  <a:srgbClr val="1E293B"/>
-                </a:solidFill>
-              </a:defRPr>
-            </a:pPr>
-            <a:r>
-              <a:t>• Third-party commercial OCR APIs create persistent risk of database breaches and biometric theft.</a:t>
-            </a:r>
-          </a:p>
-          <a:p>
-            <a:pPr>
-              <a:spcAft>
-                <a:spcPts val="600"/>
-              </a:spcAft>
-              <a:defRPr sz="1150">
-                <a:solidFill>
-                  <a:srgbClr val="1E293B"/>
-                </a:solidFill>
-              </a:defRPr>
-            </a:pPr>
-            <a:r>
-              <a:t>• Public kiosks store raw scans on shared local hard drives without encryption or session purging.</a:t>
+              <a:t>2. Personal Data Privacy Risks</a:t>
+            </a:r>
+          </a:p>
+          <a:p>
+            <a:pPr>
+              <a:spcAft>
+                <a:spcPts val="600"/>
+              </a:spcAft>
+              <a:defRPr sz="1150">
+                <a:solidFill>
+                  <a:srgbClr val="1E293B"/>
+                </a:solidFill>
+              </a:defRPr>
+            </a:pPr>
+            <a:r>
+              <a:t>• Uploading ID cards to public online servers can leak private information.</a:t>
+            </a:r>
+          </a:p>
+          <a:p>
+            <a:pPr>
+              <a:spcAft>
+                <a:spcPts val="600"/>
+              </a:spcAft>
+              <a:defRPr sz="1150">
+                <a:solidFill>
+                  <a:srgbClr val="1E293B"/>
+                </a:solidFill>
+              </a:defRPr>
+            </a:pPr>
+            <a:r>
+              <a:t>• Cyber cafes store scanned cards on shared hard drives.</a:t>
+            </a:r>
+          </a:p>
+          <a:p>
+            <a:pPr>
+              <a:spcAft>
+                <a:spcPts val="600"/>
+              </a:spcAft>
+              <a:defRPr sz="1150">
+                <a:solidFill>
+                  <a:srgbClr val="1E293B"/>
+                </a:solidFill>
+              </a:defRPr>
+            </a:pPr>
+            <a:r>
+              <a:t>• Commercial OCR services cost money and save user data.</a:t>
             </a:r>
           </a:p>
         </p:txBody>
@@ -11833,59 +11878,59 @@
               <a:spcAft>
                 <a:spcPts val="1000"/>
               </a:spcAft>
-              <a:defRPr sz="1500" b="1">
-                <a:solidFill>
-                  <a:srgbClr val="0F2B48"/>
-                </a:solidFill>
-              </a:defRPr>
-            </a:pPr>
-            <a:r>
-              <a:t>3. Layout Ambiguity &amp; Noise in Indian IDs</a:t>
-            </a:r>
-          </a:p>
-          <a:p>
-            <a:pPr>
-              <a:spcAft>
-                <a:spcPts val="600"/>
-              </a:spcAft>
-              <a:defRPr sz="1150">
-                <a:solidFill>
-                  <a:srgbClr val="1E293B"/>
-                </a:solidFill>
-              </a:defRPr>
-            </a:pPr>
-            <a:r>
-              <a:t>• Indian e-Aadhaar PDFs contain extensive multi-lingual legal disclaimers that confuse generic OCR models.</a:t>
-            </a:r>
-          </a:p>
-          <a:p>
-            <a:pPr>
-              <a:spcAft>
-                <a:spcPts val="600"/>
-              </a:spcAft>
-              <a:defRPr sz="1150">
-                <a:solidFill>
-                  <a:srgbClr val="1E293B"/>
-                </a:solidFill>
-              </a:defRPr>
-            </a:pPr>
-            <a:r>
-              <a:t>• Enrolment 14-digit timestamps ('2726/50810/45592') are routinely mistaken for the 12-digit Aadhaar UID.</a:t>
-            </a:r>
-          </a:p>
-          <a:p>
-            <a:pPr>
-              <a:spcAft>
-                <a:spcPts val="600"/>
-              </a:spcAft>
-              <a:defRPr sz="1150">
-                <a:solidFill>
-                  <a:srgbClr val="1E293B"/>
-                </a:solidFill>
-              </a:defRPr>
-            </a:pPr>
-            <a:r>
-              <a:t>• Scanned PNG/JPEG photos suffer from glare, skewed rotations, and uneven contrast.</a:t>
+              <a:defRPr sz="1450" b="1">
+                <a:solidFill>
+                  <a:srgbClr val="1E293B"/>
+                </a:solidFill>
+              </a:defRPr>
+            </a:pPr>
+            <a:r>
+              <a:t>3. Confusing ID Card Text</a:t>
+            </a:r>
+          </a:p>
+          <a:p>
+            <a:pPr>
+              <a:spcAft>
+                <a:spcPts val="600"/>
+              </a:spcAft>
+              <a:defRPr sz="1150">
+                <a:solidFill>
+                  <a:srgbClr val="1E293B"/>
+                </a:solidFill>
+              </a:defRPr>
+            </a:pPr>
+            <a:r>
+              <a:t>• Aadhaar cards have 14-digit enrolment numbers that look like Aadhaar numbers.</a:t>
+            </a:r>
+          </a:p>
+          <a:p>
+            <a:pPr>
+              <a:spcAft>
+                <a:spcPts val="600"/>
+              </a:spcAft>
+              <a:defRPr sz="1150">
+                <a:solidFill>
+                  <a:srgbClr val="1E293B"/>
+                </a:solidFill>
+              </a:defRPr>
+            </a:pPr>
+            <a:r>
+              <a:t>• Cards contain long legal disclaimers that confuse normal scanning tools.</a:t>
+            </a:r>
+          </a:p>
+          <a:p>
+            <a:pPr>
+              <a:spcAft>
+                <a:spcPts val="600"/>
+              </a:spcAft>
+              <a:defRPr sz="1150">
+                <a:solidFill>
+                  <a:srgbClr val="1E293B"/>
+                </a:solidFill>
+              </a:defRPr>
+            </a:pPr>
+            <a:r>
+              <a:t>• Photos taken on mobile phones can be blurry, tilted, or faint.</a:t>
             </a:r>
           </a:p>
         </p:txBody>
@@ -11961,59 +12006,59 @@
               <a:spcAft>
                 <a:spcPts val="1000"/>
               </a:spcAft>
-              <a:defRPr sz="1500" b="1">
-                <a:solidFill>
-                  <a:srgbClr val="0F2B48"/>
-                </a:solidFill>
-              </a:defRPr>
-            </a:pPr>
-            <a:r>
-              <a:t>4. Absence of Automated Biometric Extraction</a:t>
-            </a:r>
-          </a:p>
-          <a:p>
-            <a:pPr>
-              <a:spcAft>
-                <a:spcPts val="600"/>
-              </a:spcAft>
-              <a:defRPr sz="1150">
-                <a:solidFill>
-                  <a:srgbClr val="1E293B"/>
-                </a:solidFill>
-              </a:defRPr>
-            </a:pPr>
-            <a:r>
-              <a:t>• No standard web form automatically crops applicant faces from identity cards.</a:t>
-            </a:r>
-          </a:p>
-          <a:p>
-            <a:pPr>
-              <a:spcAft>
-                <a:spcPts val="600"/>
-              </a:spcAft>
-              <a:defRPr sz="1150">
-                <a:solidFill>
-                  <a:srgbClr val="1E293B"/>
-                </a:solidFill>
-              </a:defRPr>
-            </a:pPr>
-            <a:r>
-              <a:t>• Users are forced to manually screenshot, crop, and resize portrait images to under 2MB.</a:t>
-            </a:r>
-          </a:p>
-          <a:p>
-            <a:pPr>
-              <a:spcAft>
-                <a:spcPts val="600"/>
-              </a:spcAft>
-              <a:defRPr sz="1150">
-                <a:solidFill>
-                  <a:srgbClr val="1E293B"/>
-                </a:solidFill>
-              </a:defRPr>
-            </a:pPr>
-            <a:r>
-              <a:t>• Resulting photos frequently include document stamps, text borders, or improper aspect ratios.</a:t>
+              <a:defRPr sz="1450" b="1">
+                <a:solidFill>
+                  <a:srgbClr val="1E293B"/>
+                </a:solidFill>
+              </a:defRPr>
+            </a:pPr>
+            <a:r>
+              <a:t>4. Photo Cropping Headache</a:t>
+            </a:r>
+          </a:p>
+          <a:p>
+            <a:pPr>
+              <a:spcAft>
+                <a:spcPts val="600"/>
+              </a:spcAft>
+              <a:defRPr sz="1150">
+                <a:solidFill>
+                  <a:srgbClr val="1E293B"/>
+                </a:solidFill>
+              </a:defRPr>
+            </a:pPr>
+            <a:r>
+              <a:t>• Websites require a separate passport-size photo under 2MB.</a:t>
+            </a:r>
+          </a:p>
+          <a:p>
+            <a:pPr>
+              <a:spcAft>
+                <a:spcPts val="600"/>
+              </a:spcAft>
+              <a:defRPr sz="1150">
+                <a:solidFill>
+                  <a:srgbClr val="1E293B"/>
+                </a:solidFill>
+              </a:defRPr>
+            </a:pPr>
+            <a:r>
+              <a:t>• Normal users do not know how to crop images properly.</a:t>
+            </a:r>
+          </a:p>
+          <a:p>
+            <a:pPr>
+              <a:spcAft>
+                <a:spcPts val="600"/>
+              </a:spcAft>
+              <a:defRPr sz="1150">
+                <a:solidFill>
+                  <a:srgbClr val="1E293B"/>
+                </a:solidFill>
+              </a:defRPr>
+            </a:pPr>
+            <a:r>
+              <a:t>• Users are forced to ask others for help or pay cyber cafes.</a:t>
             </a:r>
           </a:p>
         </p:txBody>
@@ -12152,7 +12197,7 @@
               </a:defRPr>
             </a:pPr>
             <a:r>
-              <a:t>RESEARCH OBJECTIVES &amp; TARGET MILESTONES</a:t>
+              <a:t>PROJECT GOALS</a:t>
             </a:r>
           </a:p>
         </p:txBody>
@@ -12180,14 +12225,14 @@
           <a:lstStyle/>
           <a:p>
             <a:pPr>
-              <a:defRPr sz="2200" b="1">
+              <a:defRPr sz="2100" b="1">
                 <a:solidFill>
                   <a:srgbClr val="FFFFFF"/>
                 </a:solidFill>
               </a:defRPr>
             </a:pPr>
             <a:r>
-              <a:t>Aim &amp; Specific Objectives of the Project</a:t>
+              <a:t>Aim &amp; Objectives of Our Project</a:t>
             </a:r>
           </a:p>
         </p:txBody>
@@ -12222,7 +12267,7 @@
               </a:defRPr>
             </a:pPr>
             <a:r>
-              <a:t>Dept of Computer Science &amp; Engineering | UG Project Phase-I Review | Team: Deva S, Athithi A, Arthi S</a:t>
+              <a:t>Dept of CSE | UG Project Review - 1 | Team: Deva S, Athithi A, Arthi S</a:t>
             </a:r>
           </a:p>
         </p:txBody>
@@ -12298,29 +12343,29 @@
               <a:spcAft>
                 <a:spcPts val="1000"/>
               </a:spcAft>
-              <a:defRPr sz="1500" b="1">
+              <a:defRPr sz="1450" b="1">
                 <a:solidFill>
                   <a:srgbClr val="2563EB"/>
                 </a:solidFill>
               </a:defRPr>
             </a:pPr>
             <a:r>
-              <a:t>PRIMARY AIM OF THE PROJECT  [Goal Statement]</a:t>
-            </a:r>
-          </a:p>
-          <a:p>
-            <a:pPr>
-              <a:spcAft>
-                <a:spcPts val="600"/>
-              </a:spcAft>
-              <a:defRPr sz="1150">
-                <a:solidFill>
-                  <a:srgbClr val="1E293B"/>
-                </a:solidFill>
-              </a:defRPr>
-            </a:pPr>
-            <a:r>
-              <a:t>• To design, develop, and benchmark an autonomous, edge-compatible, privacy-preserving document extraction system that ingests Indian identity documents (Aadhaar, PAN, Passport) and accurately auto-fills statutory election forms (NVSP Form 6) with verified 1:1 passport photo extraction in under 30 seconds with zero cloud dependency.</a:t>
+              <a:t>OUR MAIN AIM  [Primary Goal]</a:t>
+            </a:r>
+          </a:p>
+          <a:p>
+            <a:pPr>
+              <a:spcAft>
+                <a:spcPts val="600"/>
+              </a:spcAft>
+              <a:defRPr sz="1150">
+                <a:solidFill>
+                  <a:srgbClr val="1E293B"/>
+                </a:solidFill>
+              </a:defRPr>
+            </a:pPr>
+            <a:r>
+              <a:t>• To build a fast, free, and completely private web application that reads Indian ID cards (Aadhaar / PAN), automatically detects and crops the applicant's passport photo, and fills the Voter ID Form 6 in under 30 seconds.</a:t>
             </a:r>
           </a:p>
         </p:txBody>
@@ -12396,104 +12441,104 @@
               <a:spcAft>
                 <a:spcPts val="1000"/>
               </a:spcAft>
-              <a:defRPr sz="1500" b="1">
-                <a:solidFill>
-                  <a:srgbClr val="1E293B"/>
-                </a:solidFill>
-              </a:defRPr>
-            </a:pPr>
-            <a:r>
-              <a:t>Technical Objectives (1 &amp; 2)  [Ingestion &amp; OCR]</a:t>
-            </a:r>
-          </a:p>
-          <a:p>
-            <a:pPr>
-              <a:spcAft>
-                <a:spcPts val="600"/>
-              </a:spcAft>
-              <a:defRPr sz="1150">
-                <a:solidFill>
-                  <a:srgbClr val="1E293B"/>
-                </a:solidFill>
-              </a:defRPr>
-            </a:pPr>
-            <a:r>
-              <a:t>• Obj 1: Multi-Document Asynchronous Ingestion Engine</a:t>
-            </a:r>
-          </a:p>
-          <a:p>
-            <a:pPr>
-              <a:spcAft>
-                <a:spcPts val="600"/>
-              </a:spcAft>
-              <a:defRPr sz="1150">
-                <a:solidFill>
-                  <a:srgbClr val="1E293B"/>
-                </a:solidFill>
-              </a:defRPr>
-            </a:pPr>
-            <a:r>
-              <a:t>•   • Ingest multi-page PDFs, front/back PNG/JPEG scans concurrently.</a:t>
-            </a:r>
-          </a:p>
-          <a:p>
-            <a:pPr>
-              <a:spcAft>
-                <a:spcPts val="600"/>
-              </a:spcAft>
-              <a:defRPr sz="1150">
-                <a:solidFill>
-                  <a:srgbClr val="1E293B"/>
-                </a:solidFill>
-              </a:defRPr>
-            </a:pPr>
-            <a:r>
-              <a:t>•   • Provide accumulative drag-and-drop state management with instant UI chips.</a:t>
-            </a:r>
-          </a:p>
-          <a:p>
-            <a:pPr>
-              <a:spcAft>
-                <a:spcPts val="600"/>
-              </a:spcAft>
-              <a:defRPr sz="1150">
-                <a:solidFill>
-                  <a:srgbClr val="1E293B"/>
-                </a:solidFill>
-              </a:defRPr>
-            </a:pPr>
-            <a:r>
-              <a:t>• Obj 2: High-Precision Bilingual Glyph Extraction</a:t>
-            </a:r>
-          </a:p>
-          <a:p>
-            <a:pPr>
-              <a:spcAft>
-                <a:spcPts val="600"/>
-              </a:spcAft>
-              <a:defRPr sz="1150">
-                <a:solidFill>
-                  <a:srgbClr val="1E293B"/>
-                </a:solidFill>
-              </a:defRPr>
-            </a:pPr>
-            <a:r>
-              <a:t>•   • Deploy EasyOCR for localized text recognition across English and Indic scripts.</a:t>
-            </a:r>
-          </a:p>
-          <a:p>
-            <a:pPr>
-              <a:spcAft>
-                <a:spcPts val="600"/>
-              </a:spcAft>
-              <a:defRPr sz="1150">
-                <a:solidFill>
-                  <a:srgbClr val="1E293B"/>
-                </a:solidFill>
-              </a:defRPr>
-            </a:pPr>
-            <a:r>
-              <a:t>•   • Implement 300 DPI high-resolution page rendering via pypdfium2.</a:t>
+              <a:defRPr sz="1450" b="1">
+                <a:solidFill>
+                  <a:srgbClr val="1E293B"/>
+                </a:solidFill>
+              </a:defRPr>
+            </a:pPr>
+            <a:r>
+              <a:t>Objectives (1 &amp; 2): Reading &amp; Files  [Input &amp; OCR]</a:t>
+            </a:r>
+          </a:p>
+          <a:p>
+            <a:pPr>
+              <a:spcAft>
+                <a:spcPts val="600"/>
+              </a:spcAft>
+              <a:defRPr sz="1150">
+                <a:solidFill>
+                  <a:srgbClr val="1E293B"/>
+                </a:solidFill>
+              </a:defRPr>
+            </a:pPr>
+            <a:r>
+              <a:t>• Objective 1: Multi-Document Upload</a:t>
+            </a:r>
+          </a:p>
+          <a:p>
+            <a:pPr>
+              <a:spcAft>
+                <a:spcPts val="600"/>
+              </a:spcAft>
+              <a:defRPr sz="1150">
+                <a:solidFill>
+                  <a:srgbClr val="1E293B"/>
+                </a:solidFill>
+              </a:defRPr>
+            </a:pPr>
+            <a:r>
+              <a:t>•   • Allow users to upload both Front and Back images, or a single PDF.</a:t>
+            </a:r>
+          </a:p>
+          <a:p>
+            <a:pPr>
+              <a:spcAft>
+                <a:spcPts val="600"/>
+              </a:spcAft>
+              <a:defRPr sz="1150">
+                <a:solidFill>
+                  <a:srgbClr val="1E293B"/>
+                </a:solidFill>
+              </a:defRPr>
+            </a:pPr>
+            <a:r>
+              <a:t>•   • Show clear badges for attached files with an easy remove option.</a:t>
+            </a:r>
+          </a:p>
+          <a:p>
+            <a:pPr>
+              <a:spcAft>
+                <a:spcPts val="600"/>
+              </a:spcAft>
+              <a:defRPr sz="1150">
+                <a:solidFill>
+                  <a:srgbClr val="1E293B"/>
+                </a:solidFill>
+              </a:defRPr>
+            </a:pPr>
+            <a:r>
+              <a:t>• Objective 2: Accurate Text Reading (OCR)</a:t>
+            </a:r>
+          </a:p>
+          <a:p>
+            <a:pPr>
+              <a:spcAft>
+                <a:spcPts val="600"/>
+              </a:spcAft>
+              <a:defRPr sz="1150">
+                <a:solidFill>
+                  <a:srgbClr val="1E293B"/>
+                </a:solidFill>
+              </a:defRPr>
+            </a:pPr>
+            <a:r>
+              <a:t>•   • Use EasyOCR to read English and Tamil/regional text clearly.</a:t>
+            </a:r>
+          </a:p>
+          <a:p>
+            <a:pPr>
+              <a:spcAft>
+                <a:spcPts val="600"/>
+              </a:spcAft>
+              <a:defRPr sz="1150">
+                <a:solidFill>
+                  <a:srgbClr val="1E293B"/>
+                </a:solidFill>
+              </a:defRPr>
+            </a:pPr>
+            <a:r>
+              <a:t>•   • Convert PDFs to high-resolution images so small text is easily read.</a:t>
             </a:r>
           </a:p>
         </p:txBody>
@@ -12569,104 +12614,104 @@
               <a:spcAft>
                 <a:spcPts val="1000"/>
               </a:spcAft>
-              <a:defRPr sz="1500" b="1">
+              <a:defRPr sz="1450" b="1">
                 <a:solidFill>
                   <a:srgbClr val="10B981"/>
                 </a:solidFill>
               </a:defRPr>
             </a:pPr>
             <a:r>
-              <a:t>Intelligence Objectives (3 &amp; 4)  [LLM &amp; Vision]</a:t>
-            </a:r>
-          </a:p>
-          <a:p>
-            <a:pPr>
-              <a:spcAft>
-                <a:spcPts val="600"/>
-              </a:spcAft>
-              <a:defRPr sz="1150">
-                <a:solidFill>
-                  <a:srgbClr val="1E293B"/>
-                </a:solidFill>
-              </a:defRPr>
-            </a:pPr>
-            <a:r>
-              <a:t>• Obj 3: Local Semantic Structuring via Llama 3.2 SLM</a:t>
-            </a:r>
-          </a:p>
-          <a:p>
-            <a:pPr>
-              <a:spcAft>
-                <a:spcPts val="600"/>
-              </a:spcAft>
-              <a:defRPr sz="1150">
-                <a:solidFill>
-                  <a:srgbClr val="1E293B"/>
-                </a:solidFill>
-              </a:defRPr>
-            </a:pPr>
-            <a:r>
-              <a:t>•   • Utilize Meta Llama 3.2 (3B parameters) via Ollama for zero-leakage parsing.</a:t>
-            </a:r>
-          </a:p>
-          <a:p>
-            <a:pPr>
-              <a:spcAft>
-                <a:spcPts val="600"/>
-              </a:spcAft>
-              <a:defRPr sz="1150">
-                <a:solidFill>
-                  <a:srgbClr val="1E293B"/>
-                </a:solidFill>
-              </a:defRPr>
-            </a:pPr>
-            <a:r>
-              <a:t>•   • Prompt engineering for strict JSON schema output with relationship resolution.</a:t>
-            </a:r>
-          </a:p>
-          <a:p>
-            <a:pPr>
-              <a:spcAft>
-                <a:spcPts val="600"/>
-              </a:spcAft>
-              <a:defRPr sz="1150">
-                <a:solidFill>
-                  <a:srgbClr val="1E293B"/>
-                </a:solidFill>
-              </a:defRPr>
-            </a:pPr>
-            <a:r>
-              <a:t>• Obj 4: Deep Learning Facial Biometric Localization</a:t>
-            </a:r>
-          </a:p>
-          <a:p>
-            <a:pPr>
-              <a:spcAft>
-                <a:spcPts val="600"/>
-              </a:spcAft>
-              <a:defRPr sz="1150">
-                <a:solidFill>
-                  <a:srgbClr val="1E293B"/>
-                </a:solidFill>
-              </a:defRPr>
-            </a:pPr>
-            <a:r>
-              <a:t>•   • Integrate OpenCV YuNet ONNX neural network for &gt;= 92% accurate face localization.</a:t>
-            </a:r>
-          </a:p>
-          <a:p>
-            <a:pPr>
-              <a:spcAft>
-                <a:spcPts val="600"/>
-              </a:spcAft>
-              <a:defRPr sz="1150">
-                <a:solidFill>
-                  <a:srgbClr val="1E293B"/>
-                </a:solidFill>
-              </a:defRPr>
-            </a:pPr>
-            <a:r>
-              <a:t>•   • Auto-crop standard 1:1 passport photographs with adaptive margins and skin-filtering.</a:t>
+              <a:t>Objectives (3 &amp; 4): AI &amp; Face Cropping  [AI &amp; Vision]</a:t>
+            </a:r>
+          </a:p>
+          <a:p>
+            <a:pPr>
+              <a:spcAft>
+                <a:spcPts val="600"/>
+              </a:spcAft>
+              <a:defRPr sz="1150">
+                <a:solidFill>
+                  <a:srgbClr val="1E293B"/>
+                </a:solidFill>
+              </a:defRPr>
+            </a:pPr>
+            <a:r>
+              <a:t>• Objective 3: Smart Field Sorting (Local AI)</a:t>
+            </a:r>
+          </a:p>
+          <a:p>
+            <a:pPr>
+              <a:spcAft>
+                <a:spcPts val="600"/>
+              </a:spcAft>
+              <a:defRPr sz="1150">
+                <a:solidFill>
+                  <a:srgbClr val="1E293B"/>
+                </a:solidFill>
+              </a:defRPr>
+            </a:pPr>
+            <a:r>
+              <a:t>•   • Use Meta Llama 3.2 AI running on our laptop to sort words into Name, DOB, etc.</a:t>
+            </a:r>
+          </a:p>
+          <a:p>
+            <a:pPr>
+              <a:spcAft>
+                <a:spcPts val="600"/>
+              </a:spcAft>
+              <a:defRPr sz="1150">
+                <a:solidFill>
+                  <a:srgbClr val="1E293B"/>
+                </a:solidFill>
+              </a:defRPr>
+            </a:pPr>
+            <a:r>
+              <a:t>•   • Automatically identify Father's or Husband's name from 'S/O' or 'W/O'.</a:t>
+            </a:r>
+          </a:p>
+          <a:p>
+            <a:pPr>
+              <a:spcAft>
+                <a:spcPts val="600"/>
+              </a:spcAft>
+              <a:defRPr sz="1150">
+                <a:solidFill>
+                  <a:srgbClr val="1E293B"/>
+                </a:solidFill>
+              </a:defRPr>
+            </a:pPr>
+            <a:r>
+              <a:t>• Objective 4: Automatic Face Photo Cropping</a:t>
+            </a:r>
+          </a:p>
+          <a:p>
+            <a:pPr>
+              <a:spcAft>
+                <a:spcPts val="600"/>
+              </a:spcAft>
+              <a:defRPr sz="1150">
+                <a:solidFill>
+                  <a:srgbClr val="1E293B"/>
+                </a:solidFill>
+              </a:defRPr>
+            </a:pPr>
+            <a:r>
+              <a:t>•   • Use OpenCV YuNet face detection to find the person's face on the card.</a:t>
+            </a:r>
+          </a:p>
+          <a:p>
+            <a:pPr>
+              <a:spcAft>
+                <a:spcPts val="600"/>
+              </a:spcAft>
+              <a:defRPr sz="1150">
+                <a:solidFill>
+                  <a:srgbClr val="1E293B"/>
+                </a:solidFill>
+              </a:defRPr>
+            </a:pPr>
+            <a:r>
+              <a:t>•   • Automatically crop a clean passport-size photo without any text around it.</a:t>
             </a:r>
           </a:p>
         </p:txBody>
@@ -12805,7 +12850,7 @@
               </a:defRPr>
             </a:pPr>
             <a:r>
-              <a:t>STATE OF THE ART EVALUATION</a:t>
+              <a:t>PREVIOUS WORK COMPARISON</a:t>
             </a:r>
           </a:p>
         </p:txBody>
@@ -12833,14 +12878,14 @@
           <a:lstStyle/>
           <a:p>
             <a:pPr>
-              <a:defRPr sz="2200" b="1">
+              <a:defRPr sz="2100" b="1">
                 <a:solidFill>
                   <a:srgbClr val="FFFFFF"/>
                 </a:solidFill>
               </a:defRPr>
             </a:pPr>
             <a:r>
-              <a:t>Literature Review &amp; Comparative Analysis</a:t>
+              <a:t>Literature Review: What Existing Tools Do</a:t>
             </a:r>
           </a:p>
         </p:txBody>
@@ -12875,7 +12920,7 @@
               </a:defRPr>
             </a:pPr>
             <a:r>
-              <a:t>Dept of Computer Science &amp; Engineering | UG Project Phase-I Review | Team: Deva S, Athithi A, Arthi S</a:t>
+              <a:t>Dept of CSE | UG Project Review - 1 | Team: Deva S, Athithi A, Arthi S</a:t>
             </a:r>
           </a:p>
         </p:txBody>
@@ -12951,44 +12996,44 @@
               <a:spcAft>
                 <a:spcPts val="1000"/>
               </a:spcAft>
-              <a:defRPr sz="1500" b="1">
+              <a:defRPr sz="1450" b="1">
                 <a:solidFill>
                   <a:srgbClr val="2563EB"/>
                 </a:solidFill>
               </a:defRPr>
             </a:pPr>
             <a:r>
-              <a:t>1. Tesseract &amp; Indic Script Parsing (Smith et al.)</a:t>
-            </a:r>
-          </a:p>
-          <a:p>
-            <a:pPr>
-              <a:spcAft>
-                <a:spcPts val="600"/>
-              </a:spcAft>
-              <a:defRPr sz="1150">
-                <a:solidFill>
-                  <a:srgbClr val="1E293B"/>
-                </a:solidFill>
-              </a:defRPr>
-            </a:pPr>
-            <a:r>
-              <a:t>• Findings: High accuracy on standard Latin typography; significant degradation on Indic ligatures and complex conjuncts.</a:t>
-            </a:r>
-          </a:p>
-          <a:p>
-            <a:pPr>
-              <a:spcAft>
-                <a:spcPts val="600"/>
-              </a:spcAft>
-              <a:defRPr sz="1150">
-                <a:solidFill>
-                  <a:srgbClr val="1E293B"/>
-                </a:solidFill>
-              </a:defRPr>
-            </a:pPr>
-            <a:r>
-              <a:t>• Gap: Lacks contextual semantic understanding; fails to map extracted raw tokens into hierarchical JSON structures.</a:t>
+              <a:t>1. Standard OCR Tools (like Tesseract)</a:t>
+            </a:r>
+          </a:p>
+          <a:p>
+            <a:pPr>
+              <a:spcAft>
+                <a:spcPts val="600"/>
+              </a:spcAft>
+              <a:defRPr sz="1150">
+                <a:solidFill>
+                  <a:srgbClr val="1E293B"/>
+                </a:solidFill>
+              </a:defRPr>
+            </a:pPr>
+            <a:r>
+              <a:t>• What they do: Reads words from simple scanned papers.</a:t>
+            </a:r>
+          </a:p>
+          <a:p>
+            <a:pPr>
+              <a:spcAft>
+                <a:spcPts val="600"/>
+              </a:spcAft>
+              <a:defRPr sz="1150">
+                <a:solidFill>
+                  <a:srgbClr val="1E293B"/>
+                </a:solidFill>
+              </a:defRPr>
+            </a:pPr>
+            <a:r>
+              <a:t>• Drawback: Just gives a big list of words; does not know which word is 'Name' and which is 'City'. Fails on Indian regional languages.</a:t>
             </a:r>
           </a:p>
         </p:txBody>
@@ -13064,44 +13109,44 @@
               <a:spcAft>
                 <a:spcPts val="1000"/>
               </a:spcAft>
-              <a:defRPr sz="1500" b="1">
+              <a:defRPr sz="1450" b="1">
                 <a:solidFill>
                   <a:srgbClr val="2563EB"/>
                 </a:solidFill>
               </a:defRPr>
             </a:pPr>
             <a:r>
-              <a:t>2. Cloud Document AI &amp; Privacy Laws (Vaswani, 2023)</a:t>
-            </a:r>
-          </a:p>
-          <a:p>
-            <a:pPr>
-              <a:spcAft>
-                <a:spcPts val="600"/>
-              </a:spcAft>
-              <a:defRPr sz="1150">
-                <a:solidFill>
-                  <a:srgbClr val="1E293B"/>
-                </a:solidFill>
-              </a:defRPr>
-            </a:pPr>
-            <a:r>
-              <a:t>• Findings: Cloud APIs (AWS Textract, Google DocAI) achieve &gt;95% accuracy on standard US/EU tax forms.</a:t>
-            </a:r>
-          </a:p>
-          <a:p>
-            <a:pPr>
-              <a:spcAft>
-                <a:spcPts val="600"/>
-              </a:spcAft>
-              <a:defRPr sz="1150">
-                <a:solidFill>
-                  <a:srgbClr val="1E293B"/>
-                </a:solidFill>
-              </a:defRPr>
-            </a:pPr>
-            <a:r>
-              <a:t>• Gap: Significant latency (3-7s), recurring API dollar costs, and critical violation of Section 8 of India's DPDPA 2023.</a:t>
+              <a:t>2. Commercial Cloud APIs (Google Vision / AWS)</a:t>
+            </a:r>
+          </a:p>
+          <a:p>
+            <a:pPr>
+              <a:spcAft>
+                <a:spcPts val="600"/>
+              </a:spcAft>
+              <a:defRPr sz="1150">
+                <a:solidFill>
+                  <a:srgbClr val="1E293B"/>
+                </a:solidFill>
+              </a:defRPr>
+            </a:pPr>
+            <a:r>
+              <a:t>• What they do: Very good at reading documents and forms.</a:t>
+            </a:r>
+          </a:p>
+          <a:p>
+            <a:pPr>
+              <a:spcAft>
+                <a:spcPts val="600"/>
+              </a:spcAft>
+              <a:defRPr sz="1150">
+                <a:solidFill>
+                  <a:srgbClr val="1E293B"/>
+                </a:solidFill>
+              </a:defRPr>
+            </a:pPr>
+            <a:r>
+              <a:t>• Drawback: Charges money for every single scan, needs internet, and sends private citizen data to third-party servers.</a:t>
             </a:r>
           </a:p>
         </p:txBody>
@@ -13177,44 +13222,44 @@
               <a:spcAft>
                 <a:spcPts val="1000"/>
               </a:spcAft>
-              <a:defRPr sz="1500" b="1">
+              <a:defRPr sz="1450" b="1">
                 <a:solidFill>
                   <a:srgbClr val="2563EB"/>
                 </a:solidFill>
               </a:defRPr>
             </a:pPr>
             <a:r>
-              <a:t>3. LayoutLM &amp; Multi-Modal Form Transformers (Xu et al.)</a:t>
-            </a:r>
-          </a:p>
-          <a:p>
-            <a:pPr>
-              <a:spcAft>
-                <a:spcPts val="600"/>
-              </a:spcAft>
-              <a:defRPr sz="1150">
-                <a:solidFill>
-                  <a:srgbClr val="1E293B"/>
-                </a:solidFill>
-              </a:defRPr>
-            </a:pPr>
-            <a:r>
-              <a:t>• Findings: Joint 2D spatial coordinates and text tokens yield state-of-the-art information extraction.</a:t>
-            </a:r>
-          </a:p>
-          <a:p>
-            <a:pPr>
-              <a:spcAft>
-                <a:spcPts val="600"/>
-              </a:spcAft>
-              <a:defRPr sz="1150">
-                <a:solidFill>
-                  <a:srgbClr val="1E293B"/>
-                </a:solidFill>
-              </a:defRPr>
-            </a:pPr>
-            <a:r>
-              <a:t>• Gap: Requires multi-gigabyte GPU memory, impractical for commodity client desktops or low-spec kiosk machines.</a:t>
+              <a:t>3. Huge AI Models (like ChatGPT / Claude)</a:t>
+            </a:r>
+          </a:p>
+          <a:p>
+            <a:pPr>
+              <a:spcAft>
+                <a:spcPts val="600"/>
+              </a:spcAft>
+              <a:defRPr sz="1150">
+                <a:solidFill>
+                  <a:srgbClr val="1E293B"/>
+                </a:solidFill>
+              </a:defRPr>
+            </a:pPr>
+            <a:r>
+              <a:t>• What they do: Can understand forms very well.</a:t>
+            </a:r>
+          </a:p>
+          <a:p>
+            <a:pPr>
+              <a:spcAft>
+                <a:spcPts val="600"/>
+              </a:spcAft>
+              <a:defRPr sz="1150">
+                <a:solidFill>
+                  <a:srgbClr val="1E293B"/>
+                </a:solidFill>
+              </a:defRPr>
+            </a:pPr>
+            <a:r>
+              <a:t>• Drawback: Too large to run locally on a normal laptop; requires expensive graphic cards or paid internet subscriptions.</a:t>
             </a:r>
           </a:p>
         </p:txBody>
@@ -13290,44 +13335,44 @@
               <a:spcAft>
                 <a:spcPts val="1000"/>
               </a:spcAft>
-              <a:defRPr sz="1500" b="1">
+              <a:defRPr sz="1450" b="1">
                 <a:solidFill>
                   <a:srgbClr val="2563EB"/>
                 </a:solidFill>
               </a:defRPr>
             </a:pPr>
             <a:r>
-              <a:t>4. Edge Face Detectors: Haar vs. YuNet (Shi et al., 2023)</a:t>
-            </a:r>
-          </a:p>
-          <a:p>
-            <a:pPr>
-              <a:spcAft>
-                <a:spcPts val="600"/>
-              </a:spcAft>
-              <a:defRPr sz="1150">
-                <a:solidFill>
-                  <a:srgbClr val="1E293B"/>
-                </a:solidFill>
-              </a:defRPr>
-            </a:pPr>
-            <a:r>
-              <a:t>• Findings: Traditional Haar Cascades fail on skewed angles, low lighting, and watermarked document photos.</a:t>
-            </a:r>
-          </a:p>
-          <a:p>
-            <a:pPr>
-              <a:spcAft>
-                <a:spcPts val="600"/>
-              </a:spcAft>
-              <a:defRPr sz="1150">
-                <a:solidFill>
-                  <a:srgbClr val="1E293B"/>
-                </a:solidFill>
-              </a:defRPr>
-            </a:pPr>
-            <a:r>
-              <a:t>• Gap: YuNet (ONNX) delivers 92%+ precision with negligible compute overhead (232 KB model weight), ideal for edge deployment.</a:t>
+              <a:t>4. Our Approach: Lightweight Local AI</a:t>
+            </a:r>
+          </a:p>
+          <a:p>
+            <a:pPr>
+              <a:spcAft>
+                <a:spcPts val="600"/>
+              </a:spcAft>
+              <a:defRPr sz="1150">
+                <a:solidFill>
+                  <a:srgbClr val="1E293B"/>
+                </a:solidFill>
+              </a:defRPr>
+            </a:pPr>
+            <a:r>
+              <a:t>• What we do: We use EasyOCR for reading + Meta Llama 3.2 (small 3B model) for sorting + YuNet for face detection.</a:t>
+            </a:r>
+          </a:p>
+          <a:p>
+            <a:pPr>
+              <a:spcAft>
+                <a:spcPts val="600"/>
+              </a:spcAft>
+              <a:defRPr sz="1150">
+                <a:solidFill>
+                  <a:srgbClr val="1E293B"/>
+                </a:solidFill>
+              </a:defRPr>
+            </a:pPr>
+            <a:r>
+              <a:t>• Advantage: 100% Free, runs on any laptop, zero internet cost, and zero data leakage.</a:t>
             </a:r>
           </a:p>
         </p:txBody>
@@ -13466,7 +13511,7 @@
               </a:defRPr>
             </a:pPr>
             <a:r>
-              <a:t>CURRENT WORKFLOW ANALYSIS</a:t>
+              <a:t>MANUAL PROCESS</a:t>
             </a:r>
           </a:p>
         </p:txBody>
@@ -13494,14 +13539,14 @@
           <a:lstStyle/>
           <a:p>
             <a:pPr>
-              <a:defRPr sz="2200" b="1">
+              <a:defRPr sz="2100" b="1">
                 <a:solidFill>
                   <a:srgbClr val="FFFFFF"/>
                 </a:solidFill>
               </a:defRPr>
             </a:pPr>
             <a:r>
-              <a:t>Existing System Workflow: Manual Data Transcription</a:t>
+              <a:t>Existing System: How People Fill Forms Today</a:t>
             </a:r>
           </a:p>
         </p:txBody>
@@ -13536,7 +13581,7 @@
               </a:defRPr>
             </a:pPr>
             <a:r>
-              <a:t>Dept of Computer Science &amp; Engineering | UG Project Phase-I Review | Team: Deva S, Athithi A, Arthi S</a:t>
+              <a:t>Dept of CSE | UG Project Review - 1 | Team: Deva S, Athithi A, Arthi S</a:t>
             </a:r>
           </a:p>
         </p:txBody>
@@ -13612,74 +13657,74 @@
               <a:spcAft>
                 <a:spcPts val="1000"/>
               </a:spcAft>
-              <a:defRPr sz="1500" b="1">
-                <a:solidFill>
-                  <a:srgbClr val="1E293B"/>
-                </a:solidFill>
-              </a:defRPr>
-            </a:pPr>
-            <a:r>
-              <a:t>Manual Form-Filling Sequence (Steps 1-4)  [Cognitive Load]</a:t>
-            </a:r>
-          </a:p>
-          <a:p>
-            <a:pPr>
-              <a:spcAft>
-                <a:spcPts val="600"/>
-              </a:spcAft>
-              <a:defRPr sz="1150">
-                <a:solidFill>
-                  <a:srgbClr val="1E293B"/>
-                </a:solidFill>
-              </a:defRPr>
-            </a:pPr>
-            <a:r>
-              <a:t>• Step 1: Citizen accesses the ECI Voter Portal (voters.eci.gov.in) and selects Form 6.</a:t>
-            </a:r>
-          </a:p>
-          <a:p>
-            <a:pPr>
-              <a:spcAft>
-                <a:spcPts val="600"/>
-              </a:spcAft>
-              <a:defRPr sz="1150">
-                <a:solidFill>
-                  <a:srgbClr val="1E293B"/>
-                </a:solidFill>
-              </a:defRPr>
-            </a:pPr>
-            <a:r>
-              <a:t>• Step 2: User must manually read a physical or digital copy of their Aadhaar card.</a:t>
-            </a:r>
-          </a:p>
-          <a:p>
-            <a:pPr>
-              <a:spcAft>
-                <a:spcPts val="600"/>
-              </a:spcAft>
-              <a:defRPr sz="1150">
-                <a:solidFill>
-                  <a:srgbClr val="1E293B"/>
-                </a:solidFill>
-              </a:defRPr>
-            </a:pPr>
-            <a:r>
-              <a:t>• Step 3: User types 25+ discrete fields: Full Name, Relative Name, Relation Type, Mobile No, Email, Date of Birth, Gender.</a:t>
-            </a:r>
-          </a:p>
-          <a:p>
-            <a:pPr>
-              <a:spcAft>
-                <a:spcPts val="600"/>
-              </a:spcAft>
-              <a:defRPr sz="1150">
-                <a:solidFill>
-                  <a:srgbClr val="1E293B"/>
-                </a:solidFill>
-              </a:defRPr>
-            </a:pPr>
-            <a:r>
-              <a:t>• Step 4: User must parse their full address into individual fields: House/Door No, Street/Road, Village/Town, Post Office, PIN Code, District, and State.</a:t>
+              <a:defRPr sz="1450" b="1">
+                <a:solidFill>
+                  <a:srgbClr val="1E293B"/>
+                </a:solidFill>
+              </a:defRPr>
+            </a:pPr>
+            <a:r>
+              <a:t>Typing Details (Steps 1 to 4)  [Typing Friction]</a:t>
+            </a:r>
+          </a:p>
+          <a:p>
+            <a:pPr>
+              <a:spcAft>
+                <a:spcPts val="600"/>
+              </a:spcAft>
+              <a:defRPr sz="1150">
+                <a:solidFill>
+                  <a:srgbClr val="1E293B"/>
+                </a:solidFill>
+              </a:defRPr>
+            </a:pPr>
+            <a:r>
+              <a:t>• Step 1: The user opens the government website (NVSP Voter Portal).</a:t>
+            </a:r>
+          </a:p>
+          <a:p>
+            <a:pPr>
+              <a:spcAft>
+                <a:spcPts val="600"/>
+              </a:spcAft>
+              <a:defRPr sz="1150">
+                <a:solidFill>
+                  <a:srgbClr val="1E293B"/>
+                </a:solidFill>
+              </a:defRPr>
+            </a:pPr>
+            <a:r>
+              <a:t>• Step 2: They look at their Aadhaar card in one hand (or a PDF window on screen).</a:t>
+            </a:r>
+          </a:p>
+          <a:p>
+            <a:pPr>
+              <a:spcAft>
+                <a:spcPts val="600"/>
+              </a:spcAft>
+              <a:defRPr sz="1150">
+                <a:solidFill>
+                  <a:srgbClr val="1E293B"/>
+                </a:solidFill>
+              </a:defRPr>
+            </a:pPr>
+            <a:r>
+              <a:t>• Step 3: They type each detail manually: Name, Father's Name, Mobile Number, Email, Gender, and Date of Birth.</a:t>
+            </a:r>
+          </a:p>
+          <a:p>
+            <a:pPr>
+              <a:spcAft>
+                <a:spcPts val="600"/>
+              </a:spcAft>
+              <a:defRPr sz="1150">
+                <a:solidFill>
+                  <a:srgbClr val="1E293B"/>
+                </a:solidFill>
+              </a:defRPr>
+            </a:pPr>
+            <a:r>
+              <a:t>• Step 4: They manually split their address into House No, Street, Village, Post Office, District, and PIN code.</a:t>
             </a:r>
           </a:p>
         </p:txBody>
@@ -13755,74 +13800,74 @@
               <a:spcAft>
                 <a:spcPts val="1000"/>
               </a:spcAft>
-              <a:defRPr sz="1500" b="1">
-                <a:solidFill>
-                  <a:srgbClr val="1E293B"/>
-                </a:solidFill>
-              </a:defRPr>
-            </a:pPr>
-            <a:r>
-              <a:t>Biometrics &amp; Final Submission (Steps 5-8)  [Image Resizing Bottleneck]</a:t>
-            </a:r>
-          </a:p>
-          <a:p>
-            <a:pPr>
-              <a:spcAft>
-                <a:spcPts val="600"/>
-              </a:spcAft>
-              <a:defRPr sz="1150">
-                <a:solidFill>
-                  <a:srgbClr val="1E293B"/>
-                </a:solidFill>
-              </a:defRPr>
-            </a:pPr>
-            <a:r>
-              <a:t>• Step 5: User must open external image software (Paint, Photoshop) to manually crop their face portrait.</a:t>
-            </a:r>
-          </a:p>
-          <a:p>
-            <a:pPr>
-              <a:spcAft>
-                <a:spcPts val="600"/>
-              </a:spcAft>
-              <a:defRPr sz="1150">
-                <a:solidFill>
-                  <a:srgbClr val="1E293B"/>
-                </a:solidFill>
-              </a:defRPr>
-            </a:pPr>
-            <a:r>
-              <a:t>• Step 6: User compresses the photo to meet strict portal limits (&lt;2MB, 3.5cm x 4.5cm passport ratio).</a:t>
-            </a:r>
-          </a:p>
-          <a:p>
-            <a:pPr>
-              <a:spcAft>
-                <a:spcPts val="600"/>
-              </a:spcAft>
-              <a:defRPr sz="1150">
-                <a:solidFill>
-                  <a:srgbClr val="1E293B"/>
-                </a:solidFill>
-              </a:defRPr>
-            </a:pPr>
-            <a:r>
-              <a:t>• Step 7: Citizen attaches PDF/JPG identity proofs into separate upload buttons.</a:t>
-            </a:r>
-          </a:p>
-          <a:p>
-            <a:pPr>
-              <a:spcAft>
-                <a:spcPts val="600"/>
-              </a:spcAft>
-              <a:defRPr sz="1150">
-                <a:solidFill>
-                  <a:srgbClr val="1E293B"/>
-                </a:solidFill>
-              </a:defRPr>
-            </a:pPr>
-            <a:r>
-              <a:t>• Step 8: Submission is scrutinized by Booth Level Officers (BLO); typos trigger queries or rejections.</a:t>
+              <a:defRPr sz="1450" b="1">
+                <a:solidFill>
+                  <a:srgbClr val="1E293B"/>
+                </a:solidFill>
+              </a:defRPr>
+            </a:pPr>
+            <a:r>
+              <a:t>Photo Cropping (Steps 5 to 8)  [Image Editing]</a:t>
+            </a:r>
+          </a:p>
+          <a:p>
+            <a:pPr>
+              <a:spcAft>
+                <a:spcPts val="600"/>
+              </a:spcAft>
+              <a:defRPr sz="1150">
+                <a:solidFill>
+                  <a:srgbClr val="1E293B"/>
+                </a:solidFill>
+              </a:defRPr>
+            </a:pPr>
+            <a:r>
+              <a:t>• Step 5: The user takes a screenshot of their ID card and opens MS Paint or a mobile cropping app.</a:t>
+            </a:r>
+          </a:p>
+          <a:p>
+            <a:pPr>
+              <a:spcAft>
+                <a:spcPts val="600"/>
+              </a:spcAft>
+              <a:defRPr sz="1150">
+                <a:solidFill>
+                  <a:srgbClr val="1E293B"/>
+                </a:solidFill>
+              </a:defRPr>
+            </a:pPr>
+            <a:r>
+              <a:t>• Step 6: They manually crop around their face and try to resize the file to be under 2MB.</a:t>
+            </a:r>
+          </a:p>
+          <a:p>
+            <a:pPr>
+              <a:spcAft>
+                <a:spcPts val="600"/>
+              </a:spcAft>
+              <a:defRPr sz="1150">
+                <a:solidFill>
+                  <a:srgbClr val="1E293B"/>
+                </a:solidFill>
+              </a:defRPr>
+            </a:pPr>
+            <a:r>
+              <a:t>• Step 7: They upload the photo and identity documents one-by-one.</a:t>
+            </a:r>
+          </a:p>
+          <a:p>
+            <a:pPr>
+              <a:spcAft>
+                <a:spcPts val="600"/>
+              </a:spcAft>
+              <a:defRPr sz="1150">
+                <a:solidFill>
+                  <a:srgbClr val="1E293B"/>
+                </a:solidFill>
+              </a:defRPr>
+            </a:pPr>
+            <a:r>
+              <a:t>• Step 8: The entire process takes 10 to 15 minutes of slow, frustrating manual effort.</a:t>
             </a:r>
           </a:p>
         </p:txBody>
@@ -13961,7 +14006,7 @@
               </a:defRPr>
             </a:pPr>
             <a:r>
-              <a:t>SYSTEMIC VULNERABILITIES &amp; BOTTLENECKS</a:t>
+              <a:t>THE DRAWBACKS</a:t>
             </a:r>
           </a:p>
         </p:txBody>
@@ -13989,7 +14034,7 @@
           <a:lstStyle/>
           <a:p>
             <a:pPr>
-              <a:defRPr sz="2200" b="1">
+              <a:defRPr sz="2100" b="1">
                 <a:solidFill>
                   <a:srgbClr val="FFFFFF"/>
                 </a:solidFill>
@@ -14031,7 +14076,7 @@
               </a:defRPr>
             </a:pPr>
             <a:r>
-              <a:t>Dept of Computer Science &amp; Engineering | UG Project Phase-I Review | Team: Deva S, Athithi A, Arthi S</a:t>
+              <a:t>Dept of CSE | UG Project Review - 1 | Team: Deva S, Athithi A, Arthi S</a:t>
             </a:r>
           </a:p>
         </p:txBody>
@@ -14107,59 +14152,59 @@
               <a:spcAft>
                 <a:spcPts val="1000"/>
               </a:spcAft>
-              <a:defRPr sz="1500" b="1">
+              <a:defRPr sz="1450" b="1">
                 <a:solidFill>
                   <a:srgbClr val="E11D48"/>
                 </a:solidFill>
               </a:defRPr>
             </a:pPr>
             <a:r>
-              <a:t>High Clerical Error Rate (18-24%)</a:t>
-            </a:r>
-          </a:p>
-          <a:p>
-            <a:pPr>
-              <a:spcAft>
-                <a:spcPts val="600"/>
-              </a:spcAft>
-              <a:defRPr sz="1150">
-                <a:solidFill>
-                  <a:srgbClr val="1E293B"/>
-                </a:solidFill>
-              </a:defRPr>
-            </a:pPr>
-            <a:r>
-              <a:t>• Inverted Day and Month in Date of Birth (e.g. 02/11/2006 interpreted as Nov 2 vs Feb 11).</a:t>
-            </a:r>
-          </a:p>
-          <a:p>
-            <a:pPr>
-              <a:spcAft>
-                <a:spcPts val="600"/>
-              </a:spcAft>
-              <a:defRPr sz="1150">
-                <a:solidFill>
-                  <a:srgbClr val="1E293B"/>
-                </a:solidFill>
-              </a:defRPr>
-            </a:pPr>
-            <a:r>
-              <a:t>• Mismatched relation titles: typing 'S/O Shankar' into the name box while selecting 'Other'.</a:t>
-            </a:r>
-          </a:p>
-          <a:p>
-            <a:pPr>
-              <a:spcAft>
-                <a:spcPts val="600"/>
-              </a:spcAft>
-              <a:defRPr sz="1150">
-                <a:solidFill>
-                  <a:srgbClr val="1E293B"/>
-                </a:solidFill>
-              </a:defRPr>
-            </a:pPr>
-            <a:r>
-              <a:t>• Transposing digits in the 12-digit Aadhaar UID leading to failed verification queries.</a:t>
+              <a:t>1. High Chance of Mistakes</a:t>
+            </a:r>
+          </a:p>
+          <a:p>
+            <a:pPr>
+              <a:spcAft>
+                <a:spcPts val="600"/>
+              </a:spcAft>
+              <a:defRPr sz="1150">
+                <a:solidFill>
+                  <a:srgbClr val="1E293B"/>
+                </a:solidFill>
+              </a:defRPr>
+            </a:pPr>
+            <a:r>
+              <a:t>• People often type birth dates in the wrong format (like swapping day and month).</a:t>
+            </a:r>
+          </a:p>
+          <a:p>
+            <a:pPr>
+              <a:spcAft>
+                <a:spcPts val="600"/>
+              </a:spcAft>
+              <a:defRPr sz="1150">
+                <a:solidFill>
+                  <a:srgbClr val="1E293B"/>
+                </a:solidFill>
+              </a:defRPr>
+            </a:pPr>
+            <a:r>
+              <a:t>• Accidentally typing 'S/O Shankar' into the name box.</a:t>
+            </a:r>
+          </a:p>
+          <a:p>
+            <a:pPr>
+              <a:spcAft>
+                <a:spcPts val="600"/>
+              </a:spcAft>
+              <a:defRPr sz="1150">
+                <a:solidFill>
+                  <a:srgbClr val="1E293B"/>
+                </a:solidFill>
+              </a:defRPr>
+            </a:pPr>
+            <a:r>
+              <a:t>• Mistyping even one digit of the 12-digit Aadhaar number.</a:t>
             </a:r>
           </a:p>
         </p:txBody>
@@ -14235,59 +14280,59 @@
               <a:spcAft>
                 <a:spcPts val="1000"/>
               </a:spcAft>
-              <a:defRPr sz="1500" b="1">
+              <a:defRPr sz="1450" b="1">
                 <a:solidFill>
                   <a:srgbClr val="E11D48"/>
                 </a:solidFill>
               </a:defRPr>
             </a:pPr>
             <a:r>
-              <a:t>Severe Data Privacy &amp; Security Risks</a:t>
-            </a:r>
-          </a:p>
-          <a:p>
-            <a:pPr>
-              <a:spcAft>
-                <a:spcPts val="600"/>
-              </a:spcAft>
-              <a:defRPr sz="1150">
-                <a:solidFill>
-                  <a:srgbClr val="1E293B"/>
-                </a:solidFill>
-              </a:defRPr>
-            </a:pPr>
-            <a:r>
-              <a:t>• Citizens frequenting cyber cafes leave unredacted Aadhaar copies in browser download folders.</a:t>
-            </a:r>
-          </a:p>
-          <a:p>
-            <a:pPr>
-              <a:spcAft>
-                <a:spcPts val="600"/>
-              </a:spcAft>
-              <a:defRPr sz="1150">
-                <a:solidFill>
-                  <a:srgbClr val="1E293B"/>
-                </a:solidFill>
-              </a:defRPr>
-            </a:pPr>
-            <a:r>
-              <a:t>• Commercial third-party autofill browser plugins transmit cached user form data to external servers.</a:t>
-            </a:r>
-          </a:p>
-          <a:p>
-            <a:pPr>
-              <a:spcAft>
-                <a:spcPts val="600"/>
-              </a:spcAft>
-              <a:defRPr sz="1150">
-                <a:solidFill>
-                  <a:srgbClr val="1E293B"/>
-                </a:solidFill>
-              </a:defRPr>
-            </a:pPr>
-            <a:r>
-              <a:t>• Absence of client-side document isolation violates statutory privacy guidelines.</a:t>
+              <a:t>2. Privacy and Security Risks</a:t>
+            </a:r>
+          </a:p>
+          <a:p>
+            <a:pPr>
+              <a:spcAft>
+                <a:spcPts val="600"/>
+              </a:spcAft>
+              <a:defRPr sz="1150">
+                <a:solidFill>
+                  <a:srgbClr val="1E293B"/>
+                </a:solidFill>
+              </a:defRPr>
+            </a:pPr>
+            <a:r>
+              <a:t>• People leave unredacted Aadhaar copies in download folders at cyber cafes.</a:t>
+            </a:r>
+          </a:p>
+          <a:p>
+            <a:pPr>
+              <a:spcAft>
+                <a:spcPts val="600"/>
+              </a:spcAft>
+              <a:defRPr sz="1150">
+                <a:solidFill>
+                  <a:srgbClr val="1E293B"/>
+                </a:solidFill>
+              </a:defRPr>
+            </a:pPr>
+            <a:r>
+              <a:t>• Normal browser autofills save sensitive personal data unencrypted.</a:t>
+            </a:r>
+          </a:p>
+          <a:p>
+            <a:pPr>
+              <a:spcAft>
+                <a:spcPts val="600"/>
+              </a:spcAft>
+              <a:defRPr sz="1150">
+                <a:solidFill>
+                  <a:srgbClr val="1E293B"/>
+                </a:solidFill>
+              </a:defRPr>
+            </a:pPr>
+            <a:r>
+              <a:t>• High risk of identity theft for rural and non-technical citizens.</a:t>
             </a:r>
           </a:p>
         </p:txBody>
@@ -14363,59 +14408,59 @@
               <a:spcAft>
                 <a:spcPts val="1000"/>
               </a:spcAft>
-              <a:defRPr sz="1500" b="1">
+              <a:defRPr sz="1450" b="1">
                 <a:solidFill>
                   <a:srgbClr val="E11D48"/>
                 </a:solidFill>
               </a:defRPr>
             </a:pPr>
             <a:r>
-              <a:t>Severe Time Inefficiency</a:t>
-            </a:r>
-          </a:p>
-          <a:p>
-            <a:pPr>
-              <a:spcAft>
-                <a:spcPts val="600"/>
-              </a:spcAft>
-              <a:defRPr sz="1150">
-                <a:solidFill>
-                  <a:srgbClr val="1E293B"/>
-                </a:solidFill>
-              </a:defRPr>
-            </a:pPr>
-            <a:r>
-              <a:t>• Average form completion time: 10 to 15 minutes per applicant.</a:t>
-            </a:r>
-          </a:p>
-          <a:p>
-            <a:pPr>
-              <a:spcAft>
-                <a:spcPts val="600"/>
-              </a:spcAft>
-              <a:defRPr sz="1150">
-                <a:solidFill>
-                  <a:srgbClr val="1E293B"/>
-                </a:solidFill>
-              </a:defRPr>
-            </a:pPr>
-            <a:r>
-              <a:t>• Photo cropping, re-formatting, and uploading adds 5+ minutes of frustrating friction.</a:t>
-            </a:r>
-          </a:p>
-          <a:p>
-            <a:pPr>
-              <a:spcAft>
-                <a:spcPts val="600"/>
-              </a:spcAft>
-              <a:defRPr sz="1150">
-                <a:solidFill>
-                  <a:srgbClr val="1E293B"/>
-                </a:solidFill>
-              </a:defRPr>
-            </a:pPr>
-            <a:r>
-              <a:t>• High drop-off rates: First-time voters abandon online registration midway.</a:t>
+              <a:t>3. Waste of Time &amp; Money</a:t>
+            </a:r>
+          </a:p>
+          <a:p>
+            <a:pPr>
+              <a:spcAft>
+                <a:spcPts val="600"/>
+              </a:spcAft>
+              <a:defRPr sz="1150">
+                <a:solidFill>
+                  <a:srgbClr val="1E293B"/>
+                </a:solidFill>
+              </a:defRPr>
+            </a:pPr>
+            <a:r>
+              <a:t>• Takes 10–15 minutes per person; long queues at registration camps.</a:t>
+            </a:r>
+          </a:p>
+          <a:p>
+            <a:pPr>
+              <a:spcAft>
+                <a:spcPts val="600"/>
+              </a:spcAft>
+              <a:defRPr sz="1150">
+                <a:solidFill>
+                  <a:srgbClr val="1E293B"/>
+                </a:solidFill>
+              </a:defRPr>
+            </a:pPr>
+            <a:r>
+              <a:t>• Citizens pay Rs. 50 to Rs. 100 at internet centers just for basic form typing.</a:t>
+            </a:r>
+          </a:p>
+          <a:p>
+            <a:pPr>
+              <a:spcAft>
+                <a:spcPts val="600"/>
+              </a:spcAft>
+              <a:defRPr sz="1150">
+                <a:solidFill>
+                  <a:srgbClr val="1E293B"/>
+                </a:solidFill>
+              </a:defRPr>
+            </a:pPr>
+            <a:r>
+              <a:t>• Many first-time voters give up halfway because of photo size errors.</a:t>
             </a:r>
           </a:p>
         </p:txBody>
@@ -14491,59 +14536,59 @@
               <a:spcAft>
                 <a:spcPts val="1000"/>
               </a:spcAft>
-              <a:defRPr sz="1500" b="1">
+              <a:defRPr sz="1450" b="1">
                 <a:solidFill>
                   <a:srgbClr val="E11D48"/>
                 </a:solidFill>
               </a:defRPr>
             </a:pPr>
             <a:r>
-              <a:t>Zero Inherent Intelligence or Verification</a:t>
-            </a:r>
-          </a:p>
-          <a:p>
-            <a:pPr>
-              <a:spcAft>
-                <a:spcPts val="600"/>
-              </a:spcAft>
-              <a:defRPr sz="1150">
-                <a:solidFill>
-                  <a:srgbClr val="1E293B"/>
-                </a:solidFill>
-              </a:defRPr>
-            </a:pPr>
-            <a:r>
-              <a:t>• Existing HTML web forms only validate basic regex (e.g. 10 digits for mobile), not actual document consistency.</a:t>
-            </a:r>
-          </a:p>
-          <a:p>
-            <a:pPr>
-              <a:spcAft>
-                <a:spcPts val="600"/>
-              </a:spcAft>
-              <a:defRPr sz="1150">
-                <a:solidFill>
-                  <a:srgbClr val="1E293B"/>
-                </a:solidFill>
-              </a:defRPr>
-            </a:pPr>
-            <a:r>
-              <a:t>• No cross-verification between the uploaded supporting document and the typed inputs.</a:t>
-            </a:r>
-          </a:p>
-          <a:p>
-            <a:pPr>
-              <a:spcAft>
-                <a:spcPts val="600"/>
-              </a:spcAft>
-              <a:defRPr sz="1150">
-                <a:solidFill>
-                  <a:srgbClr val="1E293B"/>
-                </a:solidFill>
-              </a:defRPr>
-            </a:pPr>
-            <a:r>
-              <a:t>• Administrative burden pushed downstream onto government verification officers.</a:t>
+              <a:t>4. No Verification</a:t>
+            </a:r>
+          </a:p>
+          <a:p>
+            <a:pPr>
+              <a:spcAft>
+                <a:spcPts val="600"/>
+              </a:spcAft>
+              <a:defRPr sz="1150">
+                <a:solidFill>
+                  <a:srgbClr val="1E293B"/>
+                </a:solidFill>
+              </a:defRPr>
+            </a:pPr>
+            <a:r>
+              <a:t>• The website does not verify if the typed name matches the uploaded document.</a:t>
+            </a:r>
+          </a:p>
+          <a:p>
+            <a:pPr>
+              <a:spcAft>
+                <a:spcPts val="600"/>
+              </a:spcAft>
+              <a:defRPr sz="1150">
+                <a:solidFill>
+                  <a:srgbClr val="1E293B"/>
+                </a:solidFill>
+              </a:defRPr>
+            </a:pPr>
+            <a:r>
+              <a:t>• Government officers have to manually check every typo during physical verification.</a:t>
+            </a:r>
+          </a:p>
+          <a:p>
+            <a:pPr>
+              <a:spcAft>
+                <a:spcPts val="600"/>
+              </a:spcAft>
+              <a:defRPr sz="1150">
+                <a:solidFill>
+                  <a:srgbClr val="1E293B"/>
+                </a:solidFill>
+              </a:defRPr>
+            </a:pPr>
+            <a:r>
+              <a:t>• Creates a huge backlog of delayed voter identity cards.</a:t>
             </a:r>
           </a:p>
         </p:txBody>
